--- a/Curso Gas B/16 - UNE 60670 - Instalaciones en servicio y control periodico/16 - UNE 60670 - Instalaciones en servicio y control periodico - Vídeo 1.pptx
+++ b/Curso Gas B/16 - UNE 60670 - Instalaciones en servicio y control periodico/16 - UNE 60670 - Instalaciones en servicio y control periodico - Vídeo 1.pptx
@@ -25,6 +25,7 @@
     <p:sldId id="273" r:id="rId25"/>
     <p:sldId id="274" r:id="rId26"/>
     <p:sldId id="275" r:id="rId27"/>
+    <p:sldId id="276" r:id="rId28"/>
   </p:sldIdLst>
   <p:sldSz cx="12191695" cy="6858000" type="screen4x3"/>
   <p:notesSz cx="6858000" cy="9144000"/>
@@ -606,22 +607,22 @@
           <a:lstStyle/>
           <a:p>
             <a:r>
-              <a:t>N1: Si huelo a gas, lo primero es apagar todo, ¿no?</a:t>
-            </a:r>
-          </a:p>
-          <a:p>
-            <a:r>
-              <a:t>N2: Aquí está el error que mata, y cae en el examen. Mucha gente, al oler a gas, corre al interruptor a apagar la luz. Es un fallo gravísimo. Un simple chispazo del interruptor puede detonar la mezcla de aire y gas. La norma lo dice sin rodeos: no acciones ningún interruptor, ni para apagar ni para encender. Lo que haces es abrir ventanas para ventilar y cerrar la llave de paso del gas. Nada de chispas, nada de llamas.</a:t>
-            </a:r>
-          </a:p>
-          <a:p>
-            <a:r>
-              <a:t>N1: ¿Y si necesito luz para ver lo que hago?</a:t>
-            </a:r>
-          </a:p>
-          <a:p>
-            <a:r>
-              <a:t>N2: Si tienes que entrar en un recinto cerrado donde puede haber gas, primero verificas el ambiente con un detector homologado, conforme con las normas UNE-EN sesenta y un mil setecientos setenta y nueve. Y si necesitas iluminación, usas una linterna de seguridad, también llamada antideflagrante, que está diseñada para no producir chispas. Nunca la luz del techo, nunca la del móvil. Recuerda: ante olor a gas, manos fuera de los interruptores, ventila y cierra.</a:t>
+              <a:t>N1: ¿Nunca puedo trabajar con la instalación con gas dentro?</a:t>
+            </a:r>
+          </a:p>
+          <a:p>
+            <a:r>
+              <a:t>N2: La regla general es clarísima: antes de tocar tubería, corta el gas. Nada de modificaciones ni ampliaciones con la instalación en carga. Solo hay una excepción, y es que uses técnicas específicas para operar en carga, es decir, trabajar con la instalación con gas dentro. Pero eso exige medios y formación adecuados. Si no dominas esa técnica, la respuesta siempre es la misma: cierra primero.</a:t>
+            </a:r>
+          </a:p>
+          <a:p>
+            <a:r>
+              <a:t>N1: ¿Y por qué tanto cuidado al vaciar el gas de un tubo?</a:t>
+            </a:r>
+          </a:p>
+          <a:p>
+            <a:r>
+              <a:t>N2: Porque el gas solo arde o explota mezclado con aire en una proporción concreta, ni muy pobre ni muy rico. A esa franja se le llaman los límites de inflamabilidad, es decir, la zona en la que la mezcla es explosiva. Cuando vacías gas de una tubería, hay un momento en que esa mezcla pasa por la zona peligrosa. Por eso se ventila y se hace de forma controlada: para que dentro del local nunca llegue a formarse esa mezcla que salta por los aires. Vaciar sin ventilar es fabricar una bomba sin querer.</a:t>
             </a:r>
           </a:p>
         </p:txBody>
@@ -691,22 +692,22 @@
           <a:lstStyle/>
           <a:p>
             <a:r>
-              <a:t>N1: Si voy a cortar el gas para un trabajo programado, ¿basta con avisar de palabra?</a:t>
-            </a:r>
-          </a:p>
-          <a:p>
-            <a:r>
-              <a:t>N2: No: el aviso tiene que ser escrito y estar en un sitio visible, para que todos los usuarios afectados se enteren. Piensa en un montante de un edificio: cortas para hacer una obra y los vecinos se quedan sin gas. Un cartel en el portal, claro y por escrito, evita el susto y las reclamaciones. Y si el corte afecta a más de un usuario, además tienes que comunicarlo antes a la distribuidora, porque estás tocando algo que da servicio a varios.</a:t>
-            </a:r>
-          </a:p>
-          <a:p>
-            <a:r>
-              <a:t>N1: ¿Y para volver a dar el gas?</a:t>
-            </a:r>
-          </a:p>
-          <a:p>
-            <a:r>
-              <a:t>N2: Aquí viene la regla de oro que se repite en toda esta parte: antes de restablecer el suministro, comprueba que la instalación queda en aptitud de uso haciendo una comprobación de estanquidad a la presión de operación. En cristiano: no reabras nunca el gas sin comprobar antes que no hay ninguna fuga. Dar gas sin comprobar es meter la pata de la forma más peligrosa que existe.</a:t>
+              <a:t>N1: Si huelo a gas, lo primero es apagar todo, ¿no?</a:t>
+            </a:r>
+          </a:p>
+          <a:p>
+            <a:r>
+              <a:t>N2: Aquí está el error que mata, y cae en el examen. Mucha gente, al oler a gas, corre al interruptor a apagar la luz. Es un fallo gravísimo. Un simple chispazo del interruptor puede detonar la mezcla de aire y gas. La norma lo dice sin rodeos: no acciones ningún interruptor, ni para apagar ni para encender. Lo que haces es abrir ventanas para ventilar y cerrar la llave de paso del gas. Nada de chispas, nada de llamas.</a:t>
+            </a:r>
+          </a:p>
+          <a:p>
+            <a:r>
+              <a:t>N1: ¿Y si necesito luz para ver lo que hago?</a:t>
+            </a:r>
+          </a:p>
+          <a:p>
+            <a:r>
+              <a:t>N2: Si tienes que entrar en un recinto cerrado donde puede haber gas, primero verificas el ambiente con un detector homologado, conforme con las normas UNE-EN sesenta y un mil setecientos setenta y nueve. Y si necesitas iluminación, usas una linterna de seguridad, también llamada antideflagrante, que está diseñada para no producir chispas. Nunca la luz del techo, nunca la del móvil. Recuerda: ante olor a gas, manos fuera de los interruptores, ventila y cierra.</a:t>
             </a:r>
           </a:p>
         </p:txBody>
@@ -776,22 +777,22 @@
           <a:lstStyle/>
           <a:p>
             <a:r>
-              <a:t>N1: ¿Qué más da que sea reparación o modificación si al final toco la tubería?</a:t>
-            </a:r>
-          </a:p>
-          <a:p>
-            <a:r>
-              <a:t>N2: Da mucho, porque cambia lo que tienes que comprobar antes de dar gas, y la frontera es justo un metro. Si actúas sobre un tramo de un metro o menos, aunque cambies el material o el trazado, es una reparación: basta con comprobar la estanquidad del tramo reparado, a la presión de operación. Si el tramo es de más de un metro con cambio de material o trazado, o si amplías consumo, o si cambias un aparato por otro de características distintas, entonces es una modificación.</a:t>
-            </a:r>
-          </a:p>
-          <a:p>
-            <a:r>
-              <a:t>N1: ¿Y la modificación qué exige de más?</a:t>
-            </a:r>
-          </a:p>
-          <a:p>
-            <a:r>
-              <a:t>N2: Una prueba de estanquidad completa de la instalación, según la Norma UNE 60670-8, no solo mirar el trocito que tocaste. Chuleta para el examen y para la obra: poco tubo, es reparación y compruebas el tramo; mucho tubo, más consumo o aparato distinto, es modificación y toca prueba completa. Ese metro lo cambia todo, no lo olvides.</a:t>
+              <a:t>N1: Si voy a cortar el gas para un trabajo programado, ¿basta con avisar de palabra?</a:t>
+            </a:r>
+          </a:p>
+          <a:p>
+            <a:r>
+              <a:t>N2: No: el aviso tiene que ser escrito y estar en un sitio visible, para que todos los usuarios afectados se enteren. Piensa en un montante de un edificio: cortas para hacer una obra y los vecinos se quedan sin gas. Un cartel en el portal, claro y por escrito, evita el susto y las reclamaciones. Y si el corte afecta a más de un usuario, además tienes que comunicarlo antes a la distribuidora, porque estás tocando algo que da servicio a varios.</a:t>
+            </a:r>
+          </a:p>
+          <a:p>
+            <a:r>
+              <a:t>N1: ¿Y para volver a dar el gas?</a:t>
+            </a:r>
+          </a:p>
+          <a:p>
+            <a:r>
+              <a:t>N2: Aquí viene la regla de oro que se repite en toda esta parte: antes de restablecer el suministro, comprueba que la instalación queda en aptitud de uso haciendo una comprobación de estanquidad a la presión de operación. En cristiano: no reabras nunca el gas sin comprobar antes que no hay ninguna fuga. Dar gas sin comprobar es meter la pata de la forma más peligrosa que existe.</a:t>
             </a:r>
           </a:p>
         </p:txBody>
@@ -861,22 +862,22 @@
           <a:lstStyle/>
           <a:p>
             <a:r>
-              <a:t>N1: ¿Qué es un cambio de combustible en una instalación?</a:t>
-            </a:r>
-          </a:p>
-          <a:p>
-            <a:r>
-              <a:t>N2: Es pasar de un gas a otro. El caso típico es cambiar de butano o propano a gas natural, o al revés. Y no basta con enchufar el gas nuevo y ya. Tienes que dejar la instalación en condiciones de superar el control periódico con ese gas nuevo, el que definen las partes doce y trece que veremos en los siguientes vídeos. Es decir, la dejas como para que pase la revisión con el combustible que va a llevar de ahora en adelante.</a:t>
-            </a:r>
-          </a:p>
-          <a:p>
-            <a:r>
-              <a:t>N1: ¿Y ese detalle del manómetro por qué es tan concreto?</a:t>
-            </a:r>
-          </a:p>
-          <a:p>
-            <a:r>
-              <a:t>N2: Porque para comprobar la estanquidad hay que medir bien, y un manómetro mide mejor en la zona central de su escala. La norma pide un manómetro de esfera de clase uno coma seis, con la aguja trabajando entre el treinta y cinco y el setenta y cinco por ciento del fondo de escala. Ni al principio ni al final, donde el aparato mide peor. También vale un manómetro digital o uno de columna de agua. Quédate con la imagen: la aguja en el centro del reloj, ahí es donde te fías de la lectura.</a:t>
+              <a:t>N1: ¿Qué más da que sea reparación o modificación si al final toco la tubería?</a:t>
+            </a:r>
+          </a:p>
+          <a:p>
+            <a:r>
+              <a:t>N2: Da mucho, porque cambia lo que tienes que comprobar antes de dar gas, y la frontera es justo un metro. Si actúas sobre un tramo de un metro o menos, aunque cambies el material o el trazado, es una reparación: basta con comprobar la estanquidad del tramo reparado, a la presión de operación. Si el tramo es de más de un metro con cambio de material o trazado, o si amplías consumo, o si cambias un aparato por otro de características distintas, entonces es una modificación.</a:t>
+            </a:r>
+          </a:p>
+          <a:p>
+            <a:r>
+              <a:t>N1: ¿Y la modificación qué exige de más?</a:t>
+            </a:r>
+          </a:p>
+          <a:p>
+            <a:r>
+              <a:t>N2: Una prueba de estanquidad completa de la instalación, según la Norma UNE 60670-8, no solo mirar el trocito que tocaste. Chuleta para el examen y para la obra: poco tubo, es reparación y compruebas el tramo; mucho tubo, más consumo o aparato distinto, es modificación y toca prueba completa. Ese metro lo cambia todo, no lo olvides.</a:t>
             </a:r>
           </a:p>
         </p:txBody>
@@ -946,22 +947,22 @@
           <a:lstStyle/>
           <a:p>
             <a:r>
-              <a:t>N1: ¿Para qué sirve un puente antichispas al cambiar el contador?</a:t>
-            </a:r>
-          </a:p>
-          <a:p>
-            <a:r>
-              <a:t>N2: Vamos por partes. Cuando cortas la tubería para quitar el contador, puedes interrumpir una continuidad eléctrica que había de un lado a otro de la instalación. Si por esos tubos circulaba una pequeña corriente, justo en el momento de separar podría saltar una chispa, y saltaría precisamente donde hay gas. El puente antichispas es un cable que une eléctricamente la entrada y la salida antes de cortar, para que la corriente pase por el puente y no por el punto de corte. Se pone antes de tocar nada y se quita cuando ya está el contador nuevo montado.</a:t>
-            </a:r>
-          </a:p>
-          <a:p>
-            <a:r>
-              <a:t>N1: ¿Algo más que recordar del cambio de contador?</a:t>
-            </a:r>
-          </a:p>
-          <a:p>
-            <a:r>
-              <a:t>N2: Tres cosas. Una, el cambio solo lo hace personal autorizado por la distribuidora, no vas tú por libre. Dos, una vez montado el contador nuevo, hay que comprobar la estanquidad de sus uniones. Y tres, el equipo de medida se precinta al final. Regla para el examen: contador viejo, puente antes de tocarlo; contador nuevo, comprobar y precintar.</a:t>
+              <a:t>N1: ¿Qué es un cambio de combustible en una instalación?</a:t>
+            </a:r>
+          </a:p>
+          <a:p>
+            <a:r>
+              <a:t>N2: Es pasar de un gas a otro. El caso típico es cambiar de butano o propano a gas natural, o al revés. Y no basta con enchufar el gas nuevo y ya. Tienes que dejar la instalación en condiciones de superar el control periódico con ese gas nuevo, el que definen las partes doce y trece que veremos en los siguientes vídeos. Es decir, la dejas como para que pase la revisión con el combustible que va a llevar de ahora en adelante.</a:t>
+            </a:r>
+          </a:p>
+          <a:p>
+            <a:r>
+              <a:t>N1: ¿Y ese detalle del manómetro por qué es tan concreto?</a:t>
+            </a:r>
+          </a:p>
+          <a:p>
+            <a:r>
+              <a:t>N2: Porque para comprobar la estanquidad hay que medir bien, y un manómetro mide mejor en la zona central de su escala. La norma pide un manómetro de esfera de clase uno coma seis, con la aguja trabajando entre el treinta y cinco y el setenta y cinco por ciento del fondo de escala. Ni al principio ni al final, donde el aparato mide peor. También vale un manómetro digital o uno de columna de agua. Quédate con la imagen: la aguja en el centro del reloj, ahí es donde te fías de la lectura.</a:t>
             </a:r>
           </a:p>
         </p:txBody>
@@ -1031,22 +1032,22 @@
           <a:lstStyle/>
           <a:p>
             <a:r>
-              <a:t>N1: Si quito una cocina y no pongo otra, ¿basta con cerrar la llave?</a:t>
-            </a:r>
-          </a:p>
-          <a:p>
-            <a:r>
-              <a:t>N2: No, y es un fallo muy común. Anular un punto de consumo no es dejar la llave cerrada y marcharse. Tienes que hacer cuatro cosas con esa llave de aparato: cerrarla, bloquearla, precintarla y taponarla. Así te aseguras de que nadie la vuelve a abrir por descuido y de que por ahí no sale ni una molécula de gas. Y si además desmontas la llave, el tubo se cierra con un tapón soldado, no con un tapón de rosca cualquiera que alguien pueda aflojar.</a:t>
-            </a:r>
-          </a:p>
-          <a:p>
-            <a:r>
-              <a:t>N1: ¿Y después?</a:t>
-            </a:r>
-          </a:p>
-          <a:p>
-            <a:r>
-              <a:t>N2: Después, como siempre en esta parte, compruebas la estanquidad del cierre que has hecho, a la presión de operación. Ojo a un detalle de la tabla uno: anular puntos de consumo es una operación que solo hace la empresa instaladora, es decir, tú. No la distribuidora ni el SAT. Recuerda las cuatro palabras: cerrar, bloquear, precintar y taponar. Y comprobar.</a:t>
+              <a:t>N1: ¿Para qué sirve un puente antichispas al cambiar el contador?</a:t>
+            </a:r>
+          </a:p>
+          <a:p>
+            <a:r>
+              <a:t>N2: Vamos por partes. Cuando cortas la tubería para quitar el contador, puedes interrumpir una continuidad eléctrica que había de un lado a otro de la instalación. Si por esos tubos circulaba una pequeña corriente, justo en el momento de separar podría saltar una chispa, y saltaría precisamente donde hay gas. El puente antichispas es un cable que une eléctricamente la entrada y la salida antes de cortar, para que la corriente pase por el puente y no por el punto de corte. Se pone antes de tocar nada y se quita cuando ya está el contador nuevo montado.</a:t>
+            </a:r>
+          </a:p>
+          <a:p>
+            <a:r>
+              <a:t>N1: ¿Algo más que recordar del cambio de contador?</a:t>
+            </a:r>
+          </a:p>
+          <a:p>
+            <a:r>
+              <a:t>N2: Tres cosas. Una, el cambio solo lo hace personal autorizado por la distribuidora, no vas tú por libre. Dos, una vez montado el contador nuevo, hay que comprobar la estanquidad de sus uniones. Y tres, el equipo de medida se precinta al final. Regla para el examen: contador viejo, puente antes de tocarlo; contador nuevo, comprobar y precintar.</a:t>
             </a:r>
           </a:p>
         </p:txBody>
@@ -1116,22 +1117,22 @@
           <a:lstStyle/>
           <a:p>
             <a:r>
-              <a:t>N1: ¿En qué se diferencia cesar el suministro de anular un punto?</a:t>
-            </a:r>
-          </a:p>
-          <a:p>
-            <a:r>
-              <a:t>N2: Es una confusión típica, así que fíjate bien. Anular un punto de consumo, lo que vimos antes, es quitar un aparato de una instalación que sigue viva; lo hace la instaladora. El cese del suministro es dejar sin gas toda la instalación; y eso lo hace la distribuidora, no tú. Para cesar el suministro, la distribuidora cierra, precinta y tapona la llave de usuario o la del contador, o bien pone medios en remoto que detecten su estado y su manipulación para impedir que se vuelva a abrir.</a:t>
-            </a:r>
-          </a:p>
-          <a:p>
-            <a:r>
-              <a:t>N1: Entonces la palabra clave se repite en los dos casos, ¿no?</a:t>
-            </a:r>
-          </a:p>
-          <a:p>
-            <a:r>
-              <a:t>N2: Muy bien visto: en ambos aparece precintar y taponar. Lo que cambia es quién lo hace y el alcance. Anular un punto: instaladora, un solo aparato. Cesar el suministro: distribuidora, toda la instalación. Si tienes claro quién manda en cada cosa, no vuelves a confundirlos.</a:t>
+              <a:t>N1: Si quito una cocina y no pongo otra, ¿basta con cerrar la llave?</a:t>
+            </a:r>
+          </a:p>
+          <a:p>
+            <a:r>
+              <a:t>N2: No, y es un fallo muy común. Anular un punto de consumo no es dejar la llave cerrada y marcharse. Tienes que hacer cuatro cosas con esa llave de aparato: cerrarla, bloquearla, precintarla y taponarla. Así te aseguras de que nadie la vuelve a abrir por descuido y de que por ahí no sale ni una molécula de gas. Y si además desmontas la llave, el tubo se cierra con un tapón soldado, no con un tapón de rosca cualquiera que alguien pueda aflojar.</a:t>
+            </a:r>
+          </a:p>
+          <a:p>
+            <a:r>
+              <a:t>N1: ¿Y después?</a:t>
+            </a:r>
+          </a:p>
+          <a:p>
+            <a:r>
+              <a:t>N2: Después, como siempre en esta parte, compruebas la estanquidad del cierre que has hecho, a la presión de operación. Ojo a un detalle de la tabla uno: anular puntos de consumo es una operación que solo hace la empresa instaladora, es decir, tú. No la distribuidora ni el SAT. Recuerda las cuatro palabras: cerrar, bloquear, precintar y taponar. Y comprobar.</a:t>
             </a:r>
           </a:p>
         </p:txBody>
@@ -1201,22 +1202,22 @@
           <a:lstStyle/>
           <a:p>
             <a:r>
-              <a:t>N1: ¿Cuántas formas hay de comprobar la estanquidad?</a:t>
-            </a:r>
-          </a:p>
-          <a:p>
-            <a:r>
-              <a:t>N2: La norma te da tres técnicas, siempre a la presión de operación, y basta con usar una. La primera, un detector portátil de gas en los tramos que se ven y se alcanzan. La segunda, un manómetro de esfera de clase uno coma seis con la aguja entre el treinta y cinco y el setenta y cinco por ciento de la escala, o uno digital o de columna de agua. Y la tercera, la más casera pero muy usada: el giro de la métrica del contador. Cierras primero las llaves de los aparatos, luego la de entrada al contador, esperas un mínimo de cinco minutos, abres rápido la llave del contador y miras si la métrica registra consumo. Si se mueve, hay fuga.</a:t>
-            </a:r>
-          </a:p>
-          <a:p>
-            <a:r>
-              <a:t>N1: ¿Y para encontrar exactamente dónde escapa?</a:t>
-            </a:r>
-          </a:p>
-          <a:p>
-            <a:r>
-              <a:t>N2: Para localizar la fuga usas agua jabonosa, que burbujea justo donde escapa el gas, o un detector. Lo que jamás se hace es buscar una fuga con una llama. En el siguiente slide insistimos en esto porque es de examen seguro.</a:t>
+              <a:t>N1: ¿En qué se diferencia cesar el suministro de anular un punto?</a:t>
+            </a:r>
+          </a:p>
+          <a:p>
+            <a:r>
+              <a:t>N2: Es una confusión típica, así que fíjate bien. Anular un punto de consumo, lo que vimos antes, es quitar un aparato de una instalación que sigue viva; lo hace la instaladora. El cese del suministro es dejar sin gas toda la instalación; y eso lo hace la distribuidora, no tú. Para cesar el suministro, la distribuidora cierra, precinta y tapona la llave de usuario o la del contador, o bien pone medios en remoto que detecten su estado y su manipulación para impedir que se vuelva a abrir.</a:t>
+            </a:r>
+          </a:p>
+          <a:p>
+            <a:r>
+              <a:t>N1: Entonces la palabra clave se repite en los dos casos, ¿no?</a:t>
+            </a:r>
+          </a:p>
+          <a:p>
+            <a:r>
+              <a:t>N2: Muy bien visto: en ambos aparece precintar y taponar. Lo que cambia es quién lo hace y el alcance. Anular un punto: instaladora, un solo aparato. Cesar el suministro: distribuidora, toda la instalación. Si tienes claro quién manda en cada cosa, no vuelves a confundirlos.</a:t>
             </a:r>
           </a:p>
         </p:txBody>
@@ -1286,22 +1287,22 @@
           <a:lstStyle/>
           <a:p>
             <a:r>
-              <a:t>N1: ¿De verdad hay que decir que no se busca una fuga con un mechero?</a:t>
-            </a:r>
-          </a:p>
-          <a:p>
-            <a:r>
-              <a:t>N2: Suena a chiste, pero cae en el examen y en la vida real ha matado a gente. Jamás se localiza una fuga acercando una llama. Se usa agua jabonosa, que burbujea donde hay escape, o un detector. La llama solo sirve para volar por los aires. Es la regla más básica y la que más se salta la gente con prisa.</a:t>
-            </a:r>
-          </a:p>
-          <a:p>
-            <a:r>
-              <a:t>N1: ¿Y el detector vale para siempre?</a:t>
-            </a:r>
-          </a:p>
-          <a:p>
-            <a:r>
-              <a:t>N2: No, y este es el número importante: el detector portátil hay que calibrarlo, o verificarlo según las recomendaciones del fabricante, al menos cada dieciocho meses. ¿Por qué? Porque un detector descalibrado te puede decir «aquí no hay gas» cuando sí lo hay, y te vas tan tranquilo dejando una fuga. Quédate con ese dieciocho: es el mismo plazo que verás luego para los analizadores de combustión de la Parte trece. Un aparato de medida en el que no confías no es un aparato de seguridad.</a:t>
+              <a:t>N1: ¿Cuántas formas hay de comprobar la estanquidad?</a:t>
+            </a:r>
+          </a:p>
+          <a:p>
+            <a:r>
+              <a:t>N2: La norma te da tres técnicas, siempre a la presión de operación, y basta con usar una. La primera, un detector portátil de gas en los tramos que se ven y se alcanzan. La segunda, un manómetro de esfera de clase uno coma seis con la aguja entre el treinta y cinco y el setenta y cinco por ciento de la escala, o uno digital o de columna de agua. Y la tercera, la más casera pero muy usada: el giro de la métrica del contador. Cierras primero las llaves de los aparatos, luego la de entrada al contador, esperas un mínimo de cinco minutos, abres rápido la llave del contador y miras si la métrica registra consumo. Si se mueve, hay fuga.</a:t>
+            </a:r>
+          </a:p>
+          <a:p>
+            <a:r>
+              <a:t>N1: ¿Y para encontrar exactamente dónde escapa?</a:t>
+            </a:r>
+          </a:p>
+          <a:p>
+            <a:r>
+              <a:t>N2: Para localizar la fuga usas agua jabonosa, que burbujea justo donde escapa el gas, o un detector. Lo que jamás se hace es buscar una fuga con una llama. En el siguiente slide insistimos en esto porque es de examen seguro.</a:t>
             </a:r>
           </a:p>
         </p:txBody>
@@ -1371,22 +1372,22 @@
           <a:lstStyle/>
           <a:p>
             <a:r>
-              <a:t>N1: Cuando encuentro una fuga, ¿qué decido hacer con la instalación?</a:t>
-            </a:r>
-          </a:p>
-          <a:p>
-            <a:r>
-              <a:t>N2: La Parte once te da tres cajones donde meter cada instalación, y estos tres reaparecen en los vídeos dos y tres. Primero, apta para uso: no hay problema, sigue funcionando con normalidad. Segundo, en aptitud de uso pendiente de corrección: puede seguir con gas, pero hay algo que corregir, una fuga pequeña o una anomalía menor. Y tercero, no apta para uso: se deja fuera de servicio en el mismo momento en que localizas la fuga, precintando la llave que aísla el tramo afectado.</a:t>
-            </a:r>
-          </a:p>
-          <a:p>
-            <a:r>
-              <a:t>N1: ¿Y en cuáles tengo que avisar a la distribuidora?</a:t>
-            </a:r>
-          </a:p>
-          <a:p>
-            <a:r>
-              <a:t>N2: En los dos últimos: si la dejas pendiente de corrección o si es no apta, informas de inmediato a la empresa distribuidora. Y cuando consigas dejarla de nuevo apta, la vuelves a informar. Aquí la Parte once te dice el «qué hacer»; los litros por hora exactos que deciden en qué cajón cae cada fuga te llegan en los vídeos dos y tres. De momento, quédate con los tres estados y con el reflejo de avisar.</a:t>
+              <a:t>N1: ¿De verdad hay que decir que no se busca una fuga con un mechero?</a:t>
+            </a:r>
+          </a:p>
+          <a:p>
+            <a:r>
+              <a:t>N2: Suena a chiste, pero cae en el examen y en la vida real ha matado a gente. Jamás se localiza una fuga acercando una llama. Se usa agua jabonosa, que burbujea donde hay escape, o un detector. La llama solo sirve para volar por los aires. Es la regla más básica y la que más se salta la gente con prisa.</a:t>
+            </a:r>
+          </a:p>
+          <a:p>
+            <a:r>
+              <a:t>N1: ¿Y el detector vale para siempre?</a:t>
+            </a:r>
+          </a:p>
+          <a:p>
+            <a:r>
+              <a:t>N2: No, y este es el número importante: el detector portátil hay que calibrarlo, o verificarlo según las recomendaciones del fabricante, al menos cada dieciocho meses. ¿Por qué? Porque un detector descalibrado te puede decir «aquí no hay gas» cuando sí lo hay, y te vas tan tranquilo dejando una fuga. Quédate con ese dieciocho: es el mismo plazo que verás luego para los analizadores de combustión de la Parte trece. Un aparato de medida en el que no confías no es un aparato de seguridad.</a:t>
             </a:r>
           </a:p>
         </p:txBody>
@@ -1531,6 +1532,91 @@
           <a:lstStyle/>
           <a:p>
             <a:r>
+              <a:t>N1: Cuando encuentro una fuga, ¿qué decido hacer con la instalación?</a:t>
+            </a:r>
+          </a:p>
+          <a:p>
+            <a:r>
+              <a:t>N2: La Parte once te da tres cajones donde meter cada instalación, y estos tres reaparecen en los vídeos dos y tres. Primero, apta para uso: no hay problema, sigue funcionando con normalidad. Segundo, en aptitud de uso pendiente de corrección: puede seguir con gas, pero hay algo que corregir, una fuga pequeña o una anomalía menor. Y tercero, no apta para uso: se deja fuera de servicio en el mismo momento en que localizas la fuga, precintando la llave que aísla el tramo afectado.</a:t>
+            </a:r>
+          </a:p>
+          <a:p>
+            <a:r>
+              <a:t>N1: ¿Y en cuáles tengo que avisar a la distribuidora?</a:t>
+            </a:r>
+          </a:p>
+          <a:p>
+            <a:r>
+              <a:t>N2: En los dos últimos: si la dejas pendiente de corrección o si es no apta, informas de inmediato a la empresa distribuidora. Y cuando consigas dejarla de nuevo apta, la vuelves a informar. Aquí la Parte once te dice el «qué hacer»; los litros por hora exactos que deciden en qué cajón cae cada fuga te llegan en los vídeos dos y tres. De momento, quédate con los tres estados y con el reflejo de avisar.</a:t>
+            </a:r>
+          </a:p>
+        </p:txBody>
+      </p:sp>
+      <p:sp>
+        <p:nvSpPr>
+          <p:cNvPr id="4" name="Slide Number Placeholder 3"/>
+          <p:cNvSpPr>
+            <a:spLocks noGrp="1"/>
+          </p:cNvSpPr>
+          <p:nvPr>
+            <p:ph type="sldNum" idx="5" sz="quarter"/>
+          </p:nvPr>
+        </p:nvSpPr>
+        <p:spPr/>
+      </p:sp>
+    </p:spTree>
+  </p:cSld>
+  <p:clrMapOvr>
+    <a:masterClrMapping/>
+  </p:clrMapOvr>
+</p:notes>
+</file>
+
+<file path=ppt/notesSlides/notesSlide21.xml><?xml version="1.0" encoding="utf-8"?>
+<p:notes xmlns:a="http://schemas.openxmlformats.org/drawingml/2006/main" xmlns:p="http://schemas.openxmlformats.org/presentationml/2006/main" xmlns:r="http://schemas.openxmlformats.org/officeDocument/2006/relationships">
+  <p:cSld>
+    <p:spTree>
+      <p:nvGrpSpPr>
+        <p:cNvPr id="1" name=""/>
+        <p:cNvGrpSpPr/>
+        <p:nvPr/>
+      </p:nvGrpSpPr>
+      <p:grpSpPr>
+        <a:xfrm>
+          <a:off x="0" y="0"/>
+          <a:ext cx="0" cy="0"/>
+          <a:chOff x="0" y="0"/>
+          <a:chExt cx="0" cy="0"/>
+        </a:xfrm>
+      </p:grpSpPr>
+      <p:sp>
+        <p:nvSpPr>
+          <p:cNvPr id="2" name="Slide Image Placeholder 1"/>
+          <p:cNvSpPr>
+            <a:spLocks noGrp="1"/>
+          </p:cNvSpPr>
+          <p:nvPr>
+            <p:ph type="sldImg" idx="2"/>
+          </p:nvPr>
+        </p:nvSpPr>
+        <p:spPr/>
+      </p:sp>
+      <p:sp>
+        <p:nvSpPr>
+          <p:cNvPr id="3" name="Notes Placeholder 2"/>
+          <p:cNvSpPr>
+            <a:spLocks noGrp="1"/>
+          </p:cNvSpPr>
+          <p:nvPr>
+            <p:ph type="body" idx="3" sz="quarter"/>
+          </p:nvPr>
+        </p:nvSpPr>
+        <p:spPr/>
+        <p:txBody>
+          <a:bodyPr/>
+          <a:lstStyle/>
+          <a:p>
+            <a:r>
               <a:t>N1: Cerramos fuerte. Si me tengo que quedar con lo esencial, ¿qué es?</a:t>
             </a:r>
           </a:p>
@@ -1614,26 +1700,7 @@
         <p:txBody>
           <a:bodyPr/>
           <a:lstStyle/>
-          <a:p>
-            <a:r>
-              <a:t>N1: ¿Trece partes no son demasiadas para una sola norma?</a:t>
-            </a:r>
-          </a:p>
-          <a:p>
-            <a:r>
-              <a:t>N2: Parece mucho, pero tiene toda la lógica. Imagina la norma como un libro gordo con trece capítulos, todos bajo el mismo título: cómo hacer bien las instalaciones receptoras de gas hasta cinco bar. Cada capítulo se ocupa de una fase distinta: las tuberías, el diseño, los contadores, la ventilación, las pruebas de entrega... Las diez primeras partes van de construir y estrenar una instalación nueva. Las tres últimas, la once, la doce y la trece, van de lo contrario: de mantener y revisar lo que ya está funcionando.</a:t>
-            </a:r>
-          </a:p>
-          <a:p>
-            <a:r>
-              <a:t>N1: Entonces, ¿este tema solo mira esas tres últimas?</a:t>
-            </a:r>
-          </a:p>
-          <a:p>
-            <a:r>
-              <a:t>N2: Exacto. Quédate con esta regla que no falla: de la uno a la diez, construir y estrenar; la once, la doce y la trece, mantener y revisar. Todo lo que veas en este tema cae en ese segundo grupo, el de las instalaciones que ya tienen gas.</a:t>
-            </a:r>
-          </a:p>
+          <a:p/>
         </p:txBody>
       </p:sp>
       <p:sp>
@@ -1701,22 +1768,22 @@
           <a:lstStyle/>
           <a:p>
             <a:r>
-              <a:t>N1: ¿Qué es eso de MOP menor o igual a cinco bar?</a:t>
-            </a:r>
-          </a:p>
-          <a:p>
-            <a:r>
-              <a:t>N2: MOP son las siglas de presión máxima de operación; en llano, la presión más alta a la que trabaja normalmente esa instalación. La Parte once solo se ocupa de instalaciones que van a cinco bar o menos. ¿Por qué ese límite? Porque cinco bar es la frontera del mundo del gasista de categoría B: la baja y la media presión, la de las casas y los comercios de toda la vida. Si una instalación va por encima de cinco bar, ya es harina de otro costal y la regulan otras normas.</a:t>
-            </a:r>
-          </a:p>
-          <a:p>
-            <a:r>
-              <a:t>N1: ¿Y qué me da exactamente esta parte?</a:t>
-            </a:r>
-          </a:p>
-          <a:p>
-            <a:r>
-              <a:t>N2: Te da las directrices generales de actuación: el «cómo se hacen las cosas» cuando tocas una instalación que ya tiene gas. No entra en cada tornillo, sino en las reglas de oro: quién puede hacer qué, cómo protegerte y cómo comprobar que queda sin fugas. Es el marco donde encajan todas las operaciones que veremos ahora.</a:t>
+              <a:t>N1: ¿Trece partes no son demasiadas para una sola norma?</a:t>
+            </a:r>
+          </a:p>
+          <a:p>
+            <a:r>
+              <a:t>N2: Parece mucho, pero tiene toda la lógica. Imagina la norma como un libro gordo con trece capítulos, todos bajo el mismo título: cómo hacer bien las instalaciones receptoras de gas hasta cinco bar. Cada capítulo se ocupa de una fase distinta: las tuberías, el diseño, los contadores, la ventilación, las pruebas de entrega... Las diez primeras partes van de construir y estrenar una instalación nueva. Las tres últimas, la once, la doce y la trece, van de lo contrario: de mantener y revisar lo que ya está funcionando.</a:t>
+            </a:r>
+          </a:p>
+          <a:p>
+            <a:r>
+              <a:t>N1: Entonces, ¿este tema solo mira esas tres últimas?</a:t>
+            </a:r>
+          </a:p>
+          <a:p>
+            <a:r>
+              <a:t>N2: Exacto. Quédate con esta regla que no falla: de la uno a la diez, construir y estrenar; la once, la doce y la trece, mantener y revisar. Todo lo que veas en este tema cae en ese segundo grupo, el de las instalaciones que ya tienen gas.</a:t>
             </a:r>
           </a:p>
         </p:txBody>
@@ -1786,22 +1853,22 @@
           <a:lstStyle/>
           <a:p>
             <a:r>
-              <a:t>N1: ¿No puede cada uno hacer todo si sabe hacerlo?</a:t>
-            </a:r>
-          </a:p>
-          <a:p>
-            <a:r>
-              <a:t>N2: Pues no, y esto es clave. La tabla uno reparte el trabajo entre tres figuras, porque no todo el mundo manda sobre todo. La empresa distribuidora es la dueña de la red que llega a la calle: solo ella toca la llave de acometida, coloca o retira el contador y da de baja el suministro. La empresa instaladora, que eres tú, se ocupa de la instalación de dentro: modificas, reparas, corriges defectos y anulas puntos de consumo. Y el SAT, el servicio de asistencia técnica, solo entra en los aparatos: interrumpir o restablecer el gas a una caldera o a un calentador, nunca a las tuberías.</a:t>
-            </a:r>
-          </a:p>
-          <a:p>
-            <a:r>
-              <a:t>N1: ¿Y cómo lo recuerdo sin liarme?</a:t>
-            </a:r>
-          </a:p>
-          <a:p>
-            <a:r>
-              <a:t>N2: Con una frase: la distribuidora manda en lo de fuera y en el contador, tú mandas en la tubería de dentro, y el SAT solo en el aparato. Fíjate en las tres cosas que tú no puedes hacer solo: retirar o poner el contador y cesar el suministro. Y una que solo haces tú: anular puntos de consumo. En el examen te lo van a cruzar, así que ten claro el reparto.</a:t>
+              <a:t>N1: ¿Qué es eso de MOP menor o igual a cinco bar?</a:t>
+            </a:r>
+          </a:p>
+          <a:p>
+            <a:r>
+              <a:t>N2: MOP son las siglas de presión máxima de operación; en llano, la presión más alta a la que trabaja normalmente esa instalación. La Parte once solo se ocupa de instalaciones que van a cinco bar o menos. ¿Por qué ese límite? Porque cinco bar es la frontera del mundo del gasista de categoría B: la baja y la media presión, la de las casas y los comercios de toda la vida. Si una instalación va por encima de cinco bar, ya es harina de otro costal y la regulan otras normas.</a:t>
+            </a:r>
+          </a:p>
+          <a:p>
+            <a:r>
+              <a:t>N1: ¿Y qué me da exactamente esta parte?</a:t>
+            </a:r>
+          </a:p>
+          <a:p>
+            <a:r>
+              <a:t>N2: Te da las directrices generales de actuación: el «cómo se hacen las cosas» cuando tocas una instalación que ya tiene gas. No entra en cada tornillo, sino en las reglas de oro: quién puede hacer qué, cómo protegerte y cómo comprobar que queda sin fugas. Es el marco donde encajan todas las operaciones que veremos ahora.</a:t>
             </a:r>
           </a:p>
         </p:txBody>
@@ -1871,22 +1938,22 @@
           <a:lstStyle/>
           <a:p>
             <a:r>
-              <a:t>N1: ¿Por qué no puedo cerrar yo la llave de acometida si hace falta?</a:t>
-            </a:r>
-          </a:p>
-          <a:p>
-            <a:r>
-              <a:t>N2: Porque esa llave no es tuya, es de la red. La llave de acometida es la que separa la tubería de la calle, que es de la distribuidora, de tu instalación, la del edificio. Piénsalo como la llave de paso general del agua de todo el bloque: no la maneja cada vecino cuando le apetece, la controla quien es dueño de la red. Con el gas es igual: solo la distribuidora, o alguien a quien ella autorice expresamente, puede abrir o cerrar la acometida.</a:t>
-            </a:r>
-          </a:p>
-          <a:p>
-            <a:r>
-              <a:t>N1: ¿Y si tengo una urgencia?</a:t>
-            </a:r>
-          </a:p>
-          <a:p>
-            <a:r>
-              <a:t>N2: Avisas a la distribuidora, que es la que tiene que actuar ahí. Tú puedes cerrar las llaves de dentro de tu instalación, pero la acometida no se toca por libre. Grábate la palabra: sagrada. Un instalador que va a la calle a cerrar la acometida por su cuenta se está metiendo en un jardín serio, legal y de seguridad.</a:t>
+              <a:t>N1: ¿No puede cada uno hacer todo si sabe hacerlo?</a:t>
+            </a:r>
+          </a:p>
+          <a:p>
+            <a:r>
+              <a:t>N2: Pues no, y esto es clave. La tabla uno reparte el trabajo entre tres figuras, porque no todo el mundo manda sobre todo. La empresa distribuidora es la dueña de la red que llega a la calle: solo ella toca la llave de acometida, coloca o retira el contador y da de baja el suministro. La empresa instaladora, que eres tú, se ocupa de la instalación de dentro: modificas, reparas, corriges defectos y anulas puntos de consumo. Y el SAT, el servicio de asistencia técnica, solo entra en los aparatos: interrumpir o restablecer el gas a una caldera o a un calentador, nunca a las tuberías.</a:t>
+            </a:r>
+          </a:p>
+          <a:p>
+            <a:r>
+              <a:t>N1: ¿Y cómo lo recuerdo sin liarme?</a:t>
+            </a:r>
+          </a:p>
+          <a:p>
+            <a:r>
+              <a:t>N2: Con una frase: la distribuidora manda en lo de fuera y en el contador, tú mandas en la tubería de dentro, y el SAT solo en el aparato. Fíjate en las tres cosas que tú no puedes hacer solo: retirar o poner el contador y cesar el suministro. Y una que solo haces tú: anular puntos de consumo. En el examen te lo van a cruzar, así que ten claro el reparto.</a:t>
             </a:r>
           </a:p>
         </p:txBody>
@@ -1956,22 +2023,22 @@
           <a:lstStyle/>
           <a:p>
             <a:r>
-              <a:t>N1: ¿De verdad hay que escribir hasta lo más pequeño?</a:t>
-            </a:r>
-          </a:p>
-          <a:p>
-            <a:r>
-              <a:t>N2: Sí, y no es burocracia por fastidiar. La norma insiste en que de toda operación de esa tabla quede evidencia documental: un parte de trabajo, un albarán, un certificado... algo que diga qué tocaste y cuándo. La razón es puro sentido común de obra: si mañana esa instalación da un problema y no hay un papel que demuestre lo que hiciste, el marrón es tuyo, aunque lo hicieras perfecto.</a:t>
-            </a:r>
-          </a:p>
-          <a:p>
-            <a:r>
-              <a:t>N1: ¿Y si lo hice bien pero no lo apunté?</a:t>
-            </a:r>
-          </a:p>
-          <a:p>
-            <a:r>
-              <a:t>N2: Para efectos prácticos, es como si no lo hubieras hecho. Hay una frase que resume esto en el taller: lo que no está escrito, no se ha hecho. El papel te protege a ti tanto como al usuario. Acostúmbrate desde el primer día: acabas el trabajo, rellenas el documento, y así tienes las espaldas cubiertas.</a:t>
+              <a:t>N1: ¿Por qué no puedo cerrar yo la llave de acometida si hace falta?</a:t>
+            </a:r>
+          </a:p>
+          <a:p>
+            <a:r>
+              <a:t>N2: Porque esa llave no es tuya, es de la red. La llave de acometida es la que separa la tubería de la calle, que es de la distribuidora, de tu instalación, la del edificio. Piénsalo como la llave de paso general del agua de todo el bloque: no la maneja cada vecino cuando le apetece, la controla quien es dueño de la red. Con el gas es igual: solo la distribuidora, o alguien a quien ella autorice expresamente, puede abrir o cerrar la acometida.</a:t>
+            </a:r>
+          </a:p>
+          <a:p>
+            <a:r>
+              <a:t>N1: ¿Y si tengo una urgencia?</a:t>
+            </a:r>
+          </a:p>
+          <a:p>
+            <a:r>
+              <a:t>N2: Avisas a la distribuidora, que es la que tiene que actuar ahí. Tú puedes cerrar las llaves de dentro de tu instalación, pero la acometida no se toca por libre. Grábate la palabra: sagrada. Un instalador que va a la calle a cerrar la acometida por su cuenta se está metiendo en un jardín serio, legal y de seguridad.</a:t>
             </a:r>
           </a:p>
         </p:txBody>
@@ -2041,22 +2108,22 @@
           <a:lstStyle/>
           <a:p>
             <a:r>
-              <a:t>N1: Estas medidas parecen de cajón, ¿no?</a:t>
-            </a:r>
-          </a:p>
-          <a:p>
-            <a:r>
-              <a:t>N2: Parecen obvias, pero se olvidan más de lo que crees y por eso la norma las pone negro sobre blanco. No fumar mientras trabajas: una colilla y una fuga es una explosión. No trabajar donde haya fuegos encendidos, hogares o focos calientes: cualquier chispa o llama es un detonante esperando. No manipular las llaves que estén precintadas hasta reparar la avería: si están precintadas, es que alguien las cerró por seguridad, y saltártelo puede ser fatal.</a:t>
-            </a:r>
-          </a:p>
-          <a:p>
-            <a:r>
-              <a:t>N1: ¿Y si tengo que parar el trabajo a medias?</a:t>
-            </a:r>
-          </a:p>
-          <a:p>
-            <a:r>
-              <a:t>N2: Ahí está la última, que es finísima. Si interrumpes un trabajo, tienes que asegurarte de que no queda gas escapando y de que nadie va a manipular lo que dejaste a medias. Se bloquea la llave de corte si se puede, se ponen tapones... En obra pasa mucho: te vas a comer y dejas una unión abierta. Pues no: la aseguras antes de moverte. La seguridad no se toma un descanso.</a:t>
+              <a:t>N1: ¿De verdad hay que escribir hasta lo más pequeño?</a:t>
+            </a:r>
+          </a:p>
+          <a:p>
+            <a:r>
+              <a:t>N2: Sí, y no es burocracia por fastidiar. La norma insiste en que de toda operación de esa tabla quede evidencia documental: un parte de trabajo, un albarán, un certificado... algo que diga qué tocaste y cuándo. La razón es puro sentido común de obra: si mañana esa instalación da un problema y no hay un papel que demuestre lo que hiciste, el marrón es tuyo, aunque lo hicieras perfecto.</a:t>
+            </a:r>
+          </a:p>
+          <a:p>
+            <a:r>
+              <a:t>N1: ¿Y si lo hice bien pero no lo apunté?</a:t>
+            </a:r>
+          </a:p>
+          <a:p>
+            <a:r>
+              <a:t>N2: Para efectos prácticos, es como si no lo hubieras hecho. Hay una frase que resume esto en el taller: lo que no está escrito, no se ha hecho. El papel te protege a ti tanto como al usuario. Acostúmbrate desde el primer día: acabas el trabajo, rellenas el documento, y así tienes las espaldas cubiertas.</a:t>
             </a:r>
           </a:p>
         </p:txBody>
@@ -2126,22 +2193,22 @@
           <a:lstStyle/>
           <a:p>
             <a:r>
-              <a:t>N1: ¿Nunca puedo trabajar con la instalación con gas dentro?</a:t>
-            </a:r>
-          </a:p>
-          <a:p>
-            <a:r>
-              <a:t>N2: La regla general es clarísima: antes de tocar tubería, corta el gas. Nada de modificaciones ni ampliaciones con la instalación en carga. Solo hay una excepción, y es que uses técnicas específicas para operar en carga, es decir, trabajar con la instalación con gas dentro. Pero eso exige medios y formación adecuados. Si no dominas esa técnica, la respuesta siempre es la misma: cierra primero.</a:t>
-            </a:r>
-          </a:p>
-          <a:p>
-            <a:r>
-              <a:t>N1: ¿Y por qué tanto cuidado al vaciar el gas de un tubo?</a:t>
-            </a:r>
-          </a:p>
-          <a:p>
-            <a:r>
-              <a:t>N2: Porque el gas solo arde o explota mezclado con aire en una proporción concreta, ni muy pobre ni muy rico. A esa franja se le llaman los límites de inflamabilidad, es decir, la zona en la que la mezcla es explosiva. Cuando vacías gas de una tubería, hay un momento en que esa mezcla pasa por la zona peligrosa. Por eso se ventila y se hace de forma controlada: para que dentro del local nunca llegue a formarse esa mezcla que salta por los aires. Vaciar sin ventilar es fabricar una bomba sin querer.</a:t>
+              <a:t>N1: Estas medidas parecen de cajón, ¿no?</a:t>
+            </a:r>
+          </a:p>
+          <a:p>
+            <a:r>
+              <a:t>N2: Parecen obvias, pero se olvidan más de lo que crees y por eso la norma las pone negro sobre blanco. No fumar mientras trabajas: una colilla y una fuga es una explosión. No trabajar donde haya fuegos encendidos, hogares o focos calientes: cualquier chispa o llama es un detonante esperando. No manipular las llaves que estén precintadas hasta reparar la avería: si están precintadas, es que alguien las cerró por seguridad, y saltártelo puede ser fatal.</a:t>
+            </a:r>
+          </a:p>
+          <a:p>
+            <a:r>
+              <a:t>N1: ¿Y si tengo que parar el trabajo a medias?</a:t>
+            </a:r>
+          </a:p>
+          <a:p>
+            <a:r>
+              <a:t>N2: Ahí está la última, que es finísima. Si interrumpes un trabajo, tienes que asegurarte de que no queda gas escapando y de que nadie va a manipular lo que dejaste a medias. Se bloquea la llave de corte si se puede, se ponen tapones... En obra pasa mucho: te vas a comer y dejas una unión abierta. Pues no: la aseguras antes de moverte. La seguridad no se toma un descanso.</a:t>
             </a:r>
           </a:p>
         </p:txBody>
@@ -5216,7 +5283,7 @@
             <a:r>
               <a:rPr sz="1400" b="1" i="0">
                 <a:solidFill>
-                  <a:srgbClr val="CADCFC"/>
+                  <a:srgbClr val="F4A24C"/>
                 </a:solidFill>
                 <a:latin typeface="Montserrat"/>
               </a:rPr>
@@ -5227,13 +5294,57 @@
       </p:sp>
       <p:sp>
         <p:nvSpPr>
-          <p:cNvPr id="4" name="TextBox 3"/>
+          <p:cNvPr id="4" name="Rounded Rectangle 3"/>
+          <p:cNvSpPr/>
+          <p:nvPr/>
+        </p:nvSpPr>
+        <p:spPr>
+          <a:xfrm>
+            <a:off x="868680" y="2057400"/>
+            <a:ext cx="1463040" cy="82296"/>
+          </a:xfrm>
+          <a:prstGeom prst="roundRect">
+            <a:avLst/>
+          </a:prstGeom>
+          <a:solidFill>
+            <a:srgbClr val="E8801A"/>
+          </a:solidFill>
+          <a:ln>
+            <a:noFill/>
+          </a:ln>
+          <a:effectLst/>
+        </p:spPr>
+        <p:style>
+          <a:lnRef idx="1">
+            <a:schemeClr val="accent1"/>
+          </a:lnRef>
+          <a:fillRef idx="3">
+            <a:schemeClr val="accent1"/>
+          </a:fillRef>
+          <a:effectRef idx="2">
+            <a:schemeClr val="accent1"/>
+          </a:effectRef>
+          <a:fontRef idx="minor">
+            <a:schemeClr val="lt1"/>
+          </a:fontRef>
+        </p:style>
+        <p:txBody>
+          <a:bodyPr rtlCol="0" anchor="ctr"/>
+          <a:lstStyle/>
+          <a:p>
+            <a:pPr algn="ctr"/>
+          </a:p>
+        </p:txBody>
+      </p:sp>
+      <p:sp>
+        <p:nvSpPr>
+          <p:cNvPr id="5" name="TextBox 4"/>
           <p:cNvSpPr txBox="1"/>
           <p:nvPr/>
         </p:nvSpPr>
         <p:spPr>
           <a:xfrm>
-            <a:off x="822960" y="2194560"/>
+            <a:off x="822960" y="2286000"/>
             <a:ext cx="10515600" cy="2011680"/>
           </a:xfrm>
           <a:prstGeom prst="rect">
@@ -5272,7 +5383,7 @@
       </p:sp>
       <p:sp>
         <p:nvSpPr>
-          <p:cNvPr id="5" name="TextBox 4"/>
+          <p:cNvPr id="6" name="TextBox 5"/>
           <p:cNvSpPr txBox="1"/>
           <p:nvPr/>
         </p:nvSpPr>
@@ -5396,7 +5507,7 @@
                 </a:solidFill>
                 <a:latin typeface="Montserrat"/>
               </a:rPr>
-              <a:t>010 / 020</a:t>
+              <a:t>010 / 021</a:t>
             </a:r>
           </a:p>
         </p:txBody>
@@ -5444,7 +5555,7 @@
         <p:spPr>
           <a:xfrm>
             <a:off x="822960" y="457200"/>
-            <a:ext cx="8229600" cy="365760"/>
+            <a:ext cx="10058400" cy="365760"/>
           </a:xfrm>
           <a:prstGeom prst="rect">
             <a:avLst/>
@@ -5458,13 +5569,13 @@
           <a:lstStyle/>
           <a:p>
             <a:r>
-              <a:rPr sz="1200" b="1" i="0">
-                <a:solidFill>
-                  <a:srgbClr val="64748B"/>
-                </a:solidFill>
-                <a:latin typeface="Montserrat"/>
-              </a:rPr>
-              <a:t>PARTE 11 · APARTADO 3.2</a:t>
+              <a:rPr sz="1300" b="1" i="0">
+                <a:solidFill>
+                  <a:srgbClr val="E8801A"/>
+                </a:solidFill>
+                <a:latin typeface="Montserrat"/>
+              </a:rPr>
+              <a:t>PARTE 11 · APARTADO 3.1</a:t>
             </a:r>
           </a:p>
         </p:txBody>
@@ -5492,26 +5603,70 @@
           <a:lstStyle/>
           <a:p>
             <a:r>
-              <a:rPr sz="2700" b="1" i="0">
+              <a:rPr sz="2800" b="1" i="0">
                 <a:solidFill>
                   <a:srgbClr val="1E2761"/>
                 </a:solidFill>
                 <a:latin typeface="Montserrat"/>
               </a:rPr>
-              <a:t>Olor a gas: el error mortal</a:t>
-            </a:r>
-          </a:p>
-        </p:txBody>
-      </p:sp>
-      <p:sp>
-        <p:nvSpPr>
-          <p:cNvPr id="7" name="TextBox 6"/>
+              <a:t>Antes de tocar tubería, corta el gas</a:t>
+            </a:r>
+          </a:p>
+        </p:txBody>
+      </p:sp>
+      <p:sp>
+        <p:nvSpPr>
+          <p:cNvPr id="7" name="Rounded Rectangle 6"/>
+          <p:cNvSpPr/>
+          <p:nvPr/>
+        </p:nvSpPr>
+        <p:spPr>
+          <a:xfrm>
+            <a:off x="868680" y="1627632"/>
+            <a:ext cx="2011680" cy="73152"/>
+          </a:xfrm>
+          <a:prstGeom prst="roundRect">
+            <a:avLst/>
+          </a:prstGeom>
+          <a:solidFill>
+            <a:srgbClr val="E8801A"/>
+          </a:solidFill>
+          <a:ln>
+            <a:noFill/>
+          </a:ln>
+          <a:effectLst/>
+        </p:spPr>
+        <p:style>
+          <a:lnRef idx="1">
+            <a:schemeClr val="accent1"/>
+          </a:lnRef>
+          <a:fillRef idx="3">
+            <a:schemeClr val="accent1"/>
+          </a:fillRef>
+          <a:effectRef idx="2">
+            <a:schemeClr val="accent1"/>
+          </a:effectRef>
+          <a:fontRef idx="minor">
+            <a:schemeClr val="lt1"/>
+          </a:fontRef>
+        </p:style>
+        <p:txBody>
+          <a:bodyPr rtlCol="0" anchor="ctr"/>
+          <a:lstStyle/>
+          <a:p>
+            <a:pPr algn="ctr"/>
+          </a:p>
+        </p:txBody>
+      </p:sp>
+      <p:sp>
+        <p:nvSpPr>
+          <p:cNvPr id="8" name="TextBox 7"/>
           <p:cNvSpPr txBox="1"/>
           <p:nvPr/>
         </p:nvSpPr>
         <p:spPr>
           <a:xfrm>
-            <a:off x="822960" y="1920240"/>
+            <a:off x="822960" y="1965960"/>
             <a:ext cx="4983480" cy="4206240"/>
           </a:xfrm>
           <a:prstGeom prst="rect">
@@ -5527,17 +5682,17 @@
           <a:p>
             <a:pPr>
               <a:spcAft>
-                <a:spcPts val="1000"/>
+                <a:spcPts val="1100"/>
               </a:spcAft>
             </a:pPr>
             <a:r>
               <a:rPr sz="1600" b="1" i="0">
                 <a:solidFill>
-                  <a:srgbClr val="2E3A80"/>
-                </a:solidFill>
-                <a:latin typeface="Montserrat"/>
-              </a:rPr>
-              <a:t>•  </a:t>
+                  <a:srgbClr val="E8801A"/>
+                </a:solidFill>
+                <a:latin typeface="Montserrat"/>
+              </a:rPr>
+              <a:t>▸  </a:t>
             </a:r>
             <a:r>
               <a:rPr sz="1600" b="0" i="0">
@@ -5546,23 +5701,23 @@
                 </a:solidFill>
                 <a:latin typeface="Montserrat"/>
               </a:rPr>
-              <a:t>No accionar ningún interruptor</a:t>
+              <a:t>No modificar ni ampliar sin cerrar el gas</a:t>
             </a:r>
           </a:p>
           <a:p>
             <a:pPr>
               <a:spcAft>
-                <a:spcPts val="1000"/>
+                <a:spcPts val="1100"/>
               </a:spcAft>
             </a:pPr>
             <a:r>
               <a:rPr sz="1600" b="1" i="0">
                 <a:solidFill>
-                  <a:srgbClr val="2E3A80"/>
-                </a:solidFill>
-                <a:latin typeface="Montserrat"/>
-              </a:rPr>
-              <a:t>•  </a:t>
+                  <a:srgbClr val="E8801A"/>
+                </a:solidFill>
+                <a:latin typeface="Montserrat"/>
+              </a:rPr>
+              <a:t>▸  </a:t>
             </a:r>
             <a:r>
               <a:rPr sz="1600" b="0" i="0">
@@ -5571,23 +5726,23 @@
                 </a:solidFill>
                 <a:latin typeface="Montserrat"/>
               </a:rPr>
-              <a:t>Ni apagar luces ni generar chispas</a:t>
+              <a:t>Excepción: operar en carga con técnica adecuada</a:t>
             </a:r>
           </a:p>
           <a:p>
             <a:pPr>
               <a:spcAft>
-                <a:spcPts val="1000"/>
+                <a:spcPts val="1100"/>
               </a:spcAft>
             </a:pPr>
             <a:r>
               <a:rPr sz="1600" b="1" i="0">
                 <a:solidFill>
-                  <a:srgbClr val="2E3A80"/>
-                </a:solidFill>
-                <a:latin typeface="Montserrat"/>
-              </a:rPr>
-              <a:t>•  </a:t>
+                  <a:srgbClr val="E8801A"/>
+                </a:solidFill>
+                <a:latin typeface="Montserrat"/>
+              </a:rPr>
+              <a:t>▸  </a:t>
             </a:r>
             <a:r>
               <a:rPr sz="1600" b="0" i="0">
@@ -5596,39 +5751,14 @@
                 </a:solidFill>
                 <a:latin typeface="Montserrat"/>
               </a:rPr>
-              <a:t>Ventilar y cerrar la llave de paso</a:t>
-            </a:r>
-          </a:p>
-          <a:p>
-            <a:pPr>
-              <a:spcAft>
-                <a:spcPts val="1000"/>
-              </a:spcAft>
-            </a:pPr>
-            <a:r>
-              <a:rPr sz="1600" b="1" i="0">
-                <a:solidFill>
-                  <a:srgbClr val="2E3A80"/>
-                </a:solidFill>
-                <a:latin typeface="Montserrat"/>
-              </a:rPr>
-              <a:t>•  </a:t>
-            </a:r>
-            <a:r>
-              <a:rPr sz="1600" b="0" i="0">
-                <a:solidFill>
-                  <a:srgbClr val="1B2330"/>
-                </a:solidFill>
-                <a:latin typeface="Montserrat"/>
-              </a:rPr>
-              <a:t>Detector UNE-EN 61779; linterna de seguridad</a:t>
-            </a:r>
-          </a:p>
-        </p:txBody>
-      </p:sp>
-      <p:sp>
-        <p:nvSpPr>
-          <p:cNvPr id="8" name="imgph" descr="IMGQ:opening window ventilation gas leak"/>
+              <a:t>Al vaciar gas, evitar mezcla inflamable</a:t>
+            </a:r>
+          </a:p>
+        </p:txBody>
+      </p:sp>
+      <p:sp>
+        <p:nvSpPr>
+          <p:cNvPr id="9" name="imgph" descr="IMGQ:hand closing gas shut off valve"/>
           <p:cNvSpPr/>
           <p:nvPr/>
         </p:nvSpPr>
@@ -5674,7 +5804,7 @@
       </p:sp>
       <p:sp>
         <p:nvSpPr>
-          <p:cNvPr id="9" name="TextBox 8"/>
+          <p:cNvPr id="10" name="TextBox 9"/>
           <p:cNvSpPr txBox="1"/>
           <p:nvPr/>
         </p:nvSpPr>
@@ -5714,7 +5844,7 @@
                 </a:solidFill>
                 <a:latin typeface="Montserrat"/>
               </a:rPr>
-              <a:t>opening window ventilation gas leak</a:t>
+              <a:t>hand closing gas shut off valve</a:t>
             </a:r>
           </a:p>
         </p:txBody>
@@ -5811,7 +5941,7 @@
                 </a:solidFill>
                 <a:latin typeface="Montserrat"/>
               </a:rPr>
-              <a:t>011 / 020</a:t>
+              <a:t>011 / 021</a:t>
             </a:r>
           </a:p>
         </p:txBody>
@@ -5859,7 +5989,7 @@
         <p:spPr>
           <a:xfrm>
             <a:off x="822960" y="457200"/>
-            <a:ext cx="8229600" cy="365760"/>
+            <a:ext cx="10058400" cy="365760"/>
           </a:xfrm>
           <a:prstGeom prst="rect">
             <a:avLst/>
@@ -5873,13 +6003,13 @@
           <a:lstStyle/>
           <a:p>
             <a:r>
-              <a:rPr sz="1200" b="1" i="0">
-                <a:solidFill>
-                  <a:srgbClr val="64748B"/>
-                </a:solidFill>
-                <a:latin typeface="Montserrat"/>
-              </a:rPr>
-              <a:t>PARTE 11 · APARTADO 4.1</a:t>
+              <a:rPr sz="1300" b="1" i="0">
+                <a:solidFill>
+                  <a:srgbClr val="E8801A"/>
+                </a:solidFill>
+                <a:latin typeface="Montserrat"/>
+              </a:rPr>
+              <a:t>PARTE 11 · APARTADO 3.2</a:t>
             </a:r>
           </a:p>
         </p:txBody>
@@ -5907,26 +6037,70 @@
           <a:lstStyle/>
           <a:p>
             <a:r>
-              <a:rPr sz="2700" b="1" i="0">
+              <a:rPr sz="2800" b="1" i="0">
                 <a:solidFill>
                   <a:srgbClr val="1E2761"/>
                 </a:solidFill>
                 <a:latin typeface="Montserrat"/>
               </a:rPr>
-              <a:t>Interrupción y restablecimiento</a:t>
-            </a:r>
-          </a:p>
-        </p:txBody>
-      </p:sp>
-      <p:sp>
-        <p:nvSpPr>
-          <p:cNvPr id="7" name="TextBox 6"/>
+              <a:t>Olor a gas: el error mortal</a:t>
+            </a:r>
+          </a:p>
+        </p:txBody>
+      </p:sp>
+      <p:sp>
+        <p:nvSpPr>
+          <p:cNvPr id="7" name="Rounded Rectangle 6"/>
+          <p:cNvSpPr/>
+          <p:nvPr/>
+        </p:nvSpPr>
+        <p:spPr>
+          <a:xfrm>
+            <a:off x="868680" y="1627632"/>
+            <a:ext cx="2011680" cy="73152"/>
+          </a:xfrm>
+          <a:prstGeom prst="roundRect">
+            <a:avLst/>
+          </a:prstGeom>
+          <a:solidFill>
+            <a:srgbClr val="E8801A"/>
+          </a:solidFill>
+          <a:ln>
+            <a:noFill/>
+          </a:ln>
+          <a:effectLst/>
+        </p:spPr>
+        <p:style>
+          <a:lnRef idx="1">
+            <a:schemeClr val="accent1"/>
+          </a:lnRef>
+          <a:fillRef idx="3">
+            <a:schemeClr val="accent1"/>
+          </a:fillRef>
+          <a:effectRef idx="2">
+            <a:schemeClr val="accent1"/>
+          </a:effectRef>
+          <a:fontRef idx="minor">
+            <a:schemeClr val="lt1"/>
+          </a:fontRef>
+        </p:style>
+        <p:txBody>
+          <a:bodyPr rtlCol="0" anchor="ctr"/>
+          <a:lstStyle/>
+          <a:p>
+            <a:pPr algn="ctr"/>
+          </a:p>
+        </p:txBody>
+      </p:sp>
+      <p:sp>
+        <p:nvSpPr>
+          <p:cNvPr id="8" name="TextBox 7"/>
           <p:cNvSpPr txBox="1"/>
           <p:nvPr/>
         </p:nvSpPr>
         <p:spPr>
           <a:xfrm>
-            <a:off x="822960" y="1920240"/>
+            <a:off x="822960" y="1965960"/>
             <a:ext cx="4983480" cy="4206240"/>
           </a:xfrm>
           <a:prstGeom prst="rect">
@@ -5942,17 +6116,17 @@
           <a:p>
             <a:pPr>
               <a:spcAft>
-                <a:spcPts val="1000"/>
+                <a:spcPts val="1100"/>
               </a:spcAft>
             </a:pPr>
             <a:r>
               <a:rPr sz="1600" b="1" i="0">
                 <a:solidFill>
-                  <a:srgbClr val="2E3A80"/>
-                </a:solidFill>
-                <a:latin typeface="Montserrat"/>
-              </a:rPr>
-              <a:t>•  </a:t>
+                  <a:srgbClr val="E8801A"/>
+                </a:solidFill>
+                <a:latin typeface="Montserrat"/>
+              </a:rPr>
+              <a:t>▸  </a:t>
             </a:r>
             <a:r>
               <a:rPr sz="1600" b="0" i="0">
@@ -5961,23 +6135,23 @@
                 </a:solidFill>
                 <a:latin typeface="Montserrat"/>
               </a:rPr>
-              <a:t>Aviso escrito y en lugar visible</a:t>
+              <a:t>No accionar ningún interruptor</a:t>
             </a:r>
           </a:p>
           <a:p>
             <a:pPr>
               <a:spcAft>
-                <a:spcPts val="1000"/>
+                <a:spcPts val="1100"/>
               </a:spcAft>
             </a:pPr>
             <a:r>
               <a:rPr sz="1600" b="1" i="0">
                 <a:solidFill>
-                  <a:srgbClr val="2E3A80"/>
-                </a:solidFill>
-                <a:latin typeface="Montserrat"/>
-              </a:rPr>
-              <a:t>•  </a:t>
+                  <a:srgbClr val="E8801A"/>
+                </a:solidFill>
+                <a:latin typeface="Montserrat"/>
+              </a:rPr>
+              <a:t>▸  </a:t>
             </a:r>
             <a:r>
               <a:rPr sz="1600" b="0" i="0">
@@ -5986,23 +6160,23 @@
                 </a:solidFill>
                 <a:latin typeface="Montserrat"/>
               </a:rPr>
-              <a:t>A más de un usuario: avisar a distribuidora</a:t>
+              <a:t>Ni apagar luces ni generar chispas</a:t>
             </a:r>
           </a:p>
           <a:p>
             <a:pPr>
               <a:spcAft>
-                <a:spcPts val="1000"/>
+                <a:spcPts val="1100"/>
               </a:spcAft>
             </a:pPr>
             <a:r>
               <a:rPr sz="1600" b="1" i="0">
                 <a:solidFill>
-                  <a:srgbClr val="2E3A80"/>
-                </a:solidFill>
-                <a:latin typeface="Montserrat"/>
-              </a:rPr>
-              <a:t>•  </a:t>
+                  <a:srgbClr val="E8801A"/>
+                </a:solidFill>
+                <a:latin typeface="Montserrat"/>
+              </a:rPr>
+              <a:t>▸  </a:t>
             </a:r>
             <a:r>
               <a:rPr sz="1600" b="0" i="0">
@@ -6011,14 +6185,39 @@
                 </a:solidFill>
                 <a:latin typeface="Montserrat"/>
               </a:rPr>
-              <a:t>Restablecer: comprobar estanquidad primero</a:t>
-            </a:r>
-          </a:p>
-        </p:txBody>
-      </p:sp>
-      <p:sp>
-        <p:nvSpPr>
-          <p:cNvPr id="8" name="imgph" descr="IMGQ:written notice posted building entrance"/>
+              <a:t>Ventilar y cerrar la llave de paso</a:t>
+            </a:r>
+          </a:p>
+          <a:p>
+            <a:pPr>
+              <a:spcAft>
+                <a:spcPts val="1100"/>
+              </a:spcAft>
+            </a:pPr>
+            <a:r>
+              <a:rPr sz="1600" b="1" i="0">
+                <a:solidFill>
+                  <a:srgbClr val="E8801A"/>
+                </a:solidFill>
+                <a:latin typeface="Montserrat"/>
+              </a:rPr>
+              <a:t>▸  </a:t>
+            </a:r>
+            <a:r>
+              <a:rPr sz="1600" b="0" i="0">
+                <a:solidFill>
+                  <a:srgbClr val="1B2330"/>
+                </a:solidFill>
+                <a:latin typeface="Montserrat"/>
+              </a:rPr>
+              <a:t>Detector UNE-EN 61779; linterna de seguridad</a:t>
+            </a:r>
+          </a:p>
+        </p:txBody>
+      </p:sp>
+      <p:sp>
+        <p:nvSpPr>
+          <p:cNvPr id="9" name="imgph" descr="IMGQ:opening window ventilation gas leak"/>
           <p:cNvSpPr/>
           <p:nvPr/>
         </p:nvSpPr>
@@ -6064,7 +6263,7 @@
       </p:sp>
       <p:sp>
         <p:nvSpPr>
-          <p:cNvPr id="9" name="TextBox 8"/>
+          <p:cNvPr id="10" name="TextBox 9"/>
           <p:cNvSpPr txBox="1"/>
           <p:nvPr/>
         </p:nvSpPr>
@@ -6104,7 +6303,7 @@
                 </a:solidFill>
                 <a:latin typeface="Montserrat"/>
               </a:rPr>
-              <a:t>written notice posted building entrance</a:t>
+              <a:t>opening window ventilation gas leak</a:t>
             </a:r>
           </a:p>
         </p:txBody>
@@ -6201,7 +6400,7 @@
                 </a:solidFill>
                 <a:latin typeface="Montserrat"/>
               </a:rPr>
-              <a:t>012 / 020</a:t>
+              <a:t>012 / 021</a:t>
             </a:r>
           </a:p>
         </p:txBody>
@@ -6249,7 +6448,7 @@
         <p:spPr>
           <a:xfrm>
             <a:off x="822960" y="457200"/>
-            <a:ext cx="8229600" cy="365760"/>
+            <a:ext cx="10058400" cy="365760"/>
           </a:xfrm>
           <a:prstGeom prst="rect">
             <a:avLst/>
@@ -6263,13 +6462,13 @@
           <a:lstStyle/>
           <a:p>
             <a:r>
-              <a:rPr sz="1200" b="1" i="0">
-                <a:solidFill>
-                  <a:srgbClr val="64748B"/>
-                </a:solidFill>
-                <a:latin typeface="Montserrat"/>
-              </a:rPr>
-              <a:t>PARTE 11 · APARTADOS 4.2 Y 4.3</a:t>
+              <a:rPr sz="1300" b="1" i="0">
+                <a:solidFill>
+                  <a:srgbClr val="E8801A"/>
+                </a:solidFill>
+                <a:latin typeface="Montserrat"/>
+              </a:rPr>
+              <a:t>PARTE 11 · APARTADO 4.1</a:t>
             </a:r>
           </a:p>
         </p:txBody>
@@ -6297,26 +6496,70 @@
           <a:lstStyle/>
           <a:p>
             <a:r>
-              <a:rPr sz="2700" b="1" i="0">
+              <a:rPr sz="2800" b="1" i="0">
                 <a:solidFill>
                   <a:srgbClr val="1E2761"/>
                 </a:solidFill>
                 <a:latin typeface="Montserrat"/>
               </a:rPr>
-              <a:t>Modificación o reparación: el metro</a:t>
-            </a:r>
-          </a:p>
-        </p:txBody>
-      </p:sp>
-      <p:sp>
-        <p:nvSpPr>
-          <p:cNvPr id="7" name="TextBox 6"/>
+              <a:t>Interrupción y restablecimiento</a:t>
+            </a:r>
+          </a:p>
+        </p:txBody>
+      </p:sp>
+      <p:sp>
+        <p:nvSpPr>
+          <p:cNvPr id="7" name="Rounded Rectangle 6"/>
+          <p:cNvSpPr/>
+          <p:nvPr/>
+        </p:nvSpPr>
+        <p:spPr>
+          <a:xfrm>
+            <a:off x="868680" y="1627632"/>
+            <a:ext cx="2011680" cy="73152"/>
+          </a:xfrm>
+          <a:prstGeom prst="roundRect">
+            <a:avLst/>
+          </a:prstGeom>
+          <a:solidFill>
+            <a:srgbClr val="E8801A"/>
+          </a:solidFill>
+          <a:ln>
+            <a:noFill/>
+          </a:ln>
+          <a:effectLst/>
+        </p:spPr>
+        <p:style>
+          <a:lnRef idx="1">
+            <a:schemeClr val="accent1"/>
+          </a:lnRef>
+          <a:fillRef idx="3">
+            <a:schemeClr val="accent1"/>
+          </a:fillRef>
+          <a:effectRef idx="2">
+            <a:schemeClr val="accent1"/>
+          </a:effectRef>
+          <a:fontRef idx="minor">
+            <a:schemeClr val="lt1"/>
+          </a:fontRef>
+        </p:style>
+        <p:txBody>
+          <a:bodyPr rtlCol="0" anchor="ctr"/>
+          <a:lstStyle/>
+          <a:p>
+            <a:pPr algn="ctr"/>
+          </a:p>
+        </p:txBody>
+      </p:sp>
+      <p:sp>
+        <p:nvSpPr>
+          <p:cNvPr id="8" name="TextBox 7"/>
           <p:cNvSpPr txBox="1"/>
           <p:nvPr/>
         </p:nvSpPr>
         <p:spPr>
           <a:xfrm>
-            <a:off x="822960" y="1920240"/>
+            <a:off x="822960" y="1965960"/>
             <a:ext cx="4983480" cy="4206240"/>
           </a:xfrm>
           <a:prstGeom prst="rect">
@@ -6332,17 +6575,17 @@
           <a:p>
             <a:pPr>
               <a:spcAft>
-                <a:spcPts val="1000"/>
+                <a:spcPts val="1100"/>
               </a:spcAft>
             </a:pPr>
             <a:r>
               <a:rPr sz="1600" b="1" i="0">
                 <a:solidFill>
-                  <a:srgbClr val="2E3A80"/>
-                </a:solidFill>
-                <a:latin typeface="Montserrat"/>
-              </a:rPr>
-              <a:t>•  </a:t>
+                  <a:srgbClr val="E8801A"/>
+                </a:solidFill>
+                <a:latin typeface="Montserrat"/>
+              </a:rPr>
+              <a:t>▸  </a:t>
             </a:r>
             <a:r>
               <a:rPr sz="1600" b="0" i="0">
@@ -6351,23 +6594,23 @@
                 </a:solidFill>
                 <a:latin typeface="Montserrat"/>
               </a:rPr>
-              <a:t>Tramo ≤ 1 m: reparación (comprobar tramo)</a:t>
+              <a:t>Aviso escrito y en lugar visible</a:t>
             </a:r>
           </a:p>
           <a:p>
             <a:pPr>
               <a:spcAft>
-                <a:spcPts val="1000"/>
+                <a:spcPts val="1100"/>
               </a:spcAft>
             </a:pPr>
             <a:r>
               <a:rPr sz="1600" b="1" i="0">
                 <a:solidFill>
-                  <a:srgbClr val="2E3A80"/>
-                </a:solidFill>
-                <a:latin typeface="Montserrat"/>
-              </a:rPr>
-              <a:t>•  </a:t>
+                  <a:srgbClr val="E8801A"/>
+                </a:solidFill>
+                <a:latin typeface="Montserrat"/>
+              </a:rPr>
+              <a:t>▸  </a:t>
             </a:r>
             <a:r>
               <a:rPr sz="1600" b="0" i="0">
@@ -6376,23 +6619,23 @@
                 </a:solidFill>
                 <a:latin typeface="Montserrat"/>
               </a:rPr>
-              <a:t>Tramo &gt; 1 m: modificación</a:t>
+              <a:t>A más de un usuario: avisar a distribuidora</a:t>
             </a:r>
           </a:p>
           <a:p>
             <a:pPr>
               <a:spcAft>
-                <a:spcPts val="1000"/>
+                <a:spcPts val="1100"/>
               </a:spcAft>
             </a:pPr>
             <a:r>
               <a:rPr sz="1600" b="1" i="0">
                 <a:solidFill>
-                  <a:srgbClr val="2E3A80"/>
-                </a:solidFill>
-                <a:latin typeface="Montserrat"/>
-              </a:rPr>
-              <a:t>•  </a:t>
+                  <a:srgbClr val="E8801A"/>
+                </a:solidFill>
+                <a:latin typeface="Montserrat"/>
+              </a:rPr>
+              <a:t>▸  </a:t>
             </a:r>
             <a:r>
               <a:rPr sz="1600" b="0" i="0">
@@ -6401,39 +6644,14 @@
                 </a:solidFill>
                 <a:latin typeface="Montserrat"/>
               </a:rPr>
-              <a:t>Ampliar consumo o aparato distinto: modificación</a:t>
-            </a:r>
-          </a:p>
-          <a:p>
-            <a:pPr>
-              <a:spcAft>
-                <a:spcPts val="1000"/>
-              </a:spcAft>
-            </a:pPr>
-            <a:r>
-              <a:rPr sz="1600" b="1" i="0">
-                <a:solidFill>
-                  <a:srgbClr val="2E3A80"/>
-                </a:solidFill>
-                <a:latin typeface="Montserrat"/>
-              </a:rPr>
-              <a:t>•  </a:t>
-            </a:r>
-            <a:r>
-              <a:rPr sz="1600" b="0" i="0">
-                <a:solidFill>
-                  <a:srgbClr val="1B2330"/>
-                </a:solidFill>
-                <a:latin typeface="Montserrat"/>
-              </a:rPr>
-              <a:t>Modificación: prueba UNE 60670-8 completa</a:t>
-            </a:r>
-          </a:p>
-        </p:txBody>
-      </p:sp>
-      <p:sp>
-        <p:nvSpPr>
-          <p:cNvPr id="8" name="imgph" descr="IMGQ:measuring copper gas pipe with tape"/>
+              <a:t>Restablecer: comprobar estanquidad primero</a:t>
+            </a:r>
+          </a:p>
+        </p:txBody>
+      </p:sp>
+      <p:sp>
+        <p:nvSpPr>
+          <p:cNvPr id="9" name="imgph" descr="IMGQ:written notice posted building entrance"/>
           <p:cNvSpPr/>
           <p:nvPr/>
         </p:nvSpPr>
@@ -6479,7 +6697,7 @@
       </p:sp>
       <p:sp>
         <p:nvSpPr>
-          <p:cNvPr id="9" name="TextBox 8"/>
+          <p:cNvPr id="10" name="TextBox 9"/>
           <p:cNvSpPr txBox="1"/>
           <p:nvPr/>
         </p:nvSpPr>
@@ -6519,7 +6737,7 @@
                 </a:solidFill>
                 <a:latin typeface="Montserrat"/>
               </a:rPr>
-              <a:t>measuring copper gas pipe with tape</a:t>
+              <a:t>written notice posted building entrance</a:t>
             </a:r>
           </a:p>
         </p:txBody>
@@ -6616,7 +6834,7 @@
                 </a:solidFill>
                 <a:latin typeface="Montserrat"/>
               </a:rPr>
-              <a:t>013 / 020</a:t>
+              <a:t>013 / 021</a:t>
             </a:r>
           </a:p>
         </p:txBody>
@@ -6664,7 +6882,7 @@
         <p:spPr>
           <a:xfrm>
             <a:off x="822960" y="457200"/>
-            <a:ext cx="8229600" cy="365760"/>
+            <a:ext cx="10058400" cy="365760"/>
           </a:xfrm>
           <a:prstGeom prst="rect">
             <a:avLst/>
@@ -6678,13 +6896,13 @@
           <a:lstStyle/>
           <a:p>
             <a:r>
-              <a:rPr sz="1200" b="1" i="0">
-                <a:solidFill>
-                  <a:srgbClr val="64748B"/>
-                </a:solidFill>
-                <a:latin typeface="Montserrat"/>
-              </a:rPr>
-              <a:t>PARTE 11 · APARTADO 4.4</a:t>
+              <a:rPr sz="1300" b="1" i="0">
+                <a:solidFill>
+                  <a:srgbClr val="E8801A"/>
+                </a:solidFill>
+                <a:latin typeface="Montserrat"/>
+              </a:rPr>
+              <a:t>PARTE 11 · APARTADOS 4.2 Y 4.3</a:t>
             </a:r>
           </a:p>
         </p:txBody>
@@ -6712,26 +6930,70 @@
           <a:lstStyle/>
           <a:p>
             <a:r>
-              <a:rPr sz="2700" b="1" i="0">
+              <a:rPr sz="2800" b="1" i="0">
                 <a:solidFill>
                   <a:srgbClr val="1E2761"/>
                 </a:solidFill>
                 <a:latin typeface="Montserrat"/>
               </a:rPr>
-              <a:t>Cambio de combustible</a:t>
-            </a:r>
-          </a:p>
-        </p:txBody>
-      </p:sp>
-      <p:sp>
-        <p:nvSpPr>
-          <p:cNvPr id="7" name="TextBox 6"/>
+              <a:t>Modificación o reparación: el metro</a:t>
+            </a:r>
+          </a:p>
+        </p:txBody>
+      </p:sp>
+      <p:sp>
+        <p:nvSpPr>
+          <p:cNvPr id="7" name="Rounded Rectangle 6"/>
+          <p:cNvSpPr/>
+          <p:nvPr/>
+        </p:nvSpPr>
+        <p:spPr>
+          <a:xfrm>
+            <a:off x="868680" y="1627632"/>
+            <a:ext cx="2011680" cy="73152"/>
+          </a:xfrm>
+          <a:prstGeom prst="roundRect">
+            <a:avLst/>
+          </a:prstGeom>
+          <a:solidFill>
+            <a:srgbClr val="E8801A"/>
+          </a:solidFill>
+          <a:ln>
+            <a:noFill/>
+          </a:ln>
+          <a:effectLst/>
+        </p:spPr>
+        <p:style>
+          <a:lnRef idx="1">
+            <a:schemeClr val="accent1"/>
+          </a:lnRef>
+          <a:fillRef idx="3">
+            <a:schemeClr val="accent1"/>
+          </a:fillRef>
+          <a:effectRef idx="2">
+            <a:schemeClr val="accent1"/>
+          </a:effectRef>
+          <a:fontRef idx="minor">
+            <a:schemeClr val="lt1"/>
+          </a:fontRef>
+        </p:style>
+        <p:txBody>
+          <a:bodyPr rtlCol="0" anchor="ctr"/>
+          <a:lstStyle/>
+          <a:p>
+            <a:pPr algn="ctr"/>
+          </a:p>
+        </p:txBody>
+      </p:sp>
+      <p:sp>
+        <p:nvSpPr>
+          <p:cNvPr id="8" name="TextBox 7"/>
           <p:cNvSpPr txBox="1"/>
           <p:nvPr/>
         </p:nvSpPr>
         <p:spPr>
           <a:xfrm>
-            <a:off x="822960" y="1920240"/>
+            <a:off x="822960" y="1965960"/>
             <a:ext cx="4983480" cy="4206240"/>
           </a:xfrm>
           <a:prstGeom prst="rect">
@@ -6747,17 +7009,17 @@
           <a:p>
             <a:pPr>
               <a:spcAft>
-                <a:spcPts val="1000"/>
+                <a:spcPts val="1100"/>
               </a:spcAft>
             </a:pPr>
             <a:r>
               <a:rPr sz="1600" b="1" i="0">
                 <a:solidFill>
-                  <a:srgbClr val="2E3A80"/>
-                </a:solidFill>
-                <a:latin typeface="Montserrat"/>
-              </a:rPr>
-              <a:t>•  </a:t>
+                  <a:srgbClr val="E8801A"/>
+                </a:solidFill>
+                <a:latin typeface="Montserrat"/>
+              </a:rPr>
+              <a:t>▸  </a:t>
             </a:r>
             <a:r>
               <a:rPr sz="1600" b="0" i="0">
@@ -6766,23 +7028,23 @@
                 </a:solidFill>
                 <a:latin typeface="Montserrat"/>
               </a:rPr>
-              <a:t>Dejarla apta para el control periódico</a:t>
+              <a:t>Tramo ≤ 1 m: reparación (comprobar tramo)</a:t>
             </a:r>
           </a:p>
           <a:p>
             <a:pPr>
               <a:spcAft>
-                <a:spcPts val="1000"/>
+                <a:spcPts val="1100"/>
               </a:spcAft>
             </a:pPr>
             <a:r>
               <a:rPr sz="1600" b="1" i="0">
                 <a:solidFill>
-                  <a:srgbClr val="2E3A80"/>
-                </a:solidFill>
-                <a:latin typeface="Montserrat"/>
-              </a:rPr>
-              <a:t>•  </a:t>
+                  <a:srgbClr val="E8801A"/>
+                </a:solidFill>
+                <a:latin typeface="Montserrat"/>
+              </a:rPr>
+              <a:t>▸  </a:t>
             </a:r>
             <a:r>
               <a:rPr sz="1600" b="0" i="0">
@@ -6791,23 +7053,23 @@
                 </a:solidFill>
                 <a:latin typeface="Montserrat"/>
               </a:rPr>
-              <a:t>Con el nuevo gas (UNE 60670-12 y -13)</a:t>
+              <a:t>Tramo &gt; 1 m: modificación</a:t>
             </a:r>
           </a:p>
           <a:p>
             <a:pPr>
               <a:spcAft>
-                <a:spcPts val="1000"/>
+                <a:spcPts val="1100"/>
               </a:spcAft>
             </a:pPr>
             <a:r>
               <a:rPr sz="1600" b="1" i="0">
                 <a:solidFill>
-                  <a:srgbClr val="2E3A80"/>
-                </a:solidFill>
-                <a:latin typeface="Montserrat"/>
-              </a:rPr>
-              <a:t>•  </a:t>
+                  <a:srgbClr val="E8801A"/>
+                </a:solidFill>
+                <a:latin typeface="Montserrat"/>
+              </a:rPr>
+              <a:t>▸  </a:t>
             </a:r>
             <a:r>
               <a:rPr sz="1600" b="0" i="0">
@@ -6816,23 +7078,23 @@
                 </a:solidFill>
                 <a:latin typeface="Montserrat"/>
               </a:rPr>
-              <a:t>Manómetro de esfera clase 1,6</a:t>
+              <a:t>Ampliar consumo o aparato distinto: modificación</a:t>
             </a:r>
           </a:p>
           <a:p>
             <a:pPr>
               <a:spcAft>
-                <a:spcPts val="1000"/>
+                <a:spcPts val="1100"/>
               </a:spcAft>
             </a:pPr>
             <a:r>
               <a:rPr sz="1600" b="1" i="0">
                 <a:solidFill>
-                  <a:srgbClr val="2E3A80"/>
-                </a:solidFill>
-                <a:latin typeface="Montserrat"/>
-              </a:rPr>
-              <a:t>•  </a:t>
+                  <a:srgbClr val="E8801A"/>
+                </a:solidFill>
+                <a:latin typeface="Montserrat"/>
+              </a:rPr>
+              <a:t>▸  </a:t>
             </a:r>
             <a:r>
               <a:rPr sz="1600" b="0" i="0">
@@ -6841,14 +7103,14 @@
                 </a:solidFill>
                 <a:latin typeface="Montserrat"/>
               </a:rPr>
-              <a:t>Aguja entre el 35 % y el 75 % de escala</a:t>
-            </a:r>
-          </a:p>
-        </p:txBody>
-      </p:sp>
-      <p:sp>
-        <p:nvSpPr>
-          <p:cNvPr id="8" name="imgph" descr="IMGQ:pressure gauge manometer gas installation"/>
+              <a:t>Modificación: prueba UNE 60670-8 completa</a:t>
+            </a:r>
+          </a:p>
+        </p:txBody>
+      </p:sp>
+      <p:sp>
+        <p:nvSpPr>
+          <p:cNvPr id="9" name="imgph" descr="IMGQ:measuring copper gas pipe with tape"/>
           <p:cNvSpPr/>
           <p:nvPr/>
         </p:nvSpPr>
@@ -6894,7 +7156,7 @@
       </p:sp>
       <p:sp>
         <p:nvSpPr>
-          <p:cNvPr id="9" name="TextBox 8"/>
+          <p:cNvPr id="10" name="TextBox 9"/>
           <p:cNvSpPr txBox="1"/>
           <p:nvPr/>
         </p:nvSpPr>
@@ -6934,7 +7196,7 @@
                 </a:solidFill>
                 <a:latin typeface="Montserrat"/>
               </a:rPr>
-              <a:t>pressure gauge manometer gas installation</a:t>
+              <a:t>measuring copper gas pipe with tape</a:t>
             </a:r>
           </a:p>
         </p:txBody>
@@ -7031,7 +7293,7 @@
                 </a:solidFill>
                 <a:latin typeface="Montserrat"/>
               </a:rPr>
-              <a:t>014 / 020</a:t>
+              <a:t>014 / 021</a:t>
             </a:r>
           </a:p>
         </p:txBody>
@@ -7079,7 +7341,7 @@
         <p:spPr>
           <a:xfrm>
             <a:off x="822960" y="457200"/>
-            <a:ext cx="8229600" cy="365760"/>
+            <a:ext cx="10058400" cy="365760"/>
           </a:xfrm>
           <a:prstGeom prst="rect">
             <a:avLst/>
@@ -7093,13 +7355,13 @@
           <a:lstStyle/>
           <a:p>
             <a:r>
-              <a:rPr sz="1200" b="1" i="0">
-                <a:solidFill>
-                  <a:srgbClr val="64748B"/>
-                </a:solidFill>
-                <a:latin typeface="Montserrat"/>
-              </a:rPr>
-              <a:t>PARTE 11 · APARTADO 4.5</a:t>
+              <a:rPr sz="1300" b="1" i="0">
+                <a:solidFill>
+                  <a:srgbClr val="E8801A"/>
+                </a:solidFill>
+                <a:latin typeface="Montserrat"/>
+              </a:rPr>
+              <a:t>PARTE 11 · APARTADO 4.4</a:t>
             </a:r>
           </a:p>
         </p:txBody>
@@ -7127,26 +7389,70 @@
           <a:lstStyle/>
           <a:p>
             <a:r>
-              <a:rPr sz="2700" b="1" i="0">
+              <a:rPr sz="2800" b="1" i="0">
                 <a:solidFill>
                   <a:srgbClr val="1E2761"/>
                 </a:solidFill>
                 <a:latin typeface="Montserrat"/>
               </a:rPr>
-              <a:t>Cambio de contador: puente antichispas</a:t>
-            </a:r>
-          </a:p>
-        </p:txBody>
-      </p:sp>
-      <p:sp>
-        <p:nvSpPr>
-          <p:cNvPr id="7" name="TextBox 6"/>
+              <a:t>Cambio de combustible</a:t>
+            </a:r>
+          </a:p>
+        </p:txBody>
+      </p:sp>
+      <p:sp>
+        <p:nvSpPr>
+          <p:cNvPr id="7" name="Rounded Rectangle 6"/>
+          <p:cNvSpPr/>
+          <p:nvPr/>
+        </p:nvSpPr>
+        <p:spPr>
+          <a:xfrm>
+            <a:off x="868680" y="1627632"/>
+            <a:ext cx="2011680" cy="73152"/>
+          </a:xfrm>
+          <a:prstGeom prst="roundRect">
+            <a:avLst/>
+          </a:prstGeom>
+          <a:solidFill>
+            <a:srgbClr val="E8801A"/>
+          </a:solidFill>
+          <a:ln>
+            <a:noFill/>
+          </a:ln>
+          <a:effectLst/>
+        </p:spPr>
+        <p:style>
+          <a:lnRef idx="1">
+            <a:schemeClr val="accent1"/>
+          </a:lnRef>
+          <a:fillRef idx="3">
+            <a:schemeClr val="accent1"/>
+          </a:fillRef>
+          <a:effectRef idx="2">
+            <a:schemeClr val="accent1"/>
+          </a:effectRef>
+          <a:fontRef idx="minor">
+            <a:schemeClr val="lt1"/>
+          </a:fontRef>
+        </p:style>
+        <p:txBody>
+          <a:bodyPr rtlCol="0" anchor="ctr"/>
+          <a:lstStyle/>
+          <a:p>
+            <a:pPr algn="ctr"/>
+          </a:p>
+        </p:txBody>
+      </p:sp>
+      <p:sp>
+        <p:nvSpPr>
+          <p:cNvPr id="8" name="TextBox 7"/>
           <p:cNvSpPr txBox="1"/>
           <p:nvPr/>
         </p:nvSpPr>
         <p:spPr>
           <a:xfrm>
-            <a:off x="822960" y="1920240"/>
+            <a:off x="822960" y="1965960"/>
             <a:ext cx="4983480" cy="4206240"/>
           </a:xfrm>
           <a:prstGeom prst="rect">
@@ -7162,17 +7468,17 @@
           <a:p>
             <a:pPr>
               <a:spcAft>
-                <a:spcPts val="1000"/>
+                <a:spcPts val="1100"/>
               </a:spcAft>
             </a:pPr>
             <a:r>
               <a:rPr sz="1600" b="1" i="0">
                 <a:solidFill>
-                  <a:srgbClr val="2E3A80"/>
-                </a:solidFill>
-                <a:latin typeface="Montserrat"/>
-              </a:rPr>
-              <a:t>•  </a:t>
+                  <a:srgbClr val="E8801A"/>
+                </a:solidFill>
+                <a:latin typeface="Montserrat"/>
+              </a:rPr>
+              <a:t>▸  </a:t>
             </a:r>
             <a:r>
               <a:rPr sz="1600" b="0" i="0">
@@ -7181,23 +7487,23 @@
                 </a:solidFill>
                 <a:latin typeface="Montserrat"/>
               </a:rPr>
-              <a:t>Cambio solo por personal autorizado</a:t>
+              <a:t>Dejarla apta para el control periódico</a:t>
             </a:r>
           </a:p>
           <a:p>
             <a:pPr>
               <a:spcAft>
-                <a:spcPts val="1000"/>
+                <a:spcPts val="1100"/>
               </a:spcAft>
             </a:pPr>
             <a:r>
               <a:rPr sz="1600" b="1" i="0">
                 <a:solidFill>
-                  <a:srgbClr val="2E3A80"/>
-                </a:solidFill>
-                <a:latin typeface="Montserrat"/>
-              </a:rPr>
-              <a:t>•  </a:t>
+                  <a:srgbClr val="E8801A"/>
+                </a:solidFill>
+                <a:latin typeface="Montserrat"/>
+              </a:rPr>
+              <a:t>▸  </a:t>
             </a:r>
             <a:r>
               <a:rPr sz="1600" b="0" i="0">
@@ -7206,23 +7512,23 @@
                 </a:solidFill>
                 <a:latin typeface="Montserrat"/>
               </a:rPr>
-              <a:t>Puente antichispas antes de cortar</a:t>
+              <a:t>Con el nuevo gas (UNE 60670-12 y -13)</a:t>
             </a:r>
           </a:p>
           <a:p>
             <a:pPr>
               <a:spcAft>
-                <a:spcPts val="1000"/>
+                <a:spcPts val="1100"/>
               </a:spcAft>
             </a:pPr>
             <a:r>
               <a:rPr sz="1600" b="1" i="0">
                 <a:solidFill>
-                  <a:srgbClr val="2E3A80"/>
-                </a:solidFill>
-                <a:latin typeface="Montserrat"/>
-              </a:rPr>
-              <a:t>•  </a:t>
+                  <a:srgbClr val="E8801A"/>
+                </a:solidFill>
+                <a:latin typeface="Montserrat"/>
+              </a:rPr>
+              <a:t>▸  </a:t>
             </a:r>
             <a:r>
               <a:rPr sz="1600" b="0" i="0">
@@ -7231,23 +7537,23 @@
                 </a:solidFill>
                 <a:latin typeface="Montserrat"/>
               </a:rPr>
-              <a:t>Se retira al montar el contador nuevo</a:t>
+              <a:t>Manómetro de esfera clase 1,6</a:t>
             </a:r>
           </a:p>
           <a:p>
             <a:pPr>
               <a:spcAft>
-                <a:spcPts val="1000"/>
+                <a:spcPts val="1100"/>
               </a:spcAft>
             </a:pPr>
             <a:r>
               <a:rPr sz="1600" b="1" i="0">
                 <a:solidFill>
-                  <a:srgbClr val="2E3A80"/>
-                </a:solidFill>
-                <a:latin typeface="Montserrat"/>
-              </a:rPr>
-              <a:t>•  </a:t>
+                  <a:srgbClr val="E8801A"/>
+                </a:solidFill>
+                <a:latin typeface="Montserrat"/>
+              </a:rPr>
+              <a:t>▸  </a:t>
             </a:r>
             <a:r>
               <a:rPr sz="1600" b="0" i="0">
@@ -7256,14 +7562,14 @@
                 </a:solidFill>
                 <a:latin typeface="Montserrat"/>
               </a:rPr>
-              <a:t>Precintar el equipo de medida</a:t>
-            </a:r>
-          </a:p>
-        </p:txBody>
-      </p:sp>
-      <p:sp>
-        <p:nvSpPr>
-          <p:cNvPr id="8" name="imgph" descr="IMGQ:gas meter replacement technician hands"/>
+              <a:t>Aguja entre el 35 % y el 75 % de escala</a:t>
+            </a:r>
+          </a:p>
+        </p:txBody>
+      </p:sp>
+      <p:sp>
+        <p:nvSpPr>
+          <p:cNvPr id="9" name="imgph" descr="IMGQ:pressure gauge manometer gas installation"/>
           <p:cNvSpPr/>
           <p:nvPr/>
         </p:nvSpPr>
@@ -7309,7 +7615,7 @@
       </p:sp>
       <p:sp>
         <p:nvSpPr>
-          <p:cNvPr id="9" name="TextBox 8"/>
+          <p:cNvPr id="10" name="TextBox 9"/>
           <p:cNvSpPr txBox="1"/>
           <p:nvPr/>
         </p:nvSpPr>
@@ -7349,7 +7655,7 @@
                 </a:solidFill>
                 <a:latin typeface="Montserrat"/>
               </a:rPr>
-              <a:t>gas meter replacement technician hands</a:t>
+              <a:t>pressure gauge manometer gas installation</a:t>
             </a:r>
           </a:p>
         </p:txBody>
@@ -7446,7 +7752,7 @@
                 </a:solidFill>
                 <a:latin typeface="Montserrat"/>
               </a:rPr>
-              <a:t>015 / 020</a:t>
+              <a:t>015 / 021</a:t>
             </a:r>
           </a:p>
         </p:txBody>
@@ -7494,7 +7800,7 @@
         <p:spPr>
           <a:xfrm>
             <a:off x="822960" y="457200"/>
-            <a:ext cx="8229600" cy="365760"/>
+            <a:ext cx="10058400" cy="365760"/>
           </a:xfrm>
           <a:prstGeom prst="rect">
             <a:avLst/>
@@ -7508,13 +7814,13 @@
           <a:lstStyle/>
           <a:p>
             <a:r>
-              <a:rPr sz="1200" b="1" i="0">
-                <a:solidFill>
-                  <a:srgbClr val="64748B"/>
-                </a:solidFill>
-                <a:latin typeface="Montserrat"/>
-              </a:rPr>
-              <a:t>PARTE 11 · APARTADO 4.6</a:t>
+              <a:rPr sz="1300" b="1" i="0">
+                <a:solidFill>
+                  <a:srgbClr val="E8801A"/>
+                </a:solidFill>
+                <a:latin typeface="Montserrat"/>
+              </a:rPr>
+              <a:t>PARTE 11 · APARTADO 4.5</a:t>
             </a:r>
           </a:p>
         </p:txBody>
@@ -7542,26 +7848,70 @@
           <a:lstStyle/>
           <a:p>
             <a:r>
-              <a:rPr sz="2700" b="1" i="0">
+              <a:rPr sz="2800" b="1" i="0">
                 <a:solidFill>
                   <a:srgbClr val="1E2761"/>
                 </a:solidFill>
                 <a:latin typeface="Montserrat"/>
               </a:rPr>
-              <a:t>Anulación de puntos de consumo</a:t>
-            </a:r>
-          </a:p>
-        </p:txBody>
-      </p:sp>
-      <p:sp>
-        <p:nvSpPr>
-          <p:cNvPr id="7" name="TextBox 6"/>
+              <a:t>Cambio de contador: puente antichispas</a:t>
+            </a:r>
+          </a:p>
+        </p:txBody>
+      </p:sp>
+      <p:sp>
+        <p:nvSpPr>
+          <p:cNvPr id="7" name="Rounded Rectangle 6"/>
+          <p:cNvSpPr/>
+          <p:nvPr/>
+        </p:nvSpPr>
+        <p:spPr>
+          <a:xfrm>
+            <a:off x="868680" y="1627632"/>
+            <a:ext cx="2011680" cy="73152"/>
+          </a:xfrm>
+          <a:prstGeom prst="roundRect">
+            <a:avLst/>
+          </a:prstGeom>
+          <a:solidFill>
+            <a:srgbClr val="E8801A"/>
+          </a:solidFill>
+          <a:ln>
+            <a:noFill/>
+          </a:ln>
+          <a:effectLst/>
+        </p:spPr>
+        <p:style>
+          <a:lnRef idx="1">
+            <a:schemeClr val="accent1"/>
+          </a:lnRef>
+          <a:fillRef idx="3">
+            <a:schemeClr val="accent1"/>
+          </a:fillRef>
+          <a:effectRef idx="2">
+            <a:schemeClr val="accent1"/>
+          </a:effectRef>
+          <a:fontRef idx="minor">
+            <a:schemeClr val="lt1"/>
+          </a:fontRef>
+        </p:style>
+        <p:txBody>
+          <a:bodyPr rtlCol="0" anchor="ctr"/>
+          <a:lstStyle/>
+          <a:p>
+            <a:pPr algn="ctr"/>
+          </a:p>
+        </p:txBody>
+      </p:sp>
+      <p:sp>
+        <p:nvSpPr>
+          <p:cNvPr id="8" name="TextBox 7"/>
           <p:cNvSpPr txBox="1"/>
           <p:nvPr/>
         </p:nvSpPr>
         <p:spPr>
           <a:xfrm>
-            <a:off x="822960" y="1920240"/>
+            <a:off x="822960" y="1965960"/>
             <a:ext cx="4983480" cy="4206240"/>
           </a:xfrm>
           <a:prstGeom prst="rect">
@@ -7577,17 +7927,17 @@
           <a:p>
             <a:pPr>
               <a:spcAft>
-                <a:spcPts val="1000"/>
+                <a:spcPts val="1100"/>
               </a:spcAft>
             </a:pPr>
             <a:r>
               <a:rPr sz="1600" b="1" i="0">
                 <a:solidFill>
-                  <a:srgbClr val="2E3A80"/>
-                </a:solidFill>
-                <a:latin typeface="Montserrat"/>
-              </a:rPr>
-              <a:t>•  </a:t>
+                  <a:srgbClr val="E8801A"/>
+                </a:solidFill>
+                <a:latin typeface="Montserrat"/>
+              </a:rPr>
+              <a:t>▸  </a:t>
             </a:r>
             <a:r>
               <a:rPr sz="1600" b="0" i="0">
@@ -7596,23 +7946,23 @@
                 </a:solidFill>
                 <a:latin typeface="Montserrat"/>
               </a:rPr>
-              <a:t>Cerrar, bloquear, precintar y taponar la llave</a:t>
+              <a:t>Cambio solo por personal autorizado</a:t>
             </a:r>
           </a:p>
           <a:p>
             <a:pPr>
               <a:spcAft>
-                <a:spcPts val="1000"/>
+                <a:spcPts val="1100"/>
               </a:spcAft>
             </a:pPr>
             <a:r>
               <a:rPr sz="1600" b="1" i="0">
                 <a:solidFill>
-                  <a:srgbClr val="2E3A80"/>
-                </a:solidFill>
-                <a:latin typeface="Montserrat"/>
-              </a:rPr>
-              <a:t>•  </a:t>
+                  <a:srgbClr val="E8801A"/>
+                </a:solidFill>
+                <a:latin typeface="Montserrat"/>
+              </a:rPr>
+              <a:t>▸  </a:t>
             </a:r>
             <a:r>
               <a:rPr sz="1600" b="0" i="0">
@@ -7621,23 +7971,23 @@
                 </a:solidFill>
                 <a:latin typeface="Montserrat"/>
               </a:rPr>
-              <a:t>Si se quita la llave: tapón soldado</a:t>
+              <a:t>Puente antichispas antes de cortar</a:t>
             </a:r>
           </a:p>
           <a:p>
             <a:pPr>
               <a:spcAft>
-                <a:spcPts val="1000"/>
+                <a:spcPts val="1100"/>
               </a:spcAft>
             </a:pPr>
             <a:r>
               <a:rPr sz="1600" b="1" i="0">
                 <a:solidFill>
-                  <a:srgbClr val="2E3A80"/>
-                </a:solidFill>
-                <a:latin typeface="Montserrat"/>
-              </a:rPr>
-              <a:t>•  </a:t>
+                  <a:srgbClr val="E8801A"/>
+                </a:solidFill>
+                <a:latin typeface="Montserrat"/>
+              </a:rPr>
+              <a:t>▸  </a:t>
             </a:r>
             <a:r>
               <a:rPr sz="1600" b="0" i="0">
@@ -7646,23 +7996,23 @@
                 </a:solidFill>
                 <a:latin typeface="Montserrat"/>
               </a:rPr>
-              <a:t>Comprobar la estanquidad del cierre</a:t>
+              <a:t>Se retira al montar el contador nuevo</a:t>
             </a:r>
           </a:p>
           <a:p>
             <a:pPr>
               <a:spcAft>
-                <a:spcPts val="1000"/>
+                <a:spcPts val="1100"/>
               </a:spcAft>
             </a:pPr>
             <a:r>
               <a:rPr sz="1600" b="1" i="0">
                 <a:solidFill>
-                  <a:srgbClr val="2E3A80"/>
-                </a:solidFill>
-                <a:latin typeface="Montserrat"/>
-              </a:rPr>
-              <a:t>•  </a:t>
+                  <a:srgbClr val="E8801A"/>
+                </a:solidFill>
+                <a:latin typeface="Montserrat"/>
+              </a:rPr>
+              <a:t>▸  </a:t>
             </a:r>
             <a:r>
               <a:rPr sz="1600" b="0" i="0">
@@ -7671,14 +8021,14 @@
                 </a:solidFill>
                 <a:latin typeface="Montserrat"/>
               </a:rPr>
-              <a:t>Esta operación solo la hace la instaladora</a:t>
-            </a:r>
-          </a:p>
-        </p:txBody>
-      </p:sp>
-      <p:sp>
-        <p:nvSpPr>
-          <p:cNvPr id="8" name="imgph" descr="IMGQ:capped gas pipe blanked off wall"/>
+              <a:t>Precintar el equipo de medida</a:t>
+            </a:r>
+          </a:p>
+        </p:txBody>
+      </p:sp>
+      <p:sp>
+        <p:nvSpPr>
+          <p:cNvPr id="9" name="imgph" descr="IMGQ:gas meter replacement technician hands"/>
           <p:cNvSpPr/>
           <p:nvPr/>
         </p:nvSpPr>
@@ -7724,7 +8074,7 @@
       </p:sp>
       <p:sp>
         <p:nvSpPr>
-          <p:cNvPr id="9" name="TextBox 8"/>
+          <p:cNvPr id="10" name="TextBox 9"/>
           <p:cNvSpPr txBox="1"/>
           <p:nvPr/>
         </p:nvSpPr>
@@ -7764,7 +8114,7 @@
                 </a:solidFill>
                 <a:latin typeface="Montserrat"/>
               </a:rPr>
-              <a:t>capped gas pipe blanked off wall</a:t>
+              <a:t>gas meter replacement technician hands</a:t>
             </a:r>
           </a:p>
         </p:txBody>
@@ -7861,7 +8211,7 @@
                 </a:solidFill>
                 <a:latin typeface="Montserrat"/>
               </a:rPr>
-              <a:t>016 / 020</a:t>
+              <a:t>016 / 021</a:t>
             </a:r>
           </a:p>
         </p:txBody>
@@ -7909,7 +8259,7 @@
         <p:spPr>
           <a:xfrm>
             <a:off x="822960" y="457200"/>
-            <a:ext cx="8229600" cy="365760"/>
+            <a:ext cx="10058400" cy="365760"/>
           </a:xfrm>
           <a:prstGeom prst="rect">
             <a:avLst/>
@@ -7923,13 +8273,13 @@
           <a:lstStyle/>
           <a:p>
             <a:r>
-              <a:rPr sz="1200" b="1" i="0">
-                <a:solidFill>
-                  <a:srgbClr val="64748B"/>
-                </a:solidFill>
-                <a:latin typeface="Montserrat"/>
-              </a:rPr>
-              <a:t>PARTE 11 · APARTADO 4.7</a:t>
+              <a:rPr sz="1300" b="1" i="0">
+                <a:solidFill>
+                  <a:srgbClr val="E8801A"/>
+                </a:solidFill>
+                <a:latin typeface="Montserrat"/>
+              </a:rPr>
+              <a:t>PARTE 11 · APARTADO 4.6</a:t>
             </a:r>
           </a:p>
         </p:txBody>
@@ -7957,26 +8307,70 @@
           <a:lstStyle/>
           <a:p>
             <a:r>
-              <a:rPr sz="2700" b="1" i="0">
+              <a:rPr sz="2800" b="1" i="0">
                 <a:solidFill>
                   <a:srgbClr val="1E2761"/>
                 </a:solidFill>
                 <a:latin typeface="Montserrat"/>
               </a:rPr>
-              <a:t>Cese del suministro</a:t>
-            </a:r>
-          </a:p>
-        </p:txBody>
-      </p:sp>
-      <p:sp>
-        <p:nvSpPr>
-          <p:cNvPr id="7" name="TextBox 6"/>
+              <a:t>Anulación de puntos de consumo</a:t>
+            </a:r>
+          </a:p>
+        </p:txBody>
+      </p:sp>
+      <p:sp>
+        <p:nvSpPr>
+          <p:cNvPr id="7" name="Rounded Rectangle 6"/>
+          <p:cNvSpPr/>
+          <p:nvPr/>
+        </p:nvSpPr>
+        <p:spPr>
+          <a:xfrm>
+            <a:off x="868680" y="1627632"/>
+            <a:ext cx="2011680" cy="73152"/>
+          </a:xfrm>
+          <a:prstGeom prst="roundRect">
+            <a:avLst/>
+          </a:prstGeom>
+          <a:solidFill>
+            <a:srgbClr val="E8801A"/>
+          </a:solidFill>
+          <a:ln>
+            <a:noFill/>
+          </a:ln>
+          <a:effectLst/>
+        </p:spPr>
+        <p:style>
+          <a:lnRef idx="1">
+            <a:schemeClr val="accent1"/>
+          </a:lnRef>
+          <a:fillRef idx="3">
+            <a:schemeClr val="accent1"/>
+          </a:fillRef>
+          <a:effectRef idx="2">
+            <a:schemeClr val="accent1"/>
+          </a:effectRef>
+          <a:fontRef idx="minor">
+            <a:schemeClr val="lt1"/>
+          </a:fontRef>
+        </p:style>
+        <p:txBody>
+          <a:bodyPr rtlCol="0" anchor="ctr"/>
+          <a:lstStyle/>
+          <a:p>
+            <a:pPr algn="ctr"/>
+          </a:p>
+        </p:txBody>
+      </p:sp>
+      <p:sp>
+        <p:nvSpPr>
+          <p:cNvPr id="8" name="TextBox 7"/>
           <p:cNvSpPr txBox="1"/>
           <p:nvPr/>
         </p:nvSpPr>
         <p:spPr>
           <a:xfrm>
-            <a:off x="822960" y="1920240"/>
+            <a:off x="822960" y="1965960"/>
             <a:ext cx="4983480" cy="4206240"/>
           </a:xfrm>
           <a:prstGeom prst="rect">
@@ -7992,17 +8386,17 @@
           <a:p>
             <a:pPr>
               <a:spcAft>
-                <a:spcPts val="1000"/>
+                <a:spcPts val="1100"/>
               </a:spcAft>
             </a:pPr>
             <a:r>
               <a:rPr sz="1600" b="1" i="0">
                 <a:solidFill>
-                  <a:srgbClr val="2E3A80"/>
-                </a:solidFill>
-                <a:latin typeface="Montserrat"/>
-              </a:rPr>
-              <a:t>•  </a:t>
+                  <a:srgbClr val="E8801A"/>
+                </a:solidFill>
+                <a:latin typeface="Montserrat"/>
+              </a:rPr>
+              <a:t>▸  </a:t>
             </a:r>
             <a:r>
               <a:rPr sz="1600" b="0" i="0">
@@ -8011,23 +8405,23 @@
                 </a:solidFill>
                 <a:latin typeface="Montserrat"/>
               </a:rPr>
-              <a:t>Lo hace la empresa distribuidora</a:t>
+              <a:t>Cerrar, bloquear, precintar y taponar la llave</a:t>
             </a:r>
           </a:p>
           <a:p>
             <a:pPr>
               <a:spcAft>
-                <a:spcPts val="1000"/>
+                <a:spcPts val="1100"/>
               </a:spcAft>
             </a:pPr>
             <a:r>
               <a:rPr sz="1600" b="1" i="0">
                 <a:solidFill>
-                  <a:srgbClr val="2E3A80"/>
-                </a:solidFill>
-                <a:latin typeface="Montserrat"/>
-              </a:rPr>
-              <a:t>•  </a:t>
+                  <a:srgbClr val="E8801A"/>
+                </a:solidFill>
+                <a:latin typeface="Montserrat"/>
+              </a:rPr>
+              <a:t>▸  </a:t>
             </a:r>
             <a:r>
               <a:rPr sz="1600" b="0" i="0">
@@ -8036,23 +8430,23 @@
                 </a:solidFill>
                 <a:latin typeface="Montserrat"/>
               </a:rPr>
-              <a:t>Cerrar, precintar y taponar la llave</a:t>
+              <a:t>Si se quita la llave: tapón soldado</a:t>
             </a:r>
           </a:p>
           <a:p>
             <a:pPr>
               <a:spcAft>
-                <a:spcPts val="1000"/>
+                <a:spcPts val="1100"/>
               </a:spcAft>
             </a:pPr>
             <a:r>
               <a:rPr sz="1600" b="1" i="0">
                 <a:solidFill>
-                  <a:srgbClr val="2E3A80"/>
-                </a:solidFill>
-                <a:latin typeface="Montserrat"/>
-              </a:rPr>
-              <a:t>•  </a:t>
+                  <a:srgbClr val="E8801A"/>
+                </a:solidFill>
+                <a:latin typeface="Montserrat"/>
+              </a:rPr>
+              <a:t>▸  </a:t>
             </a:r>
             <a:r>
               <a:rPr sz="1600" b="0" i="0">
@@ -8061,23 +8455,23 @@
                 </a:solidFill>
                 <a:latin typeface="Montserrat"/>
               </a:rPr>
-              <a:t>O medios en remoto que impidan abrir</a:t>
+              <a:t>Comprobar la estanquidad del cierre</a:t>
             </a:r>
           </a:p>
           <a:p>
             <a:pPr>
               <a:spcAft>
-                <a:spcPts val="1000"/>
+                <a:spcPts val="1100"/>
               </a:spcAft>
             </a:pPr>
             <a:r>
               <a:rPr sz="1600" b="1" i="0">
                 <a:solidFill>
-                  <a:srgbClr val="2E3A80"/>
-                </a:solidFill>
-                <a:latin typeface="Montserrat"/>
-              </a:rPr>
-              <a:t>•  </a:t>
+                  <a:srgbClr val="E8801A"/>
+                </a:solidFill>
+                <a:latin typeface="Montserrat"/>
+              </a:rPr>
+              <a:t>▸  </a:t>
             </a:r>
             <a:r>
               <a:rPr sz="1600" b="0" i="0">
@@ -8086,14 +8480,14 @@
                 </a:solidFill>
                 <a:latin typeface="Montserrat"/>
               </a:rPr>
-              <a:t>No es lo mismo que anular un punto</a:t>
-            </a:r>
-          </a:p>
-        </p:txBody>
-      </p:sp>
-      <p:sp>
-        <p:nvSpPr>
-          <p:cNvPr id="8" name="imgph" descr="IMGQ:gas meter cabinet sealed closed"/>
+              <a:t>Esta operación solo la hace la instaladora</a:t>
+            </a:r>
+          </a:p>
+        </p:txBody>
+      </p:sp>
+      <p:sp>
+        <p:nvSpPr>
+          <p:cNvPr id="9" name="imgph" descr="IMGQ:capped gas pipe blanked off wall"/>
           <p:cNvSpPr/>
           <p:nvPr/>
         </p:nvSpPr>
@@ -8139,7 +8533,7 @@
       </p:sp>
       <p:sp>
         <p:nvSpPr>
-          <p:cNvPr id="9" name="TextBox 8"/>
+          <p:cNvPr id="10" name="TextBox 9"/>
           <p:cNvSpPr txBox="1"/>
           <p:nvPr/>
         </p:nvSpPr>
@@ -8179,7 +8573,7 @@
                 </a:solidFill>
                 <a:latin typeface="Montserrat"/>
               </a:rPr>
-              <a:t>gas meter cabinet sealed closed</a:t>
+              <a:t>capped gas pipe blanked off wall</a:t>
             </a:r>
           </a:p>
         </p:txBody>
@@ -8276,7 +8670,7 @@
                 </a:solidFill>
                 <a:latin typeface="Montserrat"/>
               </a:rPr>
-              <a:t>017 / 020</a:t>
+              <a:t>017 / 021</a:t>
             </a:r>
           </a:p>
         </p:txBody>
@@ -8324,7 +8718,7 @@
         <p:spPr>
           <a:xfrm>
             <a:off x="822960" y="457200"/>
-            <a:ext cx="8229600" cy="365760"/>
+            <a:ext cx="10058400" cy="365760"/>
           </a:xfrm>
           <a:prstGeom prst="rect">
             <a:avLst/>
@@ -8338,13 +8732,13 @@
           <a:lstStyle/>
           <a:p>
             <a:r>
-              <a:rPr sz="1200" b="1" i="0">
-                <a:solidFill>
-                  <a:srgbClr val="64748B"/>
-                </a:solidFill>
-                <a:latin typeface="Montserrat"/>
-              </a:rPr>
-              <a:t>PARTE 11 · APARTADO 5.1</a:t>
+              <a:rPr sz="1300" b="1" i="0">
+                <a:solidFill>
+                  <a:srgbClr val="E8801A"/>
+                </a:solidFill>
+                <a:latin typeface="Montserrat"/>
+              </a:rPr>
+              <a:t>PARTE 11 · APARTADO 4.7</a:t>
             </a:r>
           </a:p>
         </p:txBody>
@@ -8372,26 +8766,70 @@
           <a:lstStyle/>
           <a:p>
             <a:r>
-              <a:rPr sz="2700" b="1" i="0">
+              <a:rPr sz="2800" b="1" i="0">
                 <a:solidFill>
                   <a:srgbClr val="1E2761"/>
                 </a:solidFill>
                 <a:latin typeface="Montserrat"/>
               </a:rPr>
-              <a:t>Comprobar la estanquidad: métodos</a:t>
-            </a:r>
-          </a:p>
-        </p:txBody>
-      </p:sp>
-      <p:sp>
-        <p:nvSpPr>
-          <p:cNvPr id="7" name="TextBox 6"/>
+              <a:t>Cese del suministro</a:t>
+            </a:r>
+          </a:p>
+        </p:txBody>
+      </p:sp>
+      <p:sp>
+        <p:nvSpPr>
+          <p:cNvPr id="7" name="Rounded Rectangle 6"/>
+          <p:cNvSpPr/>
+          <p:nvPr/>
+        </p:nvSpPr>
+        <p:spPr>
+          <a:xfrm>
+            <a:off x="868680" y="1627632"/>
+            <a:ext cx="2011680" cy="73152"/>
+          </a:xfrm>
+          <a:prstGeom prst="roundRect">
+            <a:avLst/>
+          </a:prstGeom>
+          <a:solidFill>
+            <a:srgbClr val="E8801A"/>
+          </a:solidFill>
+          <a:ln>
+            <a:noFill/>
+          </a:ln>
+          <a:effectLst/>
+        </p:spPr>
+        <p:style>
+          <a:lnRef idx="1">
+            <a:schemeClr val="accent1"/>
+          </a:lnRef>
+          <a:fillRef idx="3">
+            <a:schemeClr val="accent1"/>
+          </a:fillRef>
+          <a:effectRef idx="2">
+            <a:schemeClr val="accent1"/>
+          </a:effectRef>
+          <a:fontRef idx="minor">
+            <a:schemeClr val="lt1"/>
+          </a:fontRef>
+        </p:style>
+        <p:txBody>
+          <a:bodyPr rtlCol="0" anchor="ctr"/>
+          <a:lstStyle/>
+          <a:p>
+            <a:pPr algn="ctr"/>
+          </a:p>
+        </p:txBody>
+      </p:sp>
+      <p:sp>
+        <p:nvSpPr>
+          <p:cNvPr id="8" name="TextBox 7"/>
           <p:cNvSpPr txBox="1"/>
           <p:nvPr/>
         </p:nvSpPr>
         <p:spPr>
           <a:xfrm>
-            <a:off x="822960" y="1920240"/>
+            <a:off x="822960" y="1965960"/>
             <a:ext cx="4983480" cy="4206240"/>
           </a:xfrm>
           <a:prstGeom prst="rect">
@@ -8407,17 +8845,17 @@
           <a:p>
             <a:pPr>
               <a:spcAft>
-                <a:spcPts val="1000"/>
+                <a:spcPts val="1100"/>
               </a:spcAft>
             </a:pPr>
             <a:r>
               <a:rPr sz="1600" b="1" i="0">
                 <a:solidFill>
-                  <a:srgbClr val="2E3A80"/>
-                </a:solidFill>
-                <a:latin typeface="Montserrat"/>
-              </a:rPr>
-              <a:t>•  </a:t>
+                  <a:srgbClr val="E8801A"/>
+                </a:solidFill>
+                <a:latin typeface="Montserrat"/>
+              </a:rPr>
+              <a:t>▸  </a:t>
             </a:r>
             <a:r>
               <a:rPr sz="1600" b="0" i="0">
@@ -8426,23 +8864,23 @@
                 </a:solidFill>
                 <a:latin typeface="Montserrat"/>
               </a:rPr>
-              <a:t>Detector portátil de gas</a:t>
+              <a:t>Lo hace la empresa distribuidora</a:t>
             </a:r>
           </a:p>
           <a:p>
             <a:pPr>
               <a:spcAft>
-                <a:spcPts val="1000"/>
+                <a:spcPts val="1100"/>
               </a:spcAft>
             </a:pPr>
             <a:r>
               <a:rPr sz="1600" b="1" i="0">
                 <a:solidFill>
-                  <a:srgbClr val="2E3A80"/>
-                </a:solidFill>
-                <a:latin typeface="Montserrat"/>
-              </a:rPr>
-              <a:t>•  </a:t>
+                  <a:srgbClr val="E8801A"/>
+                </a:solidFill>
+                <a:latin typeface="Montserrat"/>
+              </a:rPr>
+              <a:t>▸  </a:t>
             </a:r>
             <a:r>
               <a:rPr sz="1600" b="0" i="0">
@@ -8451,23 +8889,23 @@
                 </a:solidFill>
                 <a:latin typeface="Montserrat"/>
               </a:rPr>
-              <a:t>Manómetro clase 1,6 (35 %–75 %)</a:t>
+              <a:t>Cerrar, precintar y taponar la llave</a:t>
             </a:r>
           </a:p>
           <a:p>
             <a:pPr>
               <a:spcAft>
-                <a:spcPts val="1000"/>
+                <a:spcPts val="1100"/>
               </a:spcAft>
             </a:pPr>
             <a:r>
               <a:rPr sz="1600" b="1" i="0">
                 <a:solidFill>
-                  <a:srgbClr val="2E3A80"/>
-                </a:solidFill>
-                <a:latin typeface="Montserrat"/>
-              </a:rPr>
-              <a:t>•  </a:t>
+                  <a:srgbClr val="E8801A"/>
+                </a:solidFill>
+                <a:latin typeface="Montserrat"/>
+              </a:rPr>
+              <a:t>▸  </a:t>
             </a:r>
             <a:r>
               <a:rPr sz="1600" b="0" i="0">
@@ -8476,23 +8914,23 @@
                 </a:solidFill>
                 <a:latin typeface="Montserrat"/>
               </a:rPr>
-              <a:t>Giro de la métrica del contador</a:t>
+              <a:t>O medios en remoto que impidan abrir</a:t>
             </a:r>
           </a:p>
           <a:p>
             <a:pPr>
               <a:spcAft>
-                <a:spcPts val="1000"/>
+                <a:spcPts val="1100"/>
               </a:spcAft>
             </a:pPr>
             <a:r>
               <a:rPr sz="1600" b="1" i="0">
                 <a:solidFill>
-                  <a:srgbClr val="2E3A80"/>
-                </a:solidFill>
-                <a:latin typeface="Montserrat"/>
-              </a:rPr>
-              <a:t>•  </a:t>
+                  <a:srgbClr val="E8801A"/>
+                </a:solidFill>
+                <a:latin typeface="Montserrat"/>
+              </a:rPr>
+              <a:t>▸  </a:t>
             </a:r>
             <a:r>
               <a:rPr sz="1600" b="0" i="0">
@@ -8501,14 +8939,14 @@
                 </a:solidFill>
                 <a:latin typeface="Montserrat"/>
               </a:rPr>
-              <a:t>Localizar fugas: agua jabonosa o detector</a:t>
-            </a:r>
-          </a:p>
-        </p:txBody>
-      </p:sp>
-      <p:sp>
-        <p:nvSpPr>
-          <p:cNvPr id="8" name="imgph" descr="IMGQ:soapy water bubbles gas pipe leak test"/>
+              <a:t>No es lo mismo que anular un punto</a:t>
+            </a:r>
+          </a:p>
+        </p:txBody>
+      </p:sp>
+      <p:sp>
+        <p:nvSpPr>
+          <p:cNvPr id="9" name="imgph" descr="IMGQ:gas meter cabinet sealed closed"/>
           <p:cNvSpPr/>
           <p:nvPr/>
         </p:nvSpPr>
@@ -8554,7 +8992,7 @@
       </p:sp>
       <p:sp>
         <p:nvSpPr>
-          <p:cNvPr id="9" name="TextBox 8"/>
+          <p:cNvPr id="10" name="TextBox 9"/>
           <p:cNvSpPr txBox="1"/>
           <p:nvPr/>
         </p:nvSpPr>
@@ -8594,7 +9032,7 @@
                 </a:solidFill>
                 <a:latin typeface="Montserrat"/>
               </a:rPr>
-              <a:t>soapy water bubbles gas pipe leak test</a:t>
+              <a:t>gas meter cabinet sealed closed</a:t>
             </a:r>
           </a:p>
         </p:txBody>
@@ -8691,7 +9129,7 @@
                 </a:solidFill>
                 <a:latin typeface="Montserrat"/>
               </a:rPr>
-              <a:t>018 / 020</a:t>
+              <a:t>018 / 021</a:t>
             </a:r>
           </a:p>
         </p:txBody>
@@ -8739,7 +9177,7 @@
         <p:spPr>
           <a:xfrm>
             <a:off x="822960" y="457200"/>
-            <a:ext cx="8229600" cy="365760"/>
+            <a:ext cx="10058400" cy="365760"/>
           </a:xfrm>
           <a:prstGeom prst="rect">
             <a:avLst/>
@@ -8753,9 +9191,9 @@
           <a:lstStyle/>
           <a:p>
             <a:r>
-              <a:rPr sz="1200" b="1" i="0">
-                <a:solidFill>
-                  <a:srgbClr val="64748B"/>
+              <a:rPr sz="1300" b="1" i="0">
+                <a:solidFill>
+                  <a:srgbClr val="E8801A"/>
                 </a:solidFill>
                 <a:latin typeface="Montserrat"/>
               </a:rPr>
@@ -8787,26 +9225,70 @@
           <a:lstStyle/>
           <a:p>
             <a:r>
-              <a:rPr sz="2700" b="1" i="0">
+              <a:rPr sz="2800" b="1" i="0">
                 <a:solidFill>
                   <a:srgbClr val="1E2761"/>
                 </a:solidFill>
                 <a:latin typeface="Montserrat"/>
               </a:rPr>
-              <a:t>Nunca busques fugas con una llama</a:t>
-            </a:r>
-          </a:p>
-        </p:txBody>
-      </p:sp>
-      <p:sp>
-        <p:nvSpPr>
-          <p:cNvPr id="7" name="TextBox 6"/>
+              <a:t>Comprobar la estanquidad: métodos</a:t>
+            </a:r>
+          </a:p>
+        </p:txBody>
+      </p:sp>
+      <p:sp>
+        <p:nvSpPr>
+          <p:cNvPr id="7" name="Rounded Rectangle 6"/>
+          <p:cNvSpPr/>
+          <p:nvPr/>
+        </p:nvSpPr>
+        <p:spPr>
+          <a:xfrm>
+            <a:off x="868680" y="1627632"/>
+            <a:ext cx="2011680" cy="73152"/>
+          </a:xfrm>
+          <a:prstGeom prst="roundRect">
+            <a:avLst/>
+          </a:prstGeom>
+          <a:solidFill>
+            <a:srgbClr val="E8801A"/>
+          </a:solidFill>
+          <a:ln>
+            <a:noFill/>
+          </a:ln>
+          <a:effectLst/>
+        </p:spPr>
+        <p:style>
+          <a:lnRef idx="1">
+            <a:schemeClr val="accent1"/>
+          </a:lnRef>
+          <a:fillRef idx="3">
+            <a:schemeClr val="accent1"/>
+          </a:fillRef>
+          <a:effectRef idx="2">
+            <a:schemeClr val="accent1"/>
+          </a:effectRef>
+          <a:fontRef idx="minor">
+            <a:schemeClr val="lt1"/>
+          </a:fontRef>
+        </p:style>
+        <p:txBody>
+          <a:bodyPr rtlCol="0" anchor="ctr"/>
+          <a:lstStyle/>
+          <a:p>
+            <a:pPr algn="ctr"/>
+          </a:p>
+        </p:txBody>
+      </p:sp>
+      <p:sp>
+        <p:nvSpPr>
+          <p:cNvPr id="8" name="TextBox 7"/>
           <p:cNvSpPr txBox="1"/>
           <p:nvPr/>
         </p:nvSpPr>
         <p:spPr>
           <a:xfrm>
-            <a:off x="822960" y="1920240"/>
+            <a:off x="822960" y="1965960"/>
             <a:ext cx="4983480" cy="4206240"/>
           </a:xfrm>
           <a:prstGeom prst="rect">
@@ -8822,17 +9304,17 @@
           <a:p>
             <a:pPr>
               <a:spcAft>
-                <a:spcPts val="1000"/>
+                <a:spcPts val="1100"/>
               </a:spcAft>
             </a:pPr>
             <a:r>
               <a:rPr sz="1600" b="1" i="0">
                 <a:solidFill>
-                  <a:srgbClr val="2E3A80"/>
-                </a:solidFill>
-                <a:latin typeface="Montserrat"/>
-              </a:rPr>
-              <a:t>•  </a:t>
+                  <a:srgbClr val="E8801A"/>
+                </a:solidFill>
+                <a:latin typeface="Montserrat"/>
+              </a:rPr>
+              <a:t>▸  </a:t>
             </a:r>
             <a:r>
               <a:rPr sz="1600" b="0" i="0">
@@ -8841,23 +9323,23 @@
                 </a:solidFill>
                 <a:latin typeface="Montserrat"/>
               </a:rPr>
-              <a:t>Agua jabonosa: burbujea donde escapa</a:t>
+              <a:t>Detector portátil de gas</a:t>
             </a:r>
           </a:p>
           <a:p>
             <a:pPr>
               <a:spcAft>
-                <a:spcPts val="1000"/>
+                <a:spcPts val="1100"/>
               </a:spcAft>
             </a:pPr>
             <a:r>
               <a:rPr sz="1600" b="1" i="0">
                 <a:solidFill>
-                  <a:srgbClr val="2E3A80"/>
-                </a:solidFill>
-                <a:latin typeface="Montserrat"/>
-              </a:rPr>
-              <a:t>•  </a:t>
+                  <a:srgbClr val="E8801A"/>
+                </a:solidFill>
+                <a:latin typeface="Montserrat"/>
+              </a:rPr>
+              <a:t>▸  </a:t>
             </a:r>
             <a:r>
               <a:rPr sz="1600" b="0" i="0">
@@ -8866,23 +9348,23 @@
                 </a:solidFill>
                 <a:latin typeface="Montserrat"/>
               </a:rPr>
-              <a:t>O detector portátil de gas</a:t>
+              <a:t>Manómetro clase 1,6 (35 %–75 %)</a:t>
             </a:r>
           </a:p>
           <a:p>
             <a:pPr>
               <a:spcAft>
-                <a:spcPts val="1000"/>
+                <a:spcPts val="1100"/>
               </a:spcAft>
             </a:pPr>
             <a:r>
               <a:rPr sz="1600" b="1" i="0">
                 <a:solidFill>
-                  <a:srgbClr val="2E3A80"/>
-                </a:solidFill>
-                <a:latin typeface="Montserrat"/>
-              </a:rPr>
-              <a:t>•  </a:t>
+                  <a:srgbClr val="E8801A"/>
+                </a:solidFill>
+                <a:latin typeface="Montserrat"/>
+              </a:rPr>
+              <a:t>▸  </a:t>
             </a:r>
             <a:r>
               <a:rPr sz="1600" b="0" i="0">
@@ -8891,23 +9373,23 @@
                 </a:solidFill>
                 <a:latin typeface="Montserrat"/>
               </a:rPr>
-              <a:t>Detector: calibrar cada 18 meses máximo</a:t>
+              <a:t>Giro de la métrica del contador</a:t>
             </a:r>
           </a:p>
           <a:p>
             <a:pPr>
               <a:spcAft>
-                <a:spcPts val="1000"/>
+                <a:spcPts val="1100"/>
               </a:spcAft>
             </a:pPr>
             <a:r>
               <a:rPr sz="1600" b="1" i="0">
                 <a:solidFill>
-                  <a:srgbClr val="2E3A80"/>
-                </a:solidFill>
-                <a:latin typeface="Montserrat"/>
-              </a:rPr>
-              <a:t>•  </a:t>
+                  <a:srgbClr val="E8801A"/>
+                </a:solidFill>
+                <a:latin typeface="Montserrat"/>
+              </a:rPr>
+              <a:t>▸  </a:t>
             </a:r>
             <a:r>
               <a:rPr sz="1600" b="0" i="0">
@@ -8916,14 +9398,14 @@
                 </a:solidFill>
                 <a:latin typeface="Montserrat"/>
               </a:rPr>
-              <a:t>Descalibrado, dice «no hay gas» y sí lo hay</a:t>
-            </a:r>
-          </a:p>
-        </p:txBody>
-      </p:sp>
-      <p:sp>
-        <p:nvSpPr>
-          <p:cNvPr id="8" name="imgph" descr="IMGQ:portable gas leak detector handheld device"/>
+              <a:t>Localizar fugas: agua jabonosa o detector</a:t>
+            </a:r>
+          </a:p>
+        </p:txBody>
+      </p:sp>
+      <p:sp>
+        <p:nvSpPr>
+          <p:cNvPr id="9" name="imgph" descr="IMGQ:soapy water bubbles gas pipe leak test"/>
           <p:cNvSpPr/>
           <p:nvPr/>
         </p:nvSpPr>
@@ -8969,7 +9451,7 @@
       </p:sp>
       <p:sp>
         <p:nvSpPr>
-          <p:cNvPr id="9" name="TextBox 8"/>
+          <p:cNvPr id="10" name="TextBox 9"/>
           <p:cNvSpPr txBox="1"/>
           <p:nvPr/>
         </p:nvSpPr>
@@ -9009,7 +9491,7 @@
                 </a:solidFill>
                 <a:latin typeface="Montserrat"/>
               </a:rPr>
-              <a:t>portable gas leak detector handheld device</a:t>
+              <a:t>soapy water bubbles gas pipe leak test</a:t>
             </a:r>
           </a:p>
         </p:txBody>
@@ -9106,7 +9588,7 @@
                 </a:solidFill>
                 <a:latin typeface="Montserrat"/>
               </a:rPr>
-              <a:t>019 / 020</a:t>
+              <a:t>019 / 021</a:t>
             </a:r>
           </a:p>
         </p:txBody>
@@ -9154,7 +9636,7 @@
         <p:spPr>
           <a:xfrm>
             <a:off x="822960" y="457200"/>
-            <a:ext cx="8229600" cy="365760"/>
+            <a:ext cx="10058400" cy="365760"/>
           </a:xfrm>
           <a:prstGeom prst="rect">
             <a:avLst/>
@@ -9168,13 +9650,13 @@
           <a:lstStyle/>
           <a:p>
             <a:r>
-              <a:rPr sz="1200" b="1" i="0">
-                <a:solidFill>
-                  <a:srgbClr val="64748B"/>
-                </a:solidFill>
-                <a:latin typeface="Montserrat"/>
-              </a:rPr>
-              <a:t>PARTE 11 · APARTADO 5.2</a:t>
+              <a:rPr sz="1300" b="1" i="0">
+                <a:solidFill>
+                  <a:srgbClr val="E8801A"/>
+                </a:solidFill>
+                <a:latin typeface="Montserrat"/>
+              </a:rPr>
+              <a:t>PARTE 11 · APARTADO 5.1</a:t>
             </a:r>
           </a:p>
         </p:txBody>
@@ -9202,26 +9684,70 @@
           <a:lstStyle/>
           <a:p>
             <a:r>
-              <a:rPr sz="2700" b="1" i="0">
+              <a:rPr sz="2800" b="1" i="0">
                 <a:solidFill>
                   <a:srgbClr val="1E2761"/>
                 </a:solidFill>
                 <a:latin typeface="Montserrat"/>
               </a:rPr>
-              <a:t>Tres estados de una instalación</a:t>
-            </a:r>
-          </a:p>
-        </p:txBody>
-      </p:sp>
-      <p:sp>
-        <p:nvSpPr>
-          <p:cNvPr id="7" name="TextBox 6"/>
+              <a:t>Nunca busques fugas con una llama</a:t>
+            </a:r>
+          </a:p>
+        </p:txBody>
+      </p:sp>
+      <p:sp>
+        <p:nvSpPr>
+          <p:cNvPr id="7" name="Rounded Rectangle 6"/>
+          <p:cNvSpPr/>
+          <p:nvPr/>
+        </p:nvSpPr>
+        <p:spPr>
+          <a:xfrm>
+            <a:off x="868680" y="1627632"/>
+            <a:ext cx="2011680" cy="73152"/>
+          </a:xfrm>
+          <a:prstGeom prst="roundRect">
+            <a:avLst/>
+          </a:prstGeom>
+          <a:solidFill>
+            <a:srgbClr val="E8801A"/>
+          </a:solidFill>
+          <a:ln>
+            <a:noFill/>
+          </a:ln>
+          <a:effectLst/>
+        </p:spPr>
+        <p:style>
+          <a:lnRef idx="1">
+            <a:schemeClr val="accent1"/>
+          </a:lnRef>
+          <a:fillRef idx="3">
+            <a:schemeClr val="accent1"/>
+          </a:fillRef>
+          <a:effectRef idx="2">
+            <a:schemeClr val="accent1"/>
+          </a:effectRef>
+          <a:fontRef idx="minor">
+            <a:schemeClr val="lt1"/>
+          </a:fontRef>
+        </p:style>
+        <p:txBody>
+          <a:bodyPr rtlCol="0" anchor="ctr"/>
+          <a:lstStyle/>
+          <a:p>
+            <a:pPr algn="ctr"/>
+          </a:p>
+        </p:txBody>
+      </p:sp>
+      <p:sp>
+        <p:nvSpPr>
+          <p:cNvPr id="8" name="TextBox 7"/>
           <p:cNvSpPr txBox="1"/>
           <p:nvPr/>
         </p:nvSpPr>
         <p:spPr>
           <a:xfrm>
-            <a:off x="822960" y="1920240"/>
+            <a:off x="822960" y="1965960"/>
             <a:ext cx="4983480" cy="4206240"/>
           </a:xfrm>
           <a:prstGeom prst="rect">
@@ -9237,17 +9763,17 @@
           <a:p>
             <a:pPr>
               <a:spcAft>
-                <a:spcPts val="1000"/>
+                <a:spcPts val="1100"/>
               </a:spcAft>
             </a:pPr>
             <a:r>
               <a:rPr sz="1600" b="1" i="0">
                 <a:solidFill>
-                  <a:srgbClr val="2E3A80"/>
-                </a:solidFill>
-                <a:latin typeface="Montserrat"/>
-              </a:rPr>
-              <a:t>•  </a:t>
+                  <a:srgbClr val="E8801A"/>
+                </a:solidFill>
+                <a:latin typeface="Montserrat"/>
+              </a:rPr>
+              <a:t>▸  </a:t>
             </a:r>
             <a:r>
               <a:rPr sz="1600" b="0" i="0">
@@ -9256,23 +9782,23 @@
                 </a:solidFill>
                 <a:latin typeface="Montserrat"/>
               </a:rPr>
-              <a:t>Apta para uso: sigue funcionando</a:t>
+              <a:t>Agua jabonosa: burbujea donde escapa</a:t>
             </a:r>
           </a:p>
           <a:p>
             <a:pPr>
               <a:spcAft>
-                <a:spcPts val="1000"/>
+                <a:spcPts val="1100"/>
               </a:spcAft>
             </a:pPr>
             <a:r>
               <a:rPr sz="1600" b="1" i="0">
                 <a:solidFill>
-                  <a:srgbClr val="2E3A80"/>
-                </a:solidFill>
-                <a:latin typeface="Montserrat"/>
-              </a:rPr>
-              <a:t>•  </a:t>
+                  <a:srgbClr val="E8801A"/>
+                </a:solidFill>
+                <a:latin typeface="Montserrat"/>
+              </a:rPr>
+              <a:t>▸  </a:t>
             </a:r>
             <a:r>
               <a:rPr sz="1600" b="0" i="0">
@@ -9281,23 +9807,23 @@
                 </a:solidFill>
                 <a:latin typeface="Montserrat"/>
               </a:rPr>
-              <a:t>En aptitud pendiente de corrección</a:t>
+              <a:t>O detector portátil de gas</a:t>
             </a:r>
           </a:p>
           <a:p>
             <a:pPr>
               <a:spcAft>
-                <a:spcPts val="1000"/>
+                <a:spcPts val="1100"/>
               </a:spcAft>
             </a:pPr>
             <a:r>
               <a:rPr sz="1600" b="1" i="0">
                 <a:solidFill>
-                  <a:srgbClr val="2E3A80"/>
-                </a:solidFill>
-                <a:latin typeface="Montserrat"/>
-              </a:rPr>
-              <a:t>•  </a:t>
+                  <a:srgbClr val="E8801A"/>
+                </a:solidFill>
+                <a:latin typeface="Montserrat"/>
+              </a:rPr>
+              <a:t>▸  </a:t>
             </a:r>
             <a:r>
               <a:rPr sz="1600" b="0" i="0">
@@ -9306,23 +9832,23 @@
                 </a:solidFill>
                 <a:latin typeface="Montserrat"/>
               </a:rPr>
-              <a:t>No apta: fuera de servicio ya</a:t>
+              <a:t>Detector: calibrar cada 18 meses máximo</a:t>
             </a:r>
           </a:p>
           <a:p>
             <a:pPr>
               <a:spcAft>
-                <a:spcPts val="1000"/>
+                <a:spcPts val="1100"/>
               </a:spcAft>
             </a:pPr>
             <a:r>
               <a:rPr sz="1600" b="1" i="0">
                 <a:solidFill>
-                  <a:srgbClr val="2E3A80"/>
-                </a:solidFill>
-                <a:latin typeface="Montserrat"/>
-              </a:rPr>
-              <a:t>•  </a:t>
+                  <a:srgbClr val="E8801A"/>
+                </a:solidFill>
+                <a:latin typeface="Montserrat"/>
+              </a:rPr>
+              <a:t>▸  </a:t>
             </a:r>
             <a:r>
               <a:rPr sz="1600" b="0" i="0">
@@ -9331,14 +9857,14 @@
                 </a:solidFill>
                 <a:latin typeface="Montserrat"/>
               </a:rPr>
-              <a:t>Pendiente o no apta: avisar a distribuidora</a:t>
-            </a:r>
-          </a:p>
-        </p:txBody>
-      </p:sp>
-      <p:sp>
-        <p:nvSpPr>
-          <p:cNvPr id="8" name="imgph" descr="IMGQ:gas installation inspection checklist tablet"/>
+              <a:t>Descalibrado, dice «no hay gas» y sí lo hay</a:t>
+            </a:r>
+          </a:p>
+        </p:txBody>
+      </p:sp>
+      <p:sp>
+        <p:nvSpPr>
+          <p:cNvPr id="9" name="imgph" descr="IMGQ:portable gas leak detector handheld device"/>
           <p:cNvSpPr/>
           <p:nvPr/>
         </p:nvSpPr>
@@ -9384,7 +9910,7 @@
       </p:sp>
       <p:sp>
         <p:nvSpPr>
-          <p:cNvPr id="9" name="TextBox 8"/>
+          <p:cNvPr id="10" name="TextBox 9"/>
           <p:cNvSpPr txBox="1"/>
           <p:nvPr/>
         </p:nvSpPr>
@@ -9424,7 +9950,7 @@
                 </a:solidFill>
                 <a:latin typeface="Montserrat"/>
               </a:rPr>
-              <a:t>gas installation inspection checklist tablet</a:t>
+              <a:t>portable gas leak detector handheld device</a:t>
             </a:r>
           </a:p>
         </p:txBody>
@@ -9521,7 +10047,7 @@
                 </a:solidFill>
                 <a:latin typeface="Montserrat"/>
               </a:rPr>
-              <a:t>002 / 020</a:t>
+              <a:t>002 / 021</a:t>
             </a:r>
           </a:p>
         </p:txBody>
@@ -9585,7 +10111,7 @@
             <a:r>
               <a:rPr sz="2700" b="1" i="0">
                 <a:solidFill>
-                  <a:srgbClr val="1E2761"/>
+                  <a:srgbClr val="E8801A"/>
                 </a:solidFill>
                 <a:latin typeface="Montserrat"/>
               </a:rPr>
@@ -9597,6 +10123,50 @@
       <p:sp>
         <p:nvSpPr>
           <p:cNvPr id="6" name="Rounded Rectangle 5"/>
+          <p:cNvSpPr/>
+          <p:nvPr/>
+        </p:nvSpPr>
+        <p:spPr>
+          <a:xfrm>
+            <a:off x="868680" y="1234440"/>
+            <a:ext cx="1463040" cy="73152"/>
+          </a:xfrm>
+          <a:prstGeom prst="roundRect">
+            <a:avLst/>
+          </a:prstGeom>
+          <a:solidFill>
+            <a:srgbClr val="1E2761"/>
+          </a:solidFill>
+          <a:ln>
+            <a:noFill/>
+          </a:ln>
+          <a:effectLst/>
+        </p:spPr>
+        <p:style>
+          <a:lnRef idx="1">
+            <a:schemeClr val="accent1"/>
+          </a:lnRef>
+          <a:fillRef idx="3">
+            <a:schemeClr val="accent1"/>
+          </a:fillRef>
+          <a:effectRef idx="2">
+            <a:schemeClr val="accent1"/>
+          </a:effectRef>
+          <a:fontRef idx="minor">
+            <a:schemeClr val="lt1"/>
+          </a:fontRef>
+        </p:style>
+        <p:txBody>
+          <a:bodyPr rtlCol="0" anchor="ctr"/>
+          <a:lstStyle/>
+          <a:p>
+            <a:pPr algn="ctr"/>
+          </a:p>
+        </p:txBody>
+      </p:sp>
+      <p:sp>
+        <p:nvSpPr>
+          <p:cNvPr id="7" name="Rounded Rectangle 6"/>
           <p:cNvSpPr/>
           <p:nvPr/>
         </p:nvSpPr>
@@ -9642,7 +10212,7 @@
       </p:sp>
       <p:sp>
         <p:nvSpPr>
-          <p:cNvPr id="7" name="TextBox 6"/>
+          <p:cNvPr id="8" name="TextBox 7"/>
           <p:cNvSpPr txBox="1"/>
           <p:nvPr/>
         </p:nvSpPr>
@@ -9677,7 +10247,7 @@
       </p:sp>
       <p:sp>
         <p:nvSpPr>
-          <p:cNvPr id="8" name="TextBox 7"/>
+          <p:cNvPr id="9" name="TextBox 8"/>
           <p:cNvSpPr txBox="1"/>
           <p:nvPr/>
         </p:nvSpPr>
@@ -9712,7 +10282,7 @@
       </p:sp>
       <p:sp>
         <p:nvSpPr>
-          <p:cNvPr id="9" name="Rounded Rectangle 8"/>
+          <p:cNvPr id="10" name="Rounded Rectangle 9"/>
           <p:cNvSpPr/>
           <p:nvPr/>
         </p:nvSpPr>
@@ -9758,7 +10328,7 @@
       </p:sp>
       <p:sp>
         <p:nvSpPr>
-          <p:cNvPr id="10" name="TextBox 9"/>
+          <p:cNvPr id="11" name="TextBox 10"/>
           <p:cNvSpPr txBox="1"/>
           <p:nvPr/>
         </p:nvSpPr>
@@ -9793,7 +10363,7 @@
       </p:sp>
       <p:sp>
         <p:nvSpPr>
-          <p:cNvPr id="11" name="TextBox 10"/>
+          <p:cNvPr id="12" name="TextBox 11"/>
           <p:cNvSpPr txBox="1"/>
           <p:nvPr/>
         </p:nvSpPr>
@@ -9828,7 +10398,7 @@
       </p:sp>
       <p:sp>
         <p:nvSpPr>
-          <p:cNvPr id="12" name="Rounded Rectangle 11"/>
+          <p:cNvPr id="13" name="Rounded Rectangle 12"/>
           <p:cNvSpPr/>
           <p:nvPr/>
         </p:nvSpPr>
@@ -9874,7 +10444,7 @@
       </p:sp>
       <p:sp>
         <p:nvSpPr>
-          <p:cNvPr id="13" name="TextBox 12"/>
+          <p:cNvPr id="14" name="TextBox 13"/>
           <p:cNvSpPr txBox="1"/>
           <p:nvPr/>
         </p:nvSpPr>
@@ -9909,7 +10479,7 @@
       </p:sp>
       <p:sp>
         <p:nvSpPr>
-          <p:cNvPr id="14" name="TextBox 13"/>
+          <p:cNvPr id="15" name="TextBox 14"/>
           <p:cNvSpPr txBox="1"/>
           <p:nvPr/>
         </p:nvSpPr>
@@ -9975,6 +10545,465 @@
             <a:avLst/>
           </a:prstGeom>
           <a:solidFill>
+            <a:srgbClr val="FFFFFF"/>
+          </a:solidFill>
+          <a:ln>
+            <a:noFill/>
+          </a:ln>
+          <a:effectLst/>
+        </p:spPr>
+        <p:style>
+          <a:lnRef idx="1">
+            <a:schemeClr val="accent1"/>
+          </a:lnRef>
+          <a:fillRef idx="3">
+            <a:schemeClr val="accent1"/>
+          </a:fillRef>
+          <a:effectRef idx="2">
+            <a:schemeClr val="accent1"/>
+          </a:effectRef>
+          <a:fontRef idx="minor">
+            <a:schemeClr val="lt1"/>
+          </a:fontRef>
+        </p:style>
+        <p:txBody>
+          <a:bodyPr rtlCol="0" anchor="ctr"/>
+          <a:lstStyle/>
+          <a:p>
+            <a:pPr algn="ctr"/>
+          </a:p>
+        </p:txBody>
+      </p:sp>
+      <p:sp>
+        <p:nvSpPr>
+          <p:cNvPr id="3" name="TextBox 2"/>
+          <p:cNvSpPr txBox="1"/>
+          <p:nvPr/>
+        </p:nvSpPr>
+        <p:spPr>
+          <a:xfrm>
+            <a:off x="10607040" y="320040"/>
+            <a:ext cx="1371600" cy="365760"/>
+          </a:xfrm>
+          <a:prstGeom prst="rect">
+            <a:avLst/>
+          </a:prstGeom>
+          <a:noFill/>
+        </p:spPr>
+        <p:txBody>
+          <a:bodyPr wrap="square">
+            <a:spAutoFit/>
+          </a:bodyPr>
+          <a:lstStyle/>
+          <a:p>
+            <a:pPr algn="r"/>
+            <a:r>
+              <a:rPr sz="1000" b="1" i="0">
+                <a:solidFill>
+                  <a:srgbClr val="64748B"/>
+                </a:solidFill>
+                <a:latin typeface="Montserrat"/>
+              </a:rPr>
+              <a:t>020 / 021</a:t>
+            </a:r>
+          </a:p>
+        </p:txBody>
+      </p:sp>
+      <p:sp>
+        <p:nvSpPr>
+          <p:cNvPr id="4" name="TextBox 3"/>
+          <p:cNvSpPr txBox="1"/>
+          <p:nvPr/>
+        </p:nvSpPr>
+        <p:spPr>
+          <a:xfrm>
+            <a:off x="457200" y="6419088"/>
+            <a:ext cx="8229600" cy="365760"/>
+          </a:xfrm>
+          <a:prstGeom prst="rect">
+            <a:avLst/>
+          </a:prstGeom>
+          <a:noFill/>
+        </p:spPr>
+        <p:txBody>
+          <a:bodyPr wrap="square">
+            <a:spAutoFit/>
+          </a:bodyPr>
+          <a:lstStyle/>
+          <a:p>
+            <a:r>
+              <a:rPr sz="900" b="0" i="0">
+                <a:solidFill>
+                  <a:srgbClr val="64748B"/>
+                </a:solidFill>
+                <a:latin typeface="Montserrat"/>
+              </a:rPr>
+              <a:t>Curso Gas B · Tema 16 · UNE 60670-11/12/13</a:t>
+            </a:r>
+          </a:p>
+        </p:txBody>
+      </p:sp>
+      <p:sp>
+        <p:nvSpPr>
+          <p:cNvPr id="5" name="TextBox 4"/>
+          <p:cNvSpPr txBox="1"/>
+          <p:nvPr/>
+        </p:nvSpPr>
+        <p:spPr>
+          <a:xfrm>
+            <a:off x="822960" y="457200"/>
+            <a:ext cx="10058400" cy="365760"/>
+          </a:xfrm>
+          <a:prstGeom prst="rect">
+            <a:avLst/>
+          </a:prstGeom>
+          <a:noFill/>
+        </p:spPr>
+        <p:txBody>
+          <a:bodyPr wrap="square">
+            <a:spAutoFit/>
+          </a:bodyPr>
+          <a:lstStyle/>
+          <a:p>
+            <a:r>
+              <a:rPr sz="1300" b="1" i="0">
+                <a:solidFill>
+                  <a:srgbClr val="E8801A"/>
+                </a:solidFill>
+                <a:latin typeface="Montserrat"/>
+              </a:rPr>
+              <a:t>PARTE 11 · APARTADO 5.2</a:t>
+            </a:r>
+          </a:p>
+        </p:txBody>
+      </p:sp>
+      <p:sp>
+        <p:nvSpPr>
+          <p:cNvPr id="6" name="TextBox 5"/>
+          <p:cNvSpPr txBox="1"/>
+          <p:nvPr/>
+        </p:nvSpPr>
+        <p:spPr>
+          <a:xfrm>
+            <a:off x="822960" y="868680"/>
+            <a:ext cx="10515600" cy="914400"/>
+          </a:xfrm>
+          <a:prstGeom prst="rect">
+            <a:avLst/>
+          </a:prstGeom>
+          <a:noFill/>
+        </p:spPr>
+        <p:txBody>
+          <a:bodyPr wrap="square">
+            <a:spAutoFit/>
+          </a:bodyPr>
+          <a:lstStyle/>
+          <a:p>
+            <a:r>
+              <a:rPr sz="2800" b="1" i="0">
+                <a:solidFill>
+                  <a:srgbClr val="1E2761"/>
+                </a:solidFill>
+                <a:latin typeface="Montserrat"/>
+              </a:rPr>
+              <a:t>Tres estados de una instalación</a:t>
+            </a:r>
+          </a:p>
+        </p:txBody>
+      </p:sp>
+      <p:sp>
+        <p:nvSpPr>
+          <p:cNvPr id="7" name="Rounded Rectangle 6"/>
+          <p:cNvSpPr/>
+          <p:nvPr/>
+        </p:nvSpPr>
+        <p:spPr>
+          <a:xfrm>
+            <a:off x="868680" y="1627632"/>
+            <a:ext cx="2011680" cy="73152"/>
+          </a:xfrm>
+          <a:prstGeom prst="roundRect">
+            <a:avLst/>
+          </a:prstGeom>
+          <a:solidFill>
+            <a:srgbClr val="E8801A"/>
+          </a:solidFill>
+          <a:ln>
+            <a:noFill/>
+          </a:ln>
+          <a:effectLst/>
+        </p:spPr>
+        <p:style>
+          <a:lnRef idx="1">
+            <a:schemeClr val="accent1"/>
+          </a:lnRef>
+          <a:fillRef idx="3">
+            <a:schemeClr val="accent1"/>
+          </a:fillRef>
+          <a:effectRef idx="2">
+            <a:schemeClr val="accent1"/>
+          </a:effectRef>
+          <a:fontRef idx="minor">
+            <a:schemeClr val="lt1"/>
+          </a:fontRef>
+        </p:style>
+        <p:txBody>
+          <a:bodyPr rtlCol="0" anchor="ctr"/>
+          <a:lstStyle/>
+          <a:p>
+            <a:pPr algn="ctr"/>
+          </a:p>
+        </p:txBody>
+      </p:sp>
+      <p:sp>
+        <p:nvSpPr>
+          <p:cNvPr id="8" name="TextBox 7"/>
+          <p:cNvSpPr txBox="1"/>
+          <p:nvPr/>
+        </p:nvSpPr>
+        <p:spPr>
+          <a:xfrm>
+            <a:off x="822960" y="1965960"/>
+            <a:ext cx="4983480" cy="4206240"/>
+          </a:xfrm>
+          <a:prstGeom prst="rect">
+            <a:avLst/>
+          </a:prstGeom>
+          <a:noFill/>
+        </p:spPr>
+        <p:txBody>
+          <a:bodyPr wrap="square">
+            <a:spAutoFit/>
+          </a:bodyPr>
+          <a:lstStyle/>
+          <a:p>
+            <a:pPr>
+              <a:spcAft>
+                <a:spcPts val="1100"/>
+              </a:spcAft>
+            </a:pPr>
+            <a:r>
+              <a:rPr sz="1600" b="1" i="0">
+                <a:solidFill>
+                  <a:srgbClr val="E8801A"/>
+                </a:solidFill>
+                <a:latin typeface="Montserrat"/>
+              </a:rPr>
+              <a:t>▸  </a:t>
+            </a:r>
+            <a:r>
+              <a:rPr sz="1600" b="0" i="0">
+                <a:solidFill>
+                  <a:srgbClr val="1B2330"/>
+                </a:solidFill>
+                <a:latin typeface="Montserrat"/>
+              </a:rPr>
+              <a:t>Apta para uso: sigue funcionando</a:t>
+            </a:r>
+          </a:p>
+          <a:p>
+            <a:pPr>
+              <a:spcAft>
+                <a:spcPts val="1100"/>
+              </a:spcAft>
+            </a:pPr>
+            <a:r>
+              <a:rPr sz="1600" b="1" i="0">
+                <a:solidFill>
+                  <a:srgbClr val="E8801A"/>
+                </a:solidFill>
+                <a:latin typeface="Montserrat"/>
+              </a:rPr>
+              <a:t>▸  </a:t>
+            </a:r>
+            <a:r>
+              <a:rPr sz="1600" b="0" i="0">
+                <a:solidFill>
+                  <a:srgbClr val="1B2330"/>
+                </a:solidFill>
+                <a:latin typeface="Montserrat"/>
+              </a:rPr>
+              <a:t>En aptitud pendiente de corrección</a:t>
+            </a:r>
+          </a:p>
+          <a:p>
+            <a:pPr>
+              <a:spcAft>
+                <a:spcPts val="1100"/>
+              </a:spcAft>
+            </a:pPr>
+            <a:r>
+              <a:rPr sz="1600" b="1" i="0">
+                <a:solidFill>
+                  <a:srgbClr val="E8801A"/>
+                </a:solidFill>
+                <a:latin typeface="Montserrat"/>
+              </a:rPr>
+              <a:t>▸  </a:t>
+            </a:r>
+            <a:r>
+              <a:rPr sz="1600" b="0" i="0">
+                <a:solidFill>
+                  <a:srgbClr val="1B2330"/>
+                </a:solidFill>
+                <a:latin typeface="Montserrat"/>
+              </a:rPr>
+              <a:t>No apta: fuera de servicio ya</a:t>
+            </a:r>
+          </a:p>
+          <a:p>
+            <a:pPr>
+              <a:spcAft>
+                <a:spcPts val="1100"/>
+              </a:spcAft>
+            </a:pPr>
+            <a:r>
+              <a:rPr sz="1600" b="1" i="0">
+                <a:solidFill>
+                  <a:srgbClr val="E8801A"/>
+                </a:solidFill>
+                <a:latin typeface="Montserrat"/>
+              </a:rPr>
+              <a:t>▸  </a:t>
+            </a:r>
+            <a:r>
+              <a:rPr sz="1600" b="0" i="0">
+                <a:solidFill>
+                  <a:srgbClr val="1B2330"/>
+                </a:solidFill>
+                <a:latin typeface="Montserrat"/>
+              </a:rPr>
+              <a:t>Pendiente o no apta: avisar a distribuidora</a:t>
+            </a:r>
+          </a:p>
+        </p:txBody>
+      </p:sp>
+      <p:sp>
+        <p:nvSpPr>
+          <p:cNvPr id="9" name="imgph" descr="IMGQ:gas installation inspection checklist tablet"/>
+          <p:cNvSpPr/>
+          <p:nvPr/>
+        </p:nvSpPr>
+        <p:spPr>
+          <a:xfrm>
+            <a:off x="5806440" y="1051560"/>
+            <a:ext cx="5298947" cy="4629150"/>
+          </a:xfrm>
+          <a:prstGeom prst="roundRect">
+            <a:avLst/>
+          </a:prstGeom>
+          <a:solidFill>
+            <a:srgbClr val="F3F6FB"/>
+          </a:solidFill>
+          <a:ln w="12700">
+            <a:solidFill>
+              <a:srgbClr val="C7D2E6"/>
+            </a:solidFill>
+          </a:ln>
+          <a:effectLst/>
+        </p:spPr>
+        <p:style>
+          <a:lnRef idx="1">
+            <a:schemeClr val="accent1"/>
+          </a:lnRef>
+          <a:fillRef idx="3">
+            <a:schemeClr val="accent1"/>
+          </a:fillRef>
+          <a:effectRef idx="2">
+            <a:schemeClr val="accent1"/>
+          </a:effectRef>
+          <a:fontRef idx="minor">
+            <a:schemeClr val="lt1"/>
+          </a:fontRef>
+        </p:style>
+        <p:txBody>
+          <a:bodyPr rtlCol="0" anchor="ctr"/>
+          <a:lstStyle/>
+          <a:p>
+            <a:pPr algn="ctr"/>
+          </a:p>
+        </p:txBody>
+      </p:sp>
+      <p:sp>
+        <p:nvSpPr>
+          <p:cNvPr id="10" name="TextBox 9"/>
+          <p:cNvSpPr txBox="1"/>
+          <p:nvPr/>
+        </p:nvSpPr>
+        <p:spPr>
+          <a:xfrm>
+            <a:off x="6080760" y="2726055"/>
+            <a:ext cx="4750307" cy="1280160"/>
+          </a:xfrm>
+          <a:prstGeom prst="rect">
+            <a:avLst/>
+          </a:prstGeom>
+          <a:noFill/>
+        </p:spPr>
+        <p:txBody>
+          <a:bodyPr wrap="square">
+            <a:spAutoFit/>
+          </a:bodyPr>
+          <a:lstStyle/>
+          <a:p>
+            <a:pPr algn="ctr"/>
+            <a:r>
+              <a:rPr sz="1400" b="1" i="0">
+                <a:solidFill>
+                  <a:srgbClr val="64748B"/>
+                </a:solidFill>
+                <a:latin typeface="Montserrat"/>
+              </a:rPr>
+              <a:t>IMAGEN REALISTA</a:t>
+            </a:r>
+          </a:p>
+          <a:p>
+            <a:pPr algn="ctr"/>
+            <a:r>
+              <a:rPr sz="1100" b="0" i="1">
+                <a:solidFill>
+                  <a:srgbClr val="64748B"/>
+                </a:solidFill>
+                <a:latin typeface="Montserrat"/>
+              </a:rPr>
+              <a:t>gas installation inspection checklist tablet</a:t>
+            </a:r>
+          </a:p>
+        </p:txBody>
+      </p:sp>
+    </p:spTree>
+  </p:cSld>
+  <p:clrMapOvr>
+    <a:masterClrMapping/>
+  </p:clrMapOvr>
+</p:sld>
+</file>
+
+<file path=ppt/slides/slide21.xml><?xml version="1.0" encoding="utf-8"?>
+<p:sld xmlns:a="http://schemas.openxmlformats.org/drawingml/2006/main" xmlns:p="http://schemas.openxmlformats.org/presentationml/2006/main" xmlns:r="http://schemas.openxmlformats.org/officeDocument/2006/relationships">
+  <p:cSld>
+    <p:spTree>
+      <p:nvGrpSpPr>
+        <p:cNvPr id="1" name=""/>
+        <p:cNvGrpSpPr/>
+        <p:nvPr/>
+      </p:nvGrpSpPr>
+      <p:grpSpPr/>
+      <p:sp>
+        <p:nvSpPr>
+          <p:cNvPr id="2" name="Rectangle 1"/>
+          <p:cNvSpPr/>
+          <p:nvPr/>
+        </p:nvSpPr>
+        <p:spPr>
+          <a:xfrm>
+            <a:off x="0" y="0"/>
+            <a:ext cx="12191695" cy="6858000"/>
+          </a:xfrm>
+          <a:prstGeom prst="rect">
+            <a:avLst/>
+          </a:prstGeom>
+          <a:solidFill>
             <a:srgbClr val="1E2761"/>
           </a:solidFill>
           <a:ln>
@@ -10029,7 +11058,7 @@
             <a:r>
               <a:rPr sz="1400" b="1" i="0">
                 <a:solidFill>
-                  <a:srgbClr val="CADCFC"/>
+                  <a:srgbClr val="F4A24C"/>
                 </a:solidFill>
                 <a:latin typeface="Montserrat"/>
               </a:rPr>
@@ -10040,13 +11069,57 @@
       </p:sp>
       <p:sp>
         <p:nvSpPr>
-          <p:cNvPr id="4" name="TextBox 3"/>
+          <p:cNvPr id="4" name="Rounded Rectangle 3"/>
+          <p:cNvSpPr/>
+          <p:nvPr/>
+        </p:nvSpPr>
+        <p:spPr>
+          <a:xfrm>
+            <a:off x="868680" y="1051560"/>
+            <a:ext cx="1463040" cy="82296"/>
+          </a:xfrm>
+          <a:prstGeom prst="roundRect">
+            <a:avLst/>
+          </a:prstGeom>
+          <a:solidFill>
+            <a:srgbClr val="E8801A"/>
+          </a:solidFill>
+          <a:ln>
+            <a:noFill/>
+          </a:ln>
+          <a:effectLst/>
+        </p:spPr>
+        <p:style>
+          <a:lnRef idx="1">
+            <a:schemeClr val="accent1"/>
+          </a:lnRef>
+          <a:fillRef idx="3">
+            <a:schemeClr val="accent1"/>
+          </a:fillRef>
+          <a:effectRef idx="2">
+            <a:schemeClr val="accent1"/>
+          </a:effectRef>
+          <a:fontRef idx="minor">
+            <a:schemeClr val="lt1"/>
+          </a:fontRef>
+        </p:style>
+        <p:txBody>
+          <a:bodyPr rtlCol="0" anchor="ctr"/>
+          <a:lstStyle/>
+          <a:p>
+            <a:pPr algn="ctr"/>
+          </a:p>
+        </p:txBody>
+      </p:sp>
+      <p:sp>
+        <p:nvSpPr>
+          <p:cNvPr id="5" name="TextBox 4"/>
           <p:cNvSpPr txBox="1"/>
           <p:nvPr/>
         </p:nvSpPr>
         <p:spPr>
           <a:xfrm>
-            <a:off x="822960" y="1143000"/>
+            <a:off x="822960" y="1234440"/>
             <a:ext cx="10515600" cy="1097280"/>
           </a:xfrm>
           <a:prstGeom prst="rect">
@@ -10074,14 +11147,14 @@
       </p:sp>
       <p:sp>
         <p:nvSpPr>
-          <p:cNvPr id="5" name="TextBox 4"/>
+          <p:cNvPr id="6" name="TextBox 5"/>
           <p:cNvSpPr txBox="1"/>
           <p:nvPr/>
         </p:nvSpPr>
         <p:spPr>
           <a:xfrm>
-            <a:off x="822960" y="2514600"/>
-            <a:ext cx="10515600" cy="2834640"/>
+            <a:off x="822960" y="2606040"/>
+            <a:ext cx="10515600" cy="2743200"/>
           </a:xfrm>
           <a:prstGeom prst="rect">
             <a:avLst/>
@@ -10102,7 +11175,7 @@
             <a:r>
               <a:rPr sz="2000" b="1" i="0">
                 <a:solidFill>
-                  <a:srgbClr val="CADCFC"/>
+                  <a:srgbClr val="F4A24C"/>
                 </a:solidFill>
                 <a:latin typeface="Montserrat"/>
               </a:rPr>
@@ -10127,7 +11200,7 @@
             <a:r>
               <a:rPr sz="2000" b="1" i="0">
                 <a:solidFill>
-                  <a:srgbClr val="CADCFC"/>
+                  <a:srgbClr val="F4A24C"/>
                 </a:solidFill>
                 <a:latin typeface="Montserrat"/>
               </a:rPr>
@@ -10152,7 +11225,7 @@
             <a:r>
               <a:rPr sz="2000" b="1" i="0">
                 <a:solidFill>
-                  <a:srgbClr val="CADCFC"/>
+                  <a:srgbClr val="F4A24C"/>
                 </a:solidFill>
                 <a:latin typeface="Montserrat"/>
               </a:rPr>
@@ -10177,7 +11250,7 @@
             <a:r>
               <a:rPr sz="2000" b="1" i="0">
                 <a:solidFill>
-                  <a:srgbClr val="CADCFC"/>
+                  <a:srgbClr val="F4A24C"/>
                 </a:solidFill>
                 <a:latin typeface="Montserrat"/>
               </a:rPr>
@@ -10197,20 +11270,20 @@
       </p:sp>
       <p:sp>
         <p:nvSpPr>
-          <p:cNvPr id="6" name="Rounded Rectangle 5"/>
+          <p:cNvPr id="7" name="Rounded Rectangle 6"/>
           <p:cNvSpPr/>
           <p:nvPr/>
         </p:nvSpPr>
         <p:spPr>
           <a:xfrm>
             <a:off x="822960" y="5532120"/>
-            <a:ext cx="10515600" cy="777240"/>
+            <a:ext cx="10515600" cy="822960"/>
           </a:xfrm>
           <a:prstGeom prst="roundRect">
             <a:avLst/>
           </a:prstGeom>
           <a:solidFill>
-            <a:srgbClr val="2E3A80"/>
+            <a:srgbClr val="E8801A"/>
           </a:solidFill>
           <a:ln>
             <a:noFill/>
@@ -10241,13 +11314,13 @@
       </p:sp>
       <p:sp>
         <p:nvSpPr>
-          <p:cNvPr id="7" name="TextBox 6"/>
+          <p:cNvPr id="8" name="TextBox 7"/>
           <p:cNvSpPr txBox="1"/>
           <p:nvPr/>
         </p:nvSpPr>
         <p:spPr>
           <a:xfrm>
-            <a:off x="1051560" y="5605272"/>
+            <a:off x="1051560" y="5623560"/>
             <a:ext cx="10058400" cy="640080"/>
           </a:xfrm>
           <a:prstGeom prst="rect">
@@ -10264,7 +11337,7 @@
             <a:r>
               <a:rPr sz="1500" b="1" i="1">
                 <a:solidFill>
-                  <a:srgbClr val="CADCFC"/>
+                  <a:srgbClr val="1E2761"/>
                 </a:solidFill>
                 <a:latin typeface="Montserrat"/>
               </a:rPr>
@@ -10365,7 +11438,7 @@
                 </a:solidFill>
                 <a:latin typeface="Montserrat"/>
               </a:rPr>
-              <a:t>003 / 020</a:t>
+              <a:t>003 / 021</a:t>
             </a:r>
           </a:p>
         </p:txBody>
@@ -10412,7 +11485,7 @@
         </p:nvSpPr>
         <p:spPr>
           <a:xfrm>
-            <a:off x="822960" y="457200"/>
+            <a:off x="822960" y="502920"/>
             <a:ext cx="8229600" cy="365760"/>
           </a:xfrm>
           <a:prstGeom prst="rect">
@@ -10427,13 +11500,13 @@
           <a:lstStyle/>
           <a:p>
             <a:r>
-              <a:rPr sz="1200" b="1" i="0">
-                <a:solidFill>
-                  <a:srgbClr val="64748B"/>
-                </a:solidFill>
-                <a:latin typeface="Montserrat"/>
-              </a:rPr>
-              <a:t>CONTEXTO NORMATIVO</a:t>
+              <a:rPr sz="1300" b="1" i="0">
+                <a:solidFill>
+                  <a:srgbClr val="E8801A"/>
+                </a:solidFill>
+                <a:latin typeface="Montserrat"/>
+              </a:rPr>
+              <a:t>PARTES DE ESTE VÍDEO</a:t>
             </a:r>
           </a:p>
         </p:txBody>
@@ -10446,7 +11519,7 @@
         </p:nvSpPr>
         <p:spPr>
           <a:xfrm>
-            <a:off x="822960" y="868680"/>
+            <a:off x="822960" y="914400"/>
             <a:ext cx="10515600" cy="914400"/>
           </a:xfrm>
           <a:prstGeom prst="rect">
@@ -10467,155 +11540,30 @@
                 </a:solidFill>
                 <a:latin typeface="Montserrat"/>
               </a:rPr>
-              <a:t>La UNE 60670 y sus 13 partes</a:t>
-            </a:r>
-          </a:p>
-        </p:txBody>
-      </p:sp>
-      <p:sp>
-        <p:nvSpPr>
-          <p:cNvPr id="7" name="TextBox 6"/>
-          <p:cNvSpPr txBox="1"/>
-          <p:nvPr/>
-        </p:nvSpPr>
-        <p:spPr>
-          <a:xfrm>
-            <a:off x="822960" y="1920240"/>
-            <a:ext cx="4983480" cy="4206240"/>
-          </a:xfrm>
-          <a:prstGeom prst="rect">
-            <a:avLst/>
-          </a:prstGeom>
-          <a:noFill/>
-        </p:spPr>
-        <p:txBody>
-          <a:bodyPr wrap="square">
-            <a:spAutoFit/>
-          </a:bodyPr>
-          <a:lstStyle/>
-          <a:p>
-            <a:pPr>
-              <a:spcAft>
-                <a:spcPts val="1000"/>
-              </a:spcAft>
-            </a:pPr>
-            <a:r>
-              <a:rPr sz="1600" b="1" i="0">
-                <a:solidFill>
-                  <a:srgbClr val="2E3A80"/>
-                </a:solidFill>
-                <a:latin typeface="Montserrat"/>
-              </a:rPr>
-              <a:t>•  </a:t>
-            </a:r>
-            <a:r>
-              <a:rPr sz="1600" b="0" i="0">
-                <a:solidFill>
-                  <a:srgbClr val="1B2330"/>
-                </a:solidFill>
-                <a:latin typeface="Montserrat"/>
-              </a:rPr>
-              <a:t>Diseñar, construir, probar y controlar</a:t>
-            </a:r>
-          </a:p>
-          <a:p>
-            <a:pPr>
-              <a:spcAft>
-                <a:spcPts val="1000"/>
-              </a:spcAft>
-            </a:pPr>
-            <a:r>
-              <a:rPr sz="1600" b="1" i="0">
-                <a:solidFill>
-                  <a:srgbClr val="2E3A80"/>
-                </a:solidFill>
-                <a:latin typeface="Montserrat"/>
-              </a:rPr>
-              <a:t>•  </a:t>
-            </a:r>
-            <a:r>
-              <a:rPr sz="1600" b="0" i="0">
-                <a:solidFill>
-                  <a:srgbClr val="1B2330"/>
-                </a:solidFill>
-                <a:latin typeface="Montserrat"/>
-              </a:rPr>
-              <a:t>Partes 1 a 10: construir y estrenar</a:t>
-            </a:r>
-          </a:p>
-          <a:p>
-            <a:pPr>
-              <a:spcAft>
-                <a:spcPts val="1000"/>
-              </a:spcAft>
-            </a:pPr>
-            <a:r>
-              <a:rPr sz="1600" b="1" i="0">
-                <a:solidFill>
-                  <a:srgbClr val="2E3A80"/>
-                </a:solidFill>
-                <a:latin typeface="Montserrat"/>
-              </a:rPr>
-              <a:t>•  </a:t>
-            </a:r>
-            <a:r>
-              <a:rPr sz="1600" b="0" i="0">
-                <a:solidFill>
-                  <a:srgbClr val="1B2330"/>
-                </a:solidFill>
-                <a:latin typeface="Montserrat"/>
-              </a:rPr>
-              <a:t>Partes 11, 12 y 13: mantener y revisar</a:t>
-            </a:r>
-          </a:p>
-          <a:p>
-            <a:pPr>
-              <a:spcAft>
-                <a:spcPts val="1000"/>
-              </a:spcAft>
-            </a:pPr>
-            <a:r>
-              <a:rPr sz="1600" b="1" i="0">
-                <a:solidFill>
-                  <a:srgbClr val="2E3A80"/>
-                </a:solidFill>
-                <a:latin typeface="Montserrat"/>
-              </a:rPr>
-              <a:t>•  </a:t>
-            </a:r>
-            <a:r>
-              <a:rPr sz="1600" b="0" i="0">
-                <a:solidFill>
-                  <a:srgbClr val="1B2330"/>
-                </a:solidFill>
-                <a:latin typeface="Montserrat"/>
-              </a:rPr>
-              <a:t>Este tema cubre solo las tres últimas</a:t>
-            </a:r>
-          </a:p>
-        </p:txBody>
-      </p:sp>
-      <p:sp>
-        <p:nvSpPr>
-          <p:cNvPr id="8" name="imgph" descr="IMGQ:gas installation technical manual on table"/>
+              <a:t>En este vídeo</a:t>
+            </a:r>
+          </a:p>
+        </p:txBody>
+      </p:sp>
+      <p:sp>
+        <p:nvSpPr>
+          <p:cNvPr id="7" name="Rounded Rectangle 6"/>
           <p:cNvSpPr/>
           <p:nvPr/>
         </p:nvSpPr>
         <p:spPr>
           <a:xfrm>
-            <a:off x="5806440" y="1051560"/>
-            <a:ext cx="5298947" cy="4629150"/>
+            <a:off x="868680" y="1673352"/>
+            <a:ext cx="2011680" cy="73152"/>
           </a:xfrm>
           <a:prstGeom prst="roundRect">
             <a:avLst/>
           </a:prstGeom>
           <a:solidFill>
-            <a:srgbClr val="F3F6FB"/>
+            <a:srgbClr val="E8801A"/>
           </a:solidFill>
-          <a:ln w="12700">
-            <a:solidFill>
-              <a:srgbClr val="C7D2E6"/>
-            </a:solidFill>
+          <a:ln>
+            <a:noFill/>
           </a:ln>
           <a:effectLst/>
         </p:spPr>
@@ -10643,14 +11591,14 @@
       </p:sp>
       <p:sp>
         <p:nvSpPr>
-          <p:cNvPr id="9" name="TextBox 8"/>
+          <p:cNvPr id="8" name="TextBox 7"/>
           <p:cNvSpPr txBox="1"/>
           <p:nvPr/>
         </p:nvSpPr>
         <p:spPr>
           <a:xfrm>
-            <a:off x="6080760" y="2726055"/>
-            <a:ext cx="4750307" cy="1280160"/>
+            <a:off x="822960" y="2103120"/>
+            <a:ext cx="10515600" cy="4023360"/>
           </a:xfrm>
           <a:prstGeom prst="rect">
             <a:avLst/>
@@ -10663,27 +11611,53 @@
           </a:bodyPr>
           <a:lstStyle/>
           <a:p>
-            <a:pPr algn="ctr"/>
-            <a:r>
-              <a:rPr sz="1400" b="1" i="0">
-                <a:solidFill>
-                  <a:srgbClr val="64748B"/>
-                </a:solidFill>
-                <a:latin typeface="Montserrat"/>
-              </a:rPr>
-              <a:t>IMAGEN REALISTA</a:t>
-            </a:r>
-          </a:p>
-          <a:p>
-            <a:pPr algn="ctr"/>
-            <a:r>
-              <a:rPr sz="1100" b="0" i="1">
-                <a:solidFill>
-                  <a:srgbClr val="64748B"/>
-                </a:solidFill>
-                <a:latin typeface="Montserrat"/>
-              </a:rPr>
-              <a:t>gas installation technical manual on table</a:t>
+            <a:pPr>
+              <a:spcAft>
+                <a:spcPts val="900"/>
+              </a:spcAft>
+            </a:pPr>
+            <a:r>
+              <a:rPr sz="1800" b="1" i="0">
+                <a:solidFill>
+                  <a:srgbClr val="E8801A"/>
+                </a:solidFill>
+                <a:latin typeface="Montserrat"/>
+              </a:rPr>
+              <a:t>01   </a:t>
+            </a:r>
+            <a:r>
+              <a:rPr sz="1700" b="0" i="0">
+                <a:solidFill>
+                  <a:srgbClr val="1B2330"/>
+                </a:solidFill>
+                <a:latin typeface="Montserrat"/>
+              </a:rPr>
+              <a:t>Contexto normativo</a:t>
+            </a:r>
+          </a:p>
+          <a:p>
+            <a:pPr>
+              <a:spcAft>
+                <a:spcPts val="900"/>
+              </a:spcAft>
+            </a:pPr>
+            <a:r>
+              <a:rPr sz="1800" b="1" i="0">
+                <a:solidFill>
+                  <a:srgbClr val="E8801A"/>
+                </a:solidFill>
+                <a:latin typeface="Montserrat"/>
+              </a:rPr>
+              <a:t>02   </a:t>
+            </a:r>
+            <a:r>
+              <a:rPr sz="1700" b="0" i="0">
+                <a:solidFill>
+                  <a:srgbClr val="1B2330"/>
+                </a:solidFill>
+                <a:latin typeface="Montserrat"/>
+              </a:rPr>
+              <a:t>Parte 11</a:t>
             </a:r>
           </a:p>
         </p:txBody>
@@ -10780,7 +11754,7 @@
                 </a:solidFill>
                 <a:latin typeface="Montserrat"/>
               </a:rPr>
-              <a:t>004 / 020</a:t>
+              <a:t>004 / 021</a:t>
             </a:r>
           </a:p>
         </p:txBody>
@@ -10828,7 +11802,7 @@
         <p:spPr>
           <a:xfrm>
             <a:off x="822960" y="457200"/>
-            <a:ext cx="8229600" cy="365760"/>
+            <a:ext cx="10058400" cy="365760"/>
           </a:xfrm>
           <a:prstGeom prst="rect">
             <a:avLst/>
@@ -10842,13 +11816,13 @@
           <a:lstStyle/>
           <a:p>
             <a:r>
-              <a:rPr sz="1200" b="1" i="0">
-                <a:solidFill>
-                  <a:srgbClr val="64748B"/>
-                </a:solidFill>
-                <a:latin typeface="Montserrat"/>
-              </a:rPr>
-              <a:t>PARTE 11 · APARTADO 1</a:t>
+              <a:rPr sz="1300" b="1" i="0">
+                <a:solidFill>
+                  <a:srgbClr val="E8801A"/>
+                </a:solidFill>
+                <a:latin typeface="Montserrat"/>
+              </a:rPr>
+              <a:t>CONTEXTO NORMATIVO</a:t>
             </a:r>
           </a:p>
         </p:txBody>
@@ -10876,26 +11850,70 @@
           <a:lstStyle/>
           <a:p>
             <a:r>
-              <a:rPr sz="2700" b="1" i="0">
+              <a:rPr sz="2800" b="1" i="0">
                 <a:solidFill>
                   <a:srgbClr val="1E2761"/>
                 </a:solidFill>
                 <a:latin typeface="Montserrat"/>
               </a:rPr>
-              <a:t>Qué regula la Parte 11</a:t>
-            </a:r>
-          </a:p>
-        </p:txBody>
-      </p:sp>
-      <p:sp>
-        <p:nvSpPr>
-          <p:cNvPr id="7" name="TextBox 6"/>
+              <a:t>La UNE 60670 y sus 13 partes</a:t>
+            </a:r>
+          </a:p>
+        </p:txBody>
+      </p:sp>
+      <p:sp>
+        <p:nvSpPr>
+          <p:cNvPr id="7" name="Rounded Rectangle 6"/>
+          <p:cNvSpPr/>
+          <p:nvPr/>
+        </p:nvSpPr>
+        <p:spPr>
+          <a:xfrm>
+            <a:off x="868680" y="1627632"/>
+            <a:ext cx="2011680" cy="73152"/>
+          </a:xfrm>
+          <a:prstGeom prst="roundRect">
+            <a:avLst/>
+          </a:prstGeom>
+          <a:solidFill>
+            <a:srgbClr val="E8801A"/>
+          </a:solidFill>
+          <a:ln>
+            <a:noFill/>
+          </a:ln>
+          <a:effectLst/>
+        </p:spPr>
+        <p:style>
+          <a:lnRef idx="1">
+            <a:schemeClr val="accent1"/>
+          </a:lnRef>
+          <a:fillRef idx="3">
+            <a:schemeClr val="accent1"/>
+          </a:fillRef>
+          <a:effectRef idx="2">
+            <a:schemeClr val="accent1"/>
+          </a:effectRef>
+          <a:fontRef idx="minor">
+            <a:schemeClr val="lt1"/>
+          </a:fontRef>
+        </p:style>
+        <p:txBody>
+          <a:bodyPr rtlCol="0" anchor="ctr"/>
+          <a:lstStyle/>
+          <a:p>
+            <a:pPr algn="ctr"/>
+          </a:p>
+        </p:txBody>
+      </p:sp>
+      <p:sp>
+        <p:nvSpPr>
+          <p:cNvPr id="8" name="TextBox 7"/>
           <p:cNvSpPr txBox="1"/>
           <p:nvPr/>
         </p:nvSpPr>
         <p:spPr>
           <a:xfrm>
-            <a:off x="822960" y="1920240"/>
+            <a:off x="822960" y="1965960"/>
             <a:ext cx="4983480" cy="4206240"/>
           </a:xfrm>
           <a:prstGeom prst="rect">
@@ -10911,17 +11929,17 @@
           <a:p>
             <a:pPr>
               <a:spcAft>
-                <a:spcPts val="1000"/>
+                <a:spcPts val="1100"/>
               </a:spcAft>
             </a:pPr>
             <a:r>
               <a:rPr sz="1600" b="1" i="0">
                 <a:solidFill>
-                  <a:srgbClr val="2E3A80"/>
-                </a:solidFill>
-                <a:latin typeface="Montserrat"/>
-              </a:rPr>
-              <a:t>•  </a:t>
+                  <a:srgbClr val="E8801A"/>
+                </a:solidFill>
+                <a:latin typeface="Montserrat"/>
+              </a:rPr>
+              <a:t>▸  </a:t>
             </a:r>
             <a:r>
               <a:rPr sz="1600" b="0" i="0">
@@ -10930,23 +11948,23 @@
                 </a:solidFill>
                 <a:latin typeface="Montserrat"/>
               </a:rPr>
-              <a:t>Operaciones en instalaciones en servicio</a:t>
+              <a:t>Diseñar, construir, probar y controlar</a:t>
             </a:r>
           </a:p>
           <a:p>
             <a:pPr>
               <a:spcAft>
-                <a:spcPts val="1000"/>
+                <a:spcPts val="1100"/>
               </a:spcAft>
             </a:pPr>
             <a:r>
               <a:rPr sz="1600" b="1" i="0">
                 <a:solidFill>
-                  <a:srgbClr val="2E3A80"/>
-                </a:solidFill>
-                <a:latin typeface="Montserrat"/>
-              </a:rPr>
-              <a:t>•  </a:t>
+                  <a:srgbClr val="E8801A"/>
+                </a:solidFill>
+                <a:latin typeface="Montserrat"/>
+              </a:rPr>
+              <a:t>▸  </a:t>
             </a:r>
             <a:r>
               <a:rPr sz="1600" b="0" i="0">
@@ -10955,23 +11973,23 @@
                 </a:solidFill>
                 <a:latin typeface="Montserrat"/>
               </a:rPr>
-              <a:t>MOP igual o menor de 5 bar</a:t>
+              <a:t>Partes 1 a 10: construir y estrenar</a:t>
             </a:r>
           </a:p>
           <a:p>
             <a:pPr>
               <a:spcAft>
-                <a:spcPts val="1000"/>
+                <a:spcPts val="1100"/>
               </a:spcAft>
             </a:pPr>
             <a:r>
               <a:rPr sz="1600" b="1" i="0">
                 <a:solidFill>
-                  <a:srgbClr val="2E3A80"/>
-                </a:solidFill>
-                <a:latin typeface="Montserrat"/>
-              </a:rPr>
-              <a:t>•  </a:t>
+                  <a:srgbClr val="E8801A"/>
+                </a:solidFill>
+                <a:latin typeface="Montserrat"/>
+              </a:rPr>
+              <a:t>▸  </a:t>
             </a:r>
             <a:r>
               <a:rPr sz="1600" b="0" i="0">
@@ -10980,14 +11998,39 @@
                 </a:solidFill>
                 <a:latin typeface="Montserrat"/>
               </a:rPr>
-              <a:t>Directrices generales de actuación</a:t>
-            </a:r>
-          </a:p>
-        </p:txBody>
-      </p:sp>
-      <p:sp>
-        <p:nvSpPr>
-          <p:cNvPr id="8" name="imgph" descr="IMGQ:technician working on gas pipe in service"/>
+              <a:t>Partes 11, 12 y 13: mantener y revisar</a:t>
+            </a:r>
+          </a:p>
+          <a:p>
+            <a:pPr>
+              <a:spcAft>
+                <a:spcPts val="1100"/>
+              </a:spcAft>
+            </a:pPr>
+            <a:r>
+              <a:rPr sz="1600" b="1" i="0">
+                <a:solidFill>
+                  <a:srgbClr val="E8801A"/>
+                </a:solidFill>
+                <a:latin typeface="Montserrat"/>
+              </a:rPr>
+              <a:t>▸  </a:t>
+            </a:r>
+            <a:r>
+              <a:rPr sz="1600" b="0" i="0">
+                <a:solidFill>
+                  <a:srgbClr val="1B2330"/>
+                </a:solidFill>
+                <a:latin typeface="Montserrat"/>
+              </a:rPr>
+              <a:t>Este tema cubre solo las tres últimas</a:t>
+            </a:r>
+          </a:p>
+        </p:txBody>
+      </p:sp>
+      <p:sp>
+        <p:nvSpPr>
+          <p:cNvPr id="9" name="imgph" descr="IMGQ:gas installation technical manual on table"/>
           <p:cNvSpPr/>
           <p:nvPr/>
         </p:nvSpPr>
@@ -11033,7 +12076,7 @@
       </p:sp>
       <p:sp>
         <p:nvSpPr>
-          <p:cNvPr id="9" name="TextBox 8"/>
+          <p:cNvPr id="10" name="TextBox 9"/>
           <p:cNvSpPr txBox="1"/>
           <p:nvPr/>
         </p:nvSpPr>
@@ -11073,7 +12116,7 @@
                 </a:solidFill>
                 <a:latin typeface="Montserrat"/>
               </a:rPr>
-              <a:t>technician working on gas pipe in service</a:t>
+              <a:t>gas installation technical manual on table</a:t>
             </a:r>
           </a:p>
         </p:txBody>
@@ -11170,7 +12213,7 @@
                 </a:solidFill>
                 <a:latin typeface="Montserrat"/>
               </a:rPr>
-              <a:t>005 / 020</a:t>
+              <a:t>005 / 021</a:t>
             </a:r>
           </a:p>
         </p:txBody>
@@ -11218,7 +12261,7 @@
         <p:spPr>
           <a:xfrm>
             <a:off x="822960" y="457200"/>
-            <a:ext cx="8229600" cy="365760"/>
+            <a:ext cx="10058400" cy="365760"/>
           </a:xfrm>
           <a:prstGeom prst="rect">
             <a:avLst/>
@@ -11232,13 +12275,13 @@
           <a:lstStyle/>
           <a:p>
             <a:r>
-              <a:rPr sz="1200" b="1" i="0">
-                <a:solidFill>
-                  <a:srgbClr val="64748B"/>
-                </a:solidFill>
-                <a:latin typeface="Montserrat"/>
-              </a:rPr>
-              <a:t>PARTE 11 · TABLA 1</a:t>
+              <a:rPr sz="1300" b="1" i="0">
+                <a:solidFill>
+                  <a:srgbClr val="E8801A"/>
+                </a:solidFill>
+                <a:latin typeface="Montserrat"/>
+              </a:rPr>
+              <a:t>PARTE 11 · APARTADO 1</a:t>
             </a:r>
           </a:p>
         </p:txBody>
@@ -11266,26 +12309,70 @@
           <a:lstStyle/>
           <a:p>
             <a:r>
-              <a:rPr sz="2700" b="1" i="0">
+              <a:rPr sz="2800" b="1" i="0">
                 <a:solidFill>
                   <a:srgbClr val="1E2761"/>
                 </a:solidFill>
                 <a:latin typeface="Montserrat"/>
               </a:rPr>
-              <a:t>Quién puede hacer cada operación</a:t>
-            </a:r>
-          </a:p>
-        </p:txBody>
-      </p:sp>
-      <p:sp>
-        <p:nvSpPr>
-          <p:cNvPr id="7" name="TextBox 6"/>
+              <a:t>Qué regula la Parte 11</a:t>
+            </a:r>
+          </a:p>
+        </p:txBody>
+      </p:sp>
+      <p:sp>
+        <p:nvSpPr>
+          <p:cNvPr id="7" name="Rounded Rectangle 6"/>
+          <p:cNvSpPr/>
+          <p:nvPr/>
+        </p:nvSpPr>
+        <p:spPr>
+          <a:xfrm>
+            <a:off x="868680" y="1627632"/>
+            <a:ext cx="2011680" cy="73152"/>
+          </a:xfrm>
+          <a:prstGeom prst="roundRect">
+            <a:avLst/>
+          </a:prstGeom>
+          <a:solidFill>
+            <a:srgbClr val="E8801A"/>
+          </a:solidFill>
+          <a:ln>
+            <a:noFill/>
+          </a:ln>
+          <a:effectLst/>
+        </p:spPr>
+        <p:style>
+          <a:lnRef idx="1">
+            <a:schemeClr val="accent1"/>
+          </a:lnRef>
+          <a:fillRef idx="3">
+            <a:schemeClr val="accent1"/>
+          </a:fillRef>
+          <a:effectRef idx="2">
+            <a:schemeClr val="accent1"/>
+          </a:effectRef>
+          <a:fontRef idx="minor">
+            <a:schemeClr val="lt1"/>
+          </a:fontRef>
+        </p:style>
+        <p:txBody>
+          <a:bodyPr rtlCol="0" anchor="ctr"/>
+          <a:lstStyle/>
+          <a:p>
+            <a:pPr algn="ctr"/>
+          </a:p>
+        </p:txBody>
+      </p:sp>
+      <p:sp>
+        <p:nvSpPr>
+          <p:cNvPr id="8" name="TextBox 7"/>
           <p:cNvSpPr txBox="1"/>
           <p:nvPr/>
         </p:nvSpPr>
         <p:spPr>
           <a:xfrm>
-            <a:off x="822960" y="1920240"/>
+            <a:off x="822960" y="1965960"/>
             <a:ext cx="4983480" cy="4206240"/>
           </a:xfrm>
           <a:prstGeom prst="rect">
@@ -11301,17 +12388,17 @@
           <a:p>
             <a:pPr>
               <a:spcAft>
-                <a:spcPts val="1000"/>
+                <a:spcPts val="1100"/>
               </a:spcAft>
             </a:pPr>
             <a:r>
               <a:rPr sz="1600" b="1" i="0">
                 <a:solidFill>
-                  <a:srgbClr val="2E3A80"/>
-                </a:solidFill>
-                <a:latin typeface="Montserrat"/>
-              </a:rPr>
-              <a:t>•  </a:t>
+                  <a:srgbClr val="E8801A"/>
+                </a:solidFill>
+                <a:latin typeface="Montserrat"/>
+              </a:rPr>
+              <a:t>▸  </a:t>
             </a:r>
             <a:r>
               <a:rPr sz="1600" b="0" i="0">
@@ -11320,23 +12407,23 @@
                 </a:solidFill>
                 <a:latin typeface="Montserrat"/>
               </a:rPr>
-              <a:t>Distribuidora: acometida, contador, cese</a:t>
+              <a:t>Operaciones en instalaciones en servicio</a:t>
             </a:r>
           </a:p>
           <a:p>
             <a:pPr>
               <a:spcAft>
-                <a:spcPts val="1000"/>
+                <a:spcPts val="1100"/>
               </a:spcAft>
             </a:pPr>
             <a:r>
               <a:rPr sz="1600" b="1" i="0">
                 <a:solidFill>
-                  <a:srgbClr val="2E3A80"/>
-                </a:solidFill>
-                <a:latin typeface="Montserrat"/>
-              </a:rPr>
-              <a:t>•  </a:t>
+                  <a:srgbClr val="E8801A"/>
+                </a:solidFill>
+                <a:latin typeface="Montserrat"/>
+              </a:rPr>
+              <a:t>▸  </a:t>
             </a:r>
             <a:r>
               <a:rPr sz="1600" b="0" i="0">
@@ -11345,23 +12432,23 @@
                 </a:solidFill>
                 <a:latin typeface="Montserrat"/>
               </a:rPr>
-              <a:t>Instaladora: modifica, repara, anula puntos</a:t>
+              <a:t>MOP igual o menor de 5 bar</a:t>
             </a:r>
           </a:p>
           <a:p>
             <a:pPr>
               <a:spcAft>
-                <a:spcPts val="1000"/>
+                <a:spcPts val="1100"/>
               </a:spcAft>
             </a:pPr>
             <a:r>
               <a:rPr sz="1600" b="1" i="0">
                 <a:solidFill>
-                  <a:srgbClr val="2E3A80"/>
-                </a:solidFill>
-                <a:latin typeface="Montserrat"/>
-              </a:rPr>
-              <a:t>•  </a:t>
+                  <a:srgbClr val="E8801A"/>
+                </a:solidFill>
+                <a:latin typeface="Montserrat"/>
+              </a:rPr>
+              <a:t>▸  </a:t>
             </a:r>
             <a:r>
               <a:rPr sz="1600" b="0" i="0">
@@ -11370,14 +12457,14 @@
                 </a:solidFill>
                 <a:latin typeface="Montserrat"/>
               </a:rPr>
-              <a:t>SAT: solo toca los aparatos</a:t>
-            </a:r>
-          </a:p>
-        </p:txBody>
-      </p:sp>
-      <p:sp>
-        <p:nvSpPr>
-          <p:cNvPr id="8" name="imgph" descr="IMGQ:gas distribution worker and installer meeting"/>
+              <a:t>Directrices generales de actuación</a:t>
+            </a:r>
+          </a:p>
+        </p:txBody>
+      </p:sp>
+      <p:sp>
+        <p:nvSpPr>
+          <p:cNvPr id="9" name="imgph" descr="IMGQ:technician working on gas pipe in service"/>
           <p:cNvSpPr/>
           <p:nvPr/>
         </p:nvSpPr>
@@ -11423,7 +12510,7 @@
       </p:sp>
       <p:sp>
         <p:nvSpPr>
-          <p:cNvPr id="9" name="TextBox 8"/>
+          <p:cNvPr id="10" name="TextBox 9"/>
           <p:cNvSpPr txBox="1"/>
           <p:nvPr/>
         </p:nvSpPr>
@@ -11463,7 +12550,7 @@
                 </a:solidFill>
                 <a:latin typeface="Montserrat"/>
               </a:rPr>
-              <a:t>gas distribution worker and installer meeting</a:t>
+              <a:t>technician working on gas pipe in service</a:t>
             </a:r>
           </a:p>
         </p:txBody>
@@ -11560,7 +12647,7 @@
                 </a:solidFill>
                 <a:latin typeface="Montserrat"/>
               </a:rPr>
-              <a:t>006 / 020</a:t>
+              <a:t>006 / 021</a:t>
             </a:r>
           </a:p>
         </p:txBody>
@@ -11608,7 +12695,7 @@
         <p:spPr>
           <a:xfrm>
             <a:off x="822960" y="457200"/>
-            <a:ext cx="8229600" cy="365760"/>
+            <a:ext cx="10058400" cy="365760"/>
           </a:xfrm>
           <a:prstGeom prst="rect">
             <a:avLst/>
@@ -11622,13 +12709,13 @@
           <a:lstStyle/>
           <a:p>
             <a:r>
-              <a:rPr sz="1200" b="1" i="0">
-                <a:solidFill>
-                  <a:srgbClr val="64748B"/>
-                </a:solidFill>
-                <a:latin typeface="Montserrat"/>
-              </a:rPr>
-              <a:t>PARTE 11 · NOTA 1 DE LA TABLA 1</a:t>
+              <a:rPr sz="1300" b="1" i="0">
+                <a:solidFill>
+                  <a:srgbClr val="E8801A"/>
+                </a:solidFill>
+                <a:latin typeface="Montserrat"/>
+              </a:rPr>
+              <a:t>PARTE 11 · TABLA 1</a:t>
             </a:r>
           </a:p>
         </p:txBody>
@@ -11656,26 +12743,70 @@
           <a:lstStyle/>
           <a:p>
             <a:r>
-              <a:rPr sz="2700" b="1" i="0">
+              <a:rPr sz="2800" b="1" i="0">
                 <a:solidFill>
                   <a:srgbClr val="1E2761"/>
                 </a:solidFill>
                 <a:latin typeface="Montserrat"/>
               </a:rPr>
-              <a:t>La llave de acometida es sagrada</a:t>
-            </a:r>
-          </a:p>
-        </p:txBody>
-      </p:sp>
-      <p:sp>
-        <p:nvSpPr>
-          <p:cNvPr id="7" name="TextBox 6"/>
+              <a:t>Quién puede hacer cada operación</a:t>
+            </a:r>
+          </a:p>
+        </p:txBody>
+      </p:sp>
+      <p:sp>
+        <p:nvSpPr>
+          <p:cNvPr id="7" name="Rounded Rectangle 6"/>
+          <p:cNvSpPr/>
+          <p:nvPr/>
+        </p:nvSpPr>
+        <p:spPr>
+          <a:xfrm>
+            <a:off x="868680" y="1627632"/>
+            <a:ext cx="2011680" cy="73152"/>
+          </a:xfrm>
+          <a:prstGeom prst="roundRect">
+            <a:avLst/>
+          </a:prstGeom>
+          <a:solidFill>
+            <a:srgbClr val="E8801A"/>
+          </a:solidFill>
+          <a:ln>
+            <a:noFill/>
+          </a:ln>
+          <a:effectLst/>
+        </p:spPr>
+        <p:style>
+          <a:lnRef idx="1">
+            <a:schemeClr val="accent1"/>
+          </a:lnRef>
+          <a:fillRef idx="3">
+            <a:schemeClr val="accent1"/>
+          </a:fillRef>
+          <a:effectRef idx="2">
+            <a:schemeClr val="accent1"/>
+          </a:effectRef>
+          <a:fontRef idx="minor">
+            <a:schemeClr val="lt1"/>
+          </a:fontRef>
+        </p:style>
+        <p:txBody>
+          <a:bodyPr rtlCol="0" anchor="ctr"/>
+          <a:lstStyle/>
+          <a:p>
+            <a:pPr algn="ctr"/>
+          </a:p>
+        </p:txBody>
+      </p:sp>
+      <p:sp>
+        <p:nvSpPr>
+          <p:cNvPr id="8" name="TextBox 7"/>
           <p:cNvSpPr txBox="1"/>
           <p:nvPr/>
         </p:nvSpPr>
         <p:spPr>
           <a:xfrm>
-            <a:off x="822960" y="1920240"/>
+            <a:off x="822960" y="1965960"/>
             <a:ext cx="4983480" cy="4206240"/>
           </a:xfrm>
           <a:prstGeom prst="rect">
@@ -11691,17 +12822,17 @@
           <a:p>
             <a:pPr>
               <a:spcAft>
-                <a:spcPts val="1000"/>
+                <a:spcPts val="1100"/>
               </a:spcAft>
             </a:pPr>
             <a:r>
               <a:rPr sz="1600" b="1" i="0">
                 <a:solidFill>
-                  <a:srgbClr val="2E3A80"/>
-                </a:solidFill>
-                <a:latin typeface="Montserrat"/>
-              </a:rPr>
-              <a:t>•  </a:t>
+                  <a:srgbClr val="E8801A"/>
+                </a:solidFill>
+                <a:latin typeface="Montserrat"/>
+              </a:rPr>
+              <a:t>▸  </a:t>
             </a:r>
             <a:r>
               <a:rPr sz="1600" b="0" i="0">
@@ -11710,23 +12841,23 @@
                 </a:solidFill>
                 <a:latin typeface="Montserrat"/>
               </a:rPr>
-              <a:t>Separa la red de la calle de tu instalación</a:t>
+              <a:t>Distribuidora: acometida, contador, cese</a:t>
             </a:r>
           </a:p>
           <a:p>
             <a:pPr>
               <a:spcAft>
-                <a:spcPts val="1000"/>
+                <a:spcPts val="1100"/>
               </a:spcAft>
             </a:pPr>
             <a:r>
               <a:rPr sz="1600" b="1" i="0">
                 <a:solidFill>
-                  <a:srgbClr val="2E3A80"/>
-                </a:solidFill>
-                <a:latin typeface="Montserrat"/>
-              </a:rPr>
-              <a:t>•  </a:t>
+                  <a:srgbClr val="E8801A"/>
+                </a:solidFill>
+                <a:latin typeface="Montserrat"/>
+              </a:rPr>
+              <a:t>▸  </a:t>
             </a:r>
             <a:r>
               <a:rPr sz="1600" b="0" i="0">
@@ -11735,23 +12866,23 @@
                 </a:solidFill>
                 <a:latin typeface="Montserrat"/>
               </a:rPr>
-              <a:t>Solo la abre o cierra la distribuidora</a:t>
+              <a:t>Instaladora: modifica, repara, anula puntos</a:t>
             </a:r>
           </a:p>
           <a:p>
             <a:pPr>
               <a:spcAft>
-                <a:spcPts val="1000"/>
+                <a:spcPts val="1100"/>
               </a:spcAft>
             </a:pPr>
             <a:r>
               <a:rPr sz="1600" b="1" i="0">
                 <a:solidFill>
-                  <a:srgbClr val="2E3A80"/>
-                </a:solidFill>
-                <a:latin typeface="Montserrat"/>
-              </a:rPr>
-              <a:t>•  </a:t>
+                  <a:srgbClr val="E8801A"/>
+                </a:solidFill>
+                <a:latin typeface="Montserrat"/>
+              </a:rPr>
+              <a:t>▸  </a:t>
             </a:r>
             <a:r>
               <a:rPr sz="1600" b="0" i="0">
@@ -11760,14 +12891,14 @@
                 </a:solidFill>
                 <a:latin typeface="Montserrat"/>
               </a:rPr>
-              <a:t>O quien ella autorice, nunca por tu cuenta</a:t>
-            </a:r>
-          </a:p>
-        </p:txBody>
-      </p:sp>
-      <p:sp>
-        <p:nvSpPr>
-          <p:cNvPr id="8" name="imgph" descr="IMGQ:gas service valve on building facade"/>
+              <a:t>SAT: solo toca los aparatos</a:t>
+            </a:r>
+          </a:p>
+        </p:txBody>
+      </p:sp>
+      <p:sp>
+        <p:nvSpPr>
+          <p:cNvPr id="9" name="imgph" descr="IMGQ:gas distribution worker and installer meeting"/>
           <p:cNvSpPr/>
           <p:nvPr/>
         </p:nvSpPr>
@@ -11813,7 +12944,7 @@
       </p:sp>
       <p:sp>
         <p:nvSpPr>
-          <p:cNvPr id="9" name="TextBox 8"/>
+          <p:cNvPr id="10" name="TextBox 9"/>
           <p:cNvSpPr txBox="1"/>
           <p:nvPr/>
         </p:nvSpPr>
@@ -11853,7 +12984,7 @@
                 </a:solidFill>
                 <a:latin typeface="Montserrat"/>
               </a:rPr>
-              <a:t>gas service valve on building facade</a:t>
+              <a:t>gas distribution worker and installer meeting</a:t>
             </a:r>
           </a:p>
         </p:txBody>
@@ -11950,7 +13081,7 @@
                 </a:solidFill>
                 <a:latin typeface="Montserrat"/>
               </a:rPr>
-              <a:t>007 / 020</a:t>
+              <a:t>007 / 021</a:t>
             </a:r>
           </a:p>
         </p:txBody>
@@ -11998,7 +13129,7 @@
         <p:spPr>
           <a:xfrm>
             <a:off x="822960" y="457200"/>
-            <a:ext cx="8229600" cy="365760"/>
+            <a:ext cx="10058400" cy="365760"/>
           </a:xfrm>
           <a:prstGeom prst="rect">
             <a:avLst/>
@@ -12012,13 +13143,13 @@
           <a:lstStyle/>
           <a:p>
             <a:r>
-              <a:rPr sz="1200" b="1" i="0">
-                <a:solidFill>
-                  <a:srgbClr val="64748B"/>
-                </a:solidFill>
-                <a:latin typeface="Montserrat"/>
-              </a:rPr>
-              <a:t>PARTE 11 · TABLA 1</a:t>
+              <a:rPr sz="1300" b="1" i="0">
+                <a:solidFill>
+                  <a:srgbClr val="E8801A"/>
+                </a:solidFill>
+                <a:latin typeface="Montserrat"/>
+              </a:rPr>
+              <a:t>PARTE 11 · NOTA 1 DE LA TABLA 1</a:t>
             </a:r>
           </a:p>
         </p:txBody>
@@ -12046,26 +13177,70 @@
           <a:lstStyle/>
           <a:p>
             <a:r>
-              <a:rPr sz="2700" b="1" i="0">
+              <a:rPr sz="2800" b="1" i="0">
                 <a:solidFill>
                   <a:srgbClr val="1E2761"/>
                 </a:solidFill>
                 <a:latin typeface="Montserrat"/>
               </a:rPr>
-              <a:t>Deja siempre evidencia documental</a:t>
-            </a:r>
-          </a:p>
-        </p:txBody>
-      </p:sp>
-      <p:sp>
-        <p:nvSpPr>
-          <p:cNvPr id="7" name="TextBox 6"/>
+              <a:t>La llave de acometida es sagrada</a:t>
+            </a:r>
+          </a:p>
+        </p:txBody>
+      </p:sp>
+      <p:sp>
+        <p:nvSpPr>
+          <p:cNvPr id="7" name="Rounded Rectangle 6"/>
+          <p:cNvSpPr/>
+          <p:nvPr/>
+        </p:nvSpPr>
+        <p:spPr>
+          <a:xfrm>
+            <a:off x="868680" y="1627632"/>
+            <a:ext cx="2011680" cy="73152"/>
+          </a:xfrm>
+          <a:prstGeom prst="roundRect">
+            <a:avLst/>
+          </a:prstGeom>
+          <a:solidFill>
+            <a:srgbClr val="E8801A"/>
+          </a:solidFill>
+          <a:ln>
+            <a:noFill/>
+          </a:ln>
+          <a:effectLst/>
+        </p:spPr>
+        <p:style>
+          <a:lnRef idx="1">
+            <a:schemeClr val="accent1"/>
+          </a:lnRef>
+          <a:fillRef idx="3">
+            <a:schemeClr val="accent1"/>
+          </a:fillRef>
+          <a:effectRef idx="2">
+            <a:schemeClr val="accent1"/>
+          </a:effectRef>
+          <a:fontRef idx="minor">
+            <a:schemeClr val="lt1"/>
+          </a:fontRef>
+        </p:style>
+        <p:txBody>
+          <a:bodyPr rtlCol="0" anchor="ctr"/>
+          <a:lstStyle/>
+          <a:p>
+            <a:pPr algn="ctr"/>
+          </a:p>
+        </p:txBody>
+      </p:sp>
+      <p:sp>
+        <p:nvSpPr>
+          <p:cNvPr id="8" name="TextBox 7"/>
           <p:cNvSpPr txBox="1"/>
           <p:nvPr/>
         </p:nvSpPr>
         <p:spPr>
           <a:xfrm>
-            <a:off x="822960" y="1920240"/>
+            <a:off x="822960" y="1965960"/>
             <a:ext cx="4983480" cy="4206240"/>
           </a:xfrm>
           <a:prstGeom prst="rect">
@@ -12081,17 +13256,17 @@
           <a:p>
             <a:pPr>
               <a:spcAft>
-                <a:spcPts val="1000"/>
+                <a:spcPts val="1100"/>
               </a:spcAft>
             </a:pPr>
             <a:r>
               <a:rPr sz="1600" b="1" i="0">
                 <a:solidFill>
-                  <a:srgbClr val="2E3A80"/>
-                </a:solidFill>
-                <a:latin typeface="Montserrat"/>
-              </a:rPr>
-              <a:t>•  </a:t>
+                  <a:srgbClr val="E8801A"/>
+                </a:solidFill>
+                <a:latin typeface="Montserrat"/>
+              </a:rPr>
+              <a:t>▸  </a:t>
             </a:r>
             <a:r>
               <a:rPr sz="1600" b="0" i="0">
@@ -12100,23 +13275,23 @@
                 </a:solidFill>
                 <a:latin typeface="Montserrat"/>
               </a:rPr>
-              <a:t>Toda operación de la Tabla 1 se documenta</a:t>
+              <a:t>Separa la red de la calle de tu instalación</a:t>
             </a:r>
           </a:p>
           <a:p>
             <a:pPr>
               <a:spcAft>
-                <a:spcPts val="1000"/>
+                <a:spcPts val="1100"/>
               </a:spcAft>
             </a:pPr>
             <a:r>
               <a:rPr sz="1600" b="1" i="0">
                 <a:solidFill>
-                  <a:srgbClr val="2E3A80"/>
-                </a:solidFill>
-                <a:latin typeface="Montserrat"/>
-              </a:rPr>
-              <a:t>•  </a:t>
+                  <a:srgbClr val="E8801A"/>
+                </a:solidFill>
+                <a:latin typeface="Montserrat"/>
+              </a:rPr>
+              <a:t>▸  </a:t>
             </a:r>
             <a:r>
               <a:rPr sz="1600" b="0" i="0">
@@ -12125,23 +13300,23 @@
                 </a:solidFill>
                 <a:latin typeface="Montserrat"/>
               </a:rPr>
-              <a:t>Parte de trabajo, albarán o certificado</a:t>
+              <a:t>Solo la abre o cierra la distribuidora</a:t>
             </a:r>
           </a:p>
           <a:p>
             <a:pPr>
               <a:spcAft>
-                <a:spcPts val="1000"/>
+                <a:spcPts val="1100"/>
               </a:spcAft>
             </a:pPr>
             <a:r>
               <a:rPr sz="1600" b="1" i="0">
                 <a:solidFill>
-                  <a:srgbClr val="2E3A80"/>
-                </a:solidFill>
-                <a:latin typeface="Montserrat"/>
-              </a:rPr>
-              <a:t>•  </a:t>
+                  <a:srgbClr val="E8801A"/>
+                </a:solidFill>
+                <a:latin typeface="Montserrat"/>
+              </a:rPr>
+              <a:t>▸  </a:t>
             </a:r>
             <a:r>
               <a:rPr sz="1600" b="0" i="0">
@@ -12150,14 +13325,14 @@
                 </a:solidFill>
                 <a:latin typeface="Montserrat"/>
               </a:rPr>
-              <a:t>Lo que no está escrito, no se ha hecho</a:t>
-            </a:r>
-          </a:p>
-        </p:txBody>
-      </p:sp>
-      <p:sp>
-        <p:nvSpPr>
-          <p:cNvPr id="8" name="imgph" descr="IMGQ:installer filling work order form clipboard"/>
+              <a:t>O quien ella autorice, nunca por tu cuenta</a:t>
+            </a:r>
+          </a:p>
+        </p:txBody>
+      </p:sp>
+      <p:sp>
+        <p:nvSpPr>
+          <p:cNvPr id="9" name="imgph" descr="IMGQ:gas service valve on building facade"/>
           <p:cNvSpPr/>
           <p:nvPr/>
         </p:nvSpPr>
@@ -12203,7 +13378,7 @@
       </p:sp>
       <p:sp>
         <p:nvSpPr>
-          <p:cNvPr id="9" name="TextBox 8"/>
+          <p:cNvPr id="10" name="TextBox 9"/>
           <p:cNvSpPr txBox="1"/>
           <p:nvPr/>
         </p:nvSpPr>
@@ -12243,7 +13418,7 @@
                 </a:solidFill>
                 <a:latin typeface="Montserrat"/>
               </a:rPr>
-              <a:t>installer filling work order form clipboard</a:t>
+              <a:t>gas service valve on building facade</a:t>
             </a:r>
           </a:p>
         </p:txBody>
@@ -12340,7 +13515,7 @@
                 </a:solidFill>
                 <a:latin typeface="Montserrat"/>
               </a:rPr>
-              <a:t>008 / 020</a:t>
+              <a:t>008 / 021</a:t>
             </a:r>
           </a:p>
         </p:txBody>
@@ -12388,7 +13563,7 @@
         <p:spPr>
           <a:xfrm>
             <a:off x="822960" y="457200"/>
-            <a:ext cx="8229600" cy="365760"/>
+            <a:ext cx="10058400" cy="365760"/>
           </a:xfrm>
           <a:prstGeom prst="rect">
             <a:avLst/>
@@ -12402,13 +13577,13 @@
           <a:lstStyle/>
           <a:p>
             <a:r>
-              <a:rPr sz="1200" b="1" i="0">
-                <a:solidFill>
-                  <a:srgbClr val="64748B"/>
-                </a:solidFill>
-                <a:latin typeface="Montserrat"/>
-              </a:rPr>
-              <a:t>PARTE 11 · APARTADO 3.1</a:t>
+              <a:rPr sz="1300" b="1" i="0">
+                <a:solidFill>
+                  <a:srgbClr val="E8801A"/>
+                </a:solidFill>
+                <a:latin typeface="Montserrat"/>
+              </a:rPr>
+              <a:t>PARTE 11 · TABLA 1</a:t>
             </a:r>
           </a:p>
         </p:txBody>
@@ -12436,26 +13611,70 @@
           <a:lstStyle/>
           <a:p>
             <a:r>
-              <a:rPr sz="2700" b="1" i="0">
+              <a:rPr sz="2800" b="1" i="0">
                 <a:solidFill>
                   <a:srgbClr val="1E2761"/>
                 </a:solidFill>
                 <a:latin typeface="Montserrat"/>
               </a:rPr>
-              <a:t>Medidas generales de seguridad</a:t>
-            </a:r>
-          </a:p>
-        </p:txBody>
-      </p:sp>
-      <p:sp>
-        <p:nvSpPr>
-          <p:cNvPr id="7" name="TextBox 6"/>
+              <a:t>Deja siempre evidencia documental</a:t>
+            </a:r>
+          </a:p>
+        </p:txBody>
+      </p:sp>
+      <p:sp>
+        <p:nvSpPr>
+          <p:cNvPr id="7" name="Rounded Rectangle 6"/>
+          <p:cNvSpPr/>
+          <p:nvPr/>
+        </p:nvSpPr>
+        <p:spPr>
+          <a:xfrm>
+            <a:off x="868680" y="1627632"/>
+            <a:ext cx="2011680" cy="73152"/>
+          </a:xfrm>
+          <a:prstGeom prst="roundRect">
+            <a:avLst/>
+          </a:prstGeom>
+          <a:solidFill>
+            <a:srgbClr val="E8801A"/>
+          </a:solidFill>
+          <a:ln>
+            <a:noFill/>
+          </a:ln>
+          <a:effectLst/>
+        </p:spPr>
+        <p:style>
+          <a:lnRef idx="1">
+            <a:schemeClr val="accent1"/>
+          </a:lnRef>
+          <a:fillRef idx="3">
+            <a:schemeClr val="accent1"/>
+          </a:fillRef>
+          <a:effectRef idx="2">
+            <a:schemeClr val="accent1"/>
+          </a:effectRef>
+          <a:fontRef idx="minor">
+            <a:schemeClr val="lt1"/>
+          </a:fontRef>
+        </p:style>
+        <p:txBody>
+          <a:bodyPr rtlCol="0" anchor="ctr"/>
+          <a:lstStyle/>
+          <a:p>
+            <a:pPr algn="ctr"/>
+          </a:p>
+        </p:txBody>
+      </p:sp>
+      <p:sp>
+        <p:nvSpPr>
+          <p:cNvPr id="8" name="TextBox 7"/>
           <p:cNvSpPr txBox="1"/>
           <p:nvPr/>
         </p:nvSpPr>
         <p:spPr>
           <a:xfrm>
-            <a:off x="822960" y="1920240"/>
+            <a:off x="822960" y="1965960"/>
             <a:ext cx="4983480" cy="4206240"/>
           </a:xfrm>
           <a:prstGeom prst="rect">
@@ -12471,17 +13690,17 @@
           <a:p>
             <a:pPr>
               <a:spcAft>
-                <a:spcPts val="1000"/>
+                <a:spcPts val="1100"/>
               </a:spcAft>
             </a:pPr>
             <a:r>
               <a:rPr sz="1600" b="1" i="0">
                 <a:solidFill>
-                  <a:srgbClr val="2E3A80"/>
-                </a:solidFill>
-                <a:latin typeface="Montserrat"/>
-              </a:rPr>
-              <a:t>•  </a:t>
+                  <a:srgbClr val="E8801A"/>
+                </a:solidFill>
+                <a:latin typeface="Montserrat"/>
+              </a:rPr>
+              <a:t>▸  </a:t>
             </a:r>
             <a:r>
               <a:rPr sz="1600" b="0" i="0">
@@ -12490,23 +13709,23 @@
                 </a:solidFill>
                 <a:latin typeface="Montserrat"/>
               </a:rPr>
-              <a:t>No fumar durante los trabajos</a:t>
+              <a:t>Toda operación de la Tabla 1 se documenta</a:t>
             </a:r>
           </a:p>
           <a:p>
             <a:pPr>
               <a:spcAft>
-                <a:spcPts val="1000"/>
+                <a:spcPts val="1100"/>
               </a:spcAft>
             </a:pPr>
             <a:r>
               <a:rPr sz="1600" b="1" i="0">
                 <a:solidFill>
-                  <a:srgbClr val="2E3A80"/>
-                </a:solidFill>
-                <a:latin typeface="Montserrat"/>
-              </a:rPr>
-              <a:t>•  </a:t>
+                  <a:srgbClr val="E8801A"/>
+                </a:solidFill>
+                <a:latin typeface="Montserrat"/>
+              </a:rPr>
+              <a:t>▸  </a:t>
             </a:r>
             <a:r>
               <a:rPr sz="1600" b="0" i="0">
@@ -12515,23 +13734,23 @@
                 </a:solidFill>
                 <a:latin typeface="Montserrat"/>
               </a:rPr>
-              <a:t>Nada de fuegos ni focos calientes</a:t>
+              <a:t>Parte de trabajo, albarán o certificado</a:t>
             </a:r>
           </a:p>
           <a:p>
             <a:pPr>
               <a:spcAft>
-                <a:spcPts val="1000"/>
+                <a:spcPts val="1100"/>
               </a:spcAft>
             </a:pPr>
             <a:r>
               <a:rPr sz="1600" b="1" i="0">
                 <a:solidFill>
-                  <a:srgbClr val="2E3A80"/>
-                </a:solidFill>
-                <a:latin typeface="Montserrat"/>
-              </a:rPr>
-              <a:t>•  </a:t>
+                  <a:srgbClr val="E8801A"/>
+                </a:solidFill>
+                <a:latin typeface="Montserrat"/>
+              </a:rPr>
+              <a:t>▸  </a:t>
             </a:r>
             <a:r>
               <a:rPr sz="1600" b="0" i="0">
@@ -12540,39 +13759,14 @@
                 </a:solidFill>
                 <a:latin typeface="Montserrat"/>
               </a:rPr>
-              <a:t>No tocar llaves precintadas</a:t>
-            </a:r>
-          </a:p>
-          <a:p>
-            <a:pPr>
-              <a:spcAft>
-                <a:spcPts val="1000"/>
-              </a:spcAft>
-            </a:pPr>
-            <a:r>
-              <a:rPr sz="1600" b="1" i="0">
-                <a:solidFill>
-                  <a:srgbClr val="2E3A80"/>
-                </a:solidFill>
-                <a:latin typeface="Montserrat"/>
-              </a:rPr>
-              <a:t>•  </a:t>
-            </a:r>
-            <a:r>
-              <a:rPr sz="1600" b="0" i="0">
-                <a:solidFill>
-                  <a:srgbClr val="1B2330"/>
-                </a:solidFill>
-                <a:latin typeface="Montserrat"/>
-              </a:rPr>
-              <a:t>Al parar: asegurar ausencia de gas</a:t>
-            </a:r>
-          </a:p>
-        </p:txBody>
-      </p:sp>
-      <p:sp>
-        <p:nvSpPr>
-          <p:cNvPr id="8" name="imgph" descr="IMGQ:no smoking sign gas work area"/>
+              <a:t>Lo que no está escrito, no se ha hecho</a:t>
+            </a:r>
+          </a:p>
+        </p:txBody>
+      </p:sp>
+      <p:sp>
+        <p:nvSpPr>
+          <p:cNvPr id="9" name="imgph" descr="IMGQ:installer filling work order form clipboard"/>
           <p:cNvSpPr/>
           <p:nvPr/>
         </p:nvSpPr>
@@ -12618,7 +13812,7 @@
       </p:sp>
       <p:sp>
         <p:nvSpPr>
-          <p:cNvPr id="9" name="TextBox 8"/>
+          <p:cNvPr id="10" name="TextBox 9"/>
           <p:cNvSpPr txBox="1"/>
           <p:nvPr/>
         </p:nvSpPr>
@@ -12658,7 +13852,7 @@
                 </a:solidFill>
                 <a:latin typeface="Montserrat"/>
               </a:rPr>
-              <a:t>no smoking sign gas work area</a:t>
+              <a:t>installer filling work order form clipboard</a:t>
             </a:r>
           </a:p>
         </p:txBody>
@@ -12755,7 +13949,7 @@
                 </a:solidFill>
                 <a:latin typeface="Montserrat"/>
               </a:rPr>
-              <a:t>009 / 020</a:t>
+              <a:t>009 / 021</a:t>
             </a:r>
           </a:p>
         </p:txBody>
@@ -12803,7 +13997,7 @@
         <p:spPr>
           <a:xfrm>
             <a:off x="822960" y="457200"/>
-            <a:ext cx="8229600" cy="365760"/>
+            <a:ext cx="10058400" cy="365760"/>
           </a:xfrm>
           <a:prstGeom prst="rect">
             <a:avLst/>
@@ -12817,9 +14011,9 @@
           <a:lstStyle/>
           <a:p>
             <a:r>
-              <a:rPr sz="1200" b="1" i="0">
-                <a:solidFill>
-                  <a:srgbClr val="64748B"/>
+              <a:rPr sz="1300" b="1" i="0">
+                <a:solidFill>
+                  <a:srgbClr val="E8801A"/>
                 </a:solidFill>
                 <a:latin typeface="Montserrat"/>
               </a:rPr>
@@ -12851,26 +14045,70 @@
           <a:lstStyle/>
           <a:p>
             <a:r>
-              <a:rPr sz="2700" b="1" i="0">
+              <a:rPr sz="2800" b="1" i="0">
                 <a:solidFill>
                   <a:srgbClr val="1E2761"/>
                 </a:solidFill>
                 <a:latin typeface="Montserrat"/>
               </a:rPr>
-              <a:t>Antes de tocar tubería, corta el gas</a:t>
-            </a:r>
-          </a:p>
-        </p:txBody>
-      </p:sp>
-      <p:sp>
-        <p:nvSpPr>
-          <p:cNvPr id="7" name="TextBox 6"/>
+              <a:t>Medidas generales de seguridad</a:t>
+            </a:r>
+          </a:p>
+        </p:txBody>
+      </p:sp>
+      <p:sp>
+        <p:nvSpPr>
+          <p:cNvPr id="7" name="Rounded Rectangle 6"/>
+          <p:cNvSpPr/>
+          <p:nvPr/>
+        </p:nvSpPr>
+        <p:spPr>
+          <a:xfrm>
+            <a:off x="868680" y="1627632"/>
+            <a:ext cx="2011680" cy="73152"/>
+          </a:xfrm>
+          <a:prstGeom prst="roundRect">
+            <a:avLst/>
+          </a:prstGeom>
+          <a:solidFill>
+            <a:srgbClr val="E8801A"/>
+          </a:solidFill>
+          <a:ln>
+            <a:noFill/>
+          </a:ln>
+          <a:effectLst/>
+        </p:spPr>
+        <p:style>
+          <a:lnRef idx="1">
+            <a:schemeClr val="accent1"/>
+          </a:lnRef>
+          <a:fillRef idx="3">
+            <a:schemeClr val="accent1"/>
+          </a:fillRef>
+          <a:effectRef idx="2">
+            <a:schemeClr val="accent1"/>
+          </a:effectRef>
+          <a:fontRef idx="minor">
+            <a:schemeClr val="lt1"/>
+          </a:fontRef>
+        </p:style>
+        <p:txBody>
+          <a:bodyPr rtlCol="0" anchor="ctr"/>
+          <a:lstStyle/>
+          <a:p>
+            <a:pPr algn="ctr"/>
+          </a:p>
+        </p:txBody>
+      </p:sp>
+      <p:sp>
+        <p:nvSpPr>
+          <p:cNvPr id="8" name="TextBox 7"/>
           <p:cNvSpPr txBox="1"/>
           <p:nvPr/>
         </p:nvSpPr>
         <p:spPr>
           <a:xfrm>
-            <a:off x="822960" y="1920240"/>
+            <a:off x="822960" y="1965960"/>
             <a:ext cx="4983480" cy="4206240"/>
           </a:xfrm>
           <a:prstGeom prst="rect">
@@ -12886,17 +14124,17 @@
           <a:p>
             <a:pPr>
               <a:spcAft>
-                <a:spcPts val="1000"/>
+                <a:spcPts val="1100"/>
               </a:spcAft>
             </a:pPr>
             <a:r>
               <a:rPr sz="1600" b="1" i="0">
                 <a:solidFill>
-                  <a:srgbClr val="2E3A80"/>
-                </a:solidFill>
-                <a:latin typeface="Montserrat"/>
-              </a:rPr>
-              <a:t>•  </a:t>
+                  <a:srgbClr val="E8801A"/>
+                </a:solidFill>
+                <a:latin typeface="Montserrat"/>
+              </a:rPr>
+              <a:t>▸  </a:t>
             </a:r>
             <a:r>
               <a:rPr sz="1600" b="0" i="0">
@@ -12905,23 +14143,23 @@
                 </a:solidFill>
                 <a:latin typeface="Montserrat"/>
               </a:rPr>
-              <a:t>No modificar ni ampliar sin cerrar el gas</a:t>
+              <a:t>No fumar durante los trabajos</a:t>
             </a:r>
           </a:p>
           <a:p>
             <a:pPr>
               <a:spcAft>
-                <a:spcPts val="1000"/>
+                <a:spcPts val="1100"/>
               </a:spcAft>
             </a:pPr>
             <a:r>
               <a:rPr sz="1600" b="1" i="0">
                 <a:solidFill>
-                  <a:srgbClr val="2E3A80"/>
-                </a:solidFill>
-                <a:latin typeface="Montserrat"/>
-              </a:rPr>
-              <a:t>•  </a:t>
+                  <a:srgbClr val="E8801A"/>
+                </a:solidFill>
+                <a:latin typeface="Montserrat"/>
+              </a:rPr>
+              <a:t>▸  </a:t>
             </a:r>
             <a:r>
               <a:rPr sz="1600" b="0" i="0">
@@ -12930,23 +14168,23 @@
                 </a:solidFill>
                 <a:latin typeface="Montserrat"/>
               </a:rPr>
-              <a:t>Excepción: operar en carga con técnica adecuada</a:t>
+              <a:t>Nada de fuegos ni focos calientes</a:t>
             </a:r>
           </a:p>
           <a:p>
             <a:pPr>
               <a:spcAft>
-                <a:spcPts val="1000"/>
+                <a:spcPts val="1100"/>
               </a:spcAft>
             </a:pPr>
             <a:r>
               <a:rPr sz="1600" b="1" i="0">
                 <a:solidFill>
-                  <a:srgbClr val="2E3A80"/>
-                </a:solidFill>
-                <a:latin typeface="Montserrat"/>
-              </a:rPr>
-              <a:t>•  </a:t>
+                  <a:srgbClr val="E8801A"/>
+                </a:solidFill>
+                <a:latin typeface="Montserrat"/>
+              </a:rPr>
+              <a:t>▸  </a:t>
             </a:r>
             <a:r>
               <a:rPr sz="1600" b="0" i="0">
@@ -12955,14 +14193,39 @@
                 </a:solidFill>
                 <a:latin typeface="Montserrat"/>
               </a:rPr>
-              <a:t>Al vaciar gas, evitar mezcla inflamable</a:t>
-            </a:r>
-          </a:p>
-        </p:txBody>
-      </p:sp>
-      <p:sp>
-        <p:nvSpPr>
-          <p:cNvPr id="8" name="imgph" descr="IMGQ:hand closing gas shut off valve"/>
+              <a:t>No tocar llaves precintadas</a:t>
+            </a:r>
+          </a:p>
+          <a:p>
+            <a:pPr>
+              <a:spcAft>
+                <a:spcPts val="1100"/>
+              </a:spcAft>
+            </a:pPr>
+            <a:r>
+              <a:rPr sz="1600" b="1" i="0">
+                <a:solidFill>
+                  <a:srgbClr val="E8801A"/>
+                </a:solidFill>
+                <a:latin typeface="Montserrat"/>
+              </a:rPr>
+              <a:t>▸  </a:t>
+            </a:r>
+            <a:r>
+              <a:rPr sz="1600" b="0" i="0">
+                <a:solidFill>
+                  <a:srgbClr val="1B2330"/>
+                </a:solidFill>
+                <a:latin typeface="Montserrat"/>
+              </a:rPr>
+              <a:t>Al parar: asegurar ausencia de gas</a:t>
+            </a:r>
+          </a:p>
+        </p:txBody>
+      </p:sp>
+      <p:sp>
+        <p:nvSpPr>
+          <p:cNvPr id="9" name="imgph" descr="IMGQ:no smoking sign gas work area"/>
           <p:cNvSpPr/>
           <p:nvPr/>
         </p:nvSpPr>
@@ -13008,7 +14271,7 @@
       </p:sp>
       <p:sp>
         <p:nvSpPr>
-          <p:cNvPr id="9" name="TextBox 8"/>
+          <p:cNvPr id="10" name="TextBox 9"/>
           <p:cNvSpPr txBox="1"/>
           <p:nvPr/>
         </p:nvSpPr>
@@ -13048,7 +14311,7 @@
                 </a:solidFill>
                 <a:latin typeface="Montserrat"/>
               </a:rPr>
-              <a:t>hand closing gas shut off valve</a:t>
+              <a:t>no smoking sign gas work area</a:t>
             </a:r>
           </a:p>
         </p:txBody>

--- a/Curso Gas B/16 - UNE 60670 - Instalaciones en servicio y control periodico/16 - UNE 60670 - Instalaciones en servicio y control periodico - Vídeo 1.pptx
+++ b/Curso Gas B/16 - UNE 60670 - Instalaciones en servicio y control periodico/16 - UNE 60670 - Instalaciones en servicio y control periodico - Vídeo 1.pptx
@@ -615,12 +615,12 @@
           <a:lstStyle/>
           <a:p>
             <a:r>
-              <a:t>N1: ¿Por qué la distribuidora y no la instaladora?</a:t>
-            </a:r>
-          </a:p>
-          <a:p>
-            <a:r>
-              <a:t>N2: Porque el contador es el equipo de medida de la distribuidora, igual que la llave de acometida. La instaladora manda en la tubería de dentro; el servicio técnico, solo en los aparatos. El truco para no fallar: contador y acometida, distribuidora; tubería, instaladora; aparato, servicio técnico.</a:t>
+              <a:t>N2: La respuesta correcta es la opción A: solo la empresa distribuidora. El contador es el equipo de medida de la distribuidora, igual que la llave de acometida, así que ni la instaladora ni el servicio técnico pueden tocarlo. La instaladora manda en la tubería de dentro; el servicio técnico, solo en los aparatos. El truco para no fallar: contador y acometida, distribuidora; tubería, instaladora; aparato, servicio técnico.</a:t>
+            </a:r>
+          </a:p>
+          <a:p>
+            <a:r>
+              <a:t>N1: Recuérdalo así y no vuelves a cruzar las columnas.</a:t>
             </a:r>
           </a:p>
         </p:txBody>
@@ -1115,7 +1115,7 @@
           <a:lstStyle/>
           <a:p>
             <a:r>
-              <a:t>N1: La clásica que mata en el examen y en la vida real. Al entrar hueles a gas fuerte. ¿Primer gesto?</a:t>
+              <a:t>N1: La clásica que mata en el examen y en la vida real. Escucha la pregunta y las cuatro opciones. Entras en una vivienda y hay un fuerte olor a gas, ¿qué haces primero? Opción A, apagar la luz para evitar chispas; opción B, encender una llama para localizar la fuga; opción C, ventilar y cerrar la llave de paso, sin tocar interruptores; opción D, llamar por el móvil desde dentro del recinto. Piénsalo un momento antes de seguir.</a:t>
             </a:r>
           </a:p>
           <a:p>
@@ -1190,12 +1190,12 @@
           <a:lstStyle/>
           <a:p>
             <a:r>
-              <a:t>N1: ¿Por qué ventilar y cerrar, y no apagar la luz?</a:t>
-            </a:r>
-          </a:p>
-          <a:p>
-            <a:r>
-              <a:t>N2: Porque accionar cualquier interruptor, encender o apagar, produce un chispazo que puede detonar la mezcla de aire y gas. Nada de llamas, nada de móvil dentro del recinto. Abres para ventilar y cierras la llave de paso. El truco: ante olor a gas, manos fuera de los interruptores.</a:t>
+              <a:t>N2: La respuesta correcta es la opción C: ventilar y cerrar la llave de paso, sin tocar interruptores. Accionar cualquier interruptor, encender o apagar, produce un chispazo que puede detonar la mezcla de aire y gas; y encender una llama o usar el móvil dentro del recinto es igual de peligroso. Por eso abres para ventilar y cierras la llave de paso. El truco: ante olor a gas, manos fuera de los interruptores.</a:t>
+            </a:r>
+          </a:p>
+          <a:p>
+            <a:r>
+              <a:t>N1: Ventila y cierra; lo demás, fuera.</a:t>
             </a:r>
           </a:p>
         </p:txBody>
@@ -1510,12 +1510,12 @@
           <a:lstStyle/>
           <a:p>
             <a:r>
-              <a:t>N1: Una de la frontera mágica. Tocas un tramo de más de un metro y le cambias el trazado. ¿Reparación o modificación?</a:t>
-            </a:r>
-          </a:p>
-          <a:p>
-            <a:r>
-              <a:t>N2: Acuérdate de dónde está la raya y de qué te obliga a probar cada lado.</a:t>
+              <a:t>N1: Una de la frontera mágica. Escucha la pregunta y las cuatro opciones. Actúas sobre un tramo de tubería de más de un metro cambiando su trazado, ¿qué es? Opción A, una reparación, compruebas solo el tramo; opción B, una modificación, con prueba completa según la UNE sesenta mil seiscientos setenta, parte ocho; opción C, un mantenimiento sin necesidad de prueba; opción D, una anulación de punto de consumo. Tómate un segundo y decide.</a:t>
+            </a:r>
+          </a:p>
+          <a:p>
+            <a:r>
+              <a:t>N2: Acuérdate de dónde está la raya, el metro, y de qué te obliga a probar cada lado.</a:t>
             </a:r>
           </a:p>
         </p:txBody>
@@ -1585,12 +1585,12 @@
           <a:lstStyle/>
           <a:p>
             <a:r>
-              <a:t>N1: ¿Por qué es modificación?</a:t>
-            </a:r>
-          </a:p>
-          <a:p>
-            <a:r>
-              <a:t>N2: Porque el metro es la frontera. Hasta un metro es reparación y compruebas solo el tramo. Por encima, con cambio de material o de trazado, o si amplías consumo, o si pones un aparato distinto, es modificación y toca prueba completa según la parte ocho. El truco: poco tubo, tramo; mucho tubo, prueba entera.</a:t>
+              <a:t>N2: La respuesta correcta es la opción B: una modificación, con prueba completa según la parte ocho de la norma. El metro es la frontera: hasta un metro es reparación y compruebas solo el tramo; por encima, con cambio de trazado o de material, o si amplías consumo, o si pones un aparato distinto, es modificación y toca prueba de estanquidad completa. El truco: poco tubo, tramo; mucho tubo, prueba entera.</a:t>
+            </a:r>
+          </a:p>
+          <a:p>
+            <a:r>
+              <a:t>N1: Ese metro lo cambia todo, no lo sueltes.</a:t>
             </a:r>
           </a:p>
         </p:txBody>
@@ -2811,12 +2811,12 @@
           <a:lstStyle/>
           <a:p>
             <a:r>
-              <a:t>N1: Vamos con una de reparto de papeles, que en el examen las cruzan sin piedad. ¿Quién puede retirar o colocar el contador de gas?</a:t>
-            </a:r>
-          </a:p>
-          <a:p>
-            <a:r>
-              <a:t>N2: Piensa de quién es el equipo de medida y quién manda en la parte de la red, no en la tubería de dentro de casa.</a:t>
+              <a:t>N1: Vamos con una de reparto de papeles, que en el examen las cruzan sin piedad. Escucha bien la pregunta y las cuatro opciones. ¿Quién puede retirar o colocar el contador de gas? Opción A, solo la empresa distribuidora; opción B, solo la empresa instaladora; opción C, el fabricante o el servicio técnico; opción D, cualquiera de las tres figuras. Párate un momento y quédate con tu respuesta.</a:t>
+            </a:r>
+          </a:p>
+          <a:p>
+            <a:r>
+              <a:t>N2: Pista: piensa de quién es el equipo de medida y quién manda en la parte de la red, no en la tubería de dentro de casa.</a:t>
             </a:r>
           </a:p>
         </p:txBody>
